--- a/courseware/202610_ADS_W06_Matrices_Sorting_Greedy.pptx
+++ b/courseware/202610_ADS_W06_Matrices_Sorting_Greedy.pptx
@@ -17,6 +17,9 @@
     <p:sldId id="265" r:id="rId11"/>
     <p:sldId id="266" r:id="rId12"/>
     <p:sldId id="267" r:id="rId13"/>
+    <p:sldId id="301" r:id="rId52"/>
+    <p:sldId id="302" r:id="rId53"/>
+    <p:sldId id="303" r:id="rId54"/>
     <p:sldId id="268" r:id="rId14"/>
     <p:sldId id="269" r:id="rId15"/>
     <p:sldId id="270" r:id="rId16"/>
@@ -676,6 +679,327 @@
 </p:notes>
 </file>
 
+<file path=ppt/notesSlides/notesSlide101.xml><?xml version="1.0" encoding="utf-8"?>
+<p:notes xmlns:a="http://schemas.openxmlformats.org/drawingml/2006/main" xmlns:r="http://schemas.openxmlformats.org/officeDocument/2006/relationships" xmlns:p="http://schemas.openxmlformats.org/presentationml/2006/main">
+  <p:cSld>
+    <p:spTree>
+      <p:nvGrpSpPr>
+        <p:cNvPr id="1" name=""/>
+        <p:cNvGrpSpPr/>
+        <p:nvPr/>
+      </p:nvGrpSpPr>
+      <p:grpSpPr>
+        <a:xfrm>
+          <a:off x="0" y="0"/>
+          <a:ext cx="0" cy="0"/>
+          <a:chOff x="0" y="0"/>
+          <a:chExt cx="0" cy="0"/>
+        </a:xfrm>
+      </p:grpSpPr>
+      <p:sp>
+        <p:nvSpPr>
+          <p:cNvPr id="2" name="Slide Image Placeholder 1"/>
+          <p:cNvSpPr>
+            <a:spLocks noGrp="1" noRot="1" noChangeAspect="1"/>
+          </p:cNvSpPr>
+          <p:nvPr>
+            <p:ph type="sldImg"/>
+          </p:nvPr>
+        </p:nvSpPr>
+        <p:spPr/>
+      </p:sp>
+      <p:sp>
+        <p:nvSpPr>
+          <p:cNvPr id="3" name="Notes Placeholder 2"/>
+          <p:cNvSpPr>
+            <a:spLocks noGrp="1"/>
+          </p:cNvSpPr>
+          <p:nvPr>
+            <p:ph type="body" idx="1"/>
+          </p:nvPr>
+        </p:nvSpPr>
+        <p:spPr/>
+        <p:txBody>
+          <a:bodyPr/>
+          <a:lstStyle/>
+          <a:p>
+            <a:r>
+              <a:rPr lang="zh-CN" dirty="0"/>
+              <a:t>先对比两种写法。经典写法是“按格子算”：固定 C[i][j]，把 k 项乘积一次加完，就是 A 的第 i 行与 B 的第 j 列做点积。</a:t>
+            </a:r>
+          </a:p>
+          <a:p>
+            <a:r>
+              <a:rPr lang="zh-CN" dirty="0"/>
+              <a:t>本页写法是“按行累加”：取 A[i][t] 这一个数 v，乘 B 的第 t 整行，累加到 C 的第 i 整行，一共 k 轮。</a:t>
+            </a:r>
+          </a:p>
+          <a:p>
+            <a:r>
+              <a:rPr lang="zh-CN" dirty="0"/>
+              <a:t>为什么结果一样：C[i][j] 本来就是 k 项之和，加法有交换律，一次加完和分 k 轮每次加一项，总和相同。</a:t>
+            </a:r>
+          </a:p>
+          <a:p>
+            <a:r>
+              <a:rPr lang="zh-CN" dirty="0"/>
+              <a:t>记忆句：C 的第 i 行 = Σₜ A[i][t] × （B 的第 t 行）。</a:t>
+            </a:r>
+          </a:p>
+        </p:txBody>
+      </p:sp>
+      <p:sp>
+        <p:nvSpPr>
+          <p:cNvPr id="4" name="Slide Number Placeholder 3"/>
+          <p:cNvSpPr>
+            <a:spLocks noGrp="1"/>
+          </p:cNvSpPr>
+          <p:nvPr>
+            <p:ph type="sldNum" sz="quarter" idx="10"/>
+          </p:nvPr>
+        </p:nvSpPr>
+        <p:spPr/>
+        <p:txBody>
+          <a:bodyPr/>
+          <a:lstStyle/>
+          <a:p>
+            <a:fld id="{F7021451-1387-4CA6-816F-3879F97B5CBC}" type="slidenum">
+              <a:rPr lang="en-US"/>
+              <a:t>13</a:t>
+            </a:fld>
+            <a:endParaRPr lang="en-US"/>
+          </a:p>
+        </p:txBody>
+      </p:sp>
+    </p:spTree>
+    <p:extLst>
+      <p:ext uri="{BB962C8B-B14F-4D97-AF65-F5344CB8AC3E}">
+        <p14:creationId xmlns:p14="http://schemas.microsoft.com/office/powerpoint/2010/main" val="1024087092"/>
+      </p:ext>
+    </p:extLst>
+  </p:cSld>
+  <p:clrMapOvr>
+    <a:masterClrMapping/>
+  </p:clrMapOvr>
+</p:notes>
+</file>
+
+<file path=ppt/notesSlides/notesSlide102.xml><?xml version="1.0" encoding="utf-8"?>
+<p:notes xmlns:a="http://schemas.openxmlformats.org/drawingml/2006/main" xmlns:r="http://schemas.openxmlformats.org/officeDocument/2006/relationships" xmlns:p="http://schemas.openxmlformats.org/presentationml/2006/main">
+  <p:cSld>
+    <p:spTree>
+      <p:nvGrpSpPr>
+        <p:cNvPr id="1" name=""/>
+        <p:cNvGrpSpPr/>
+        <p:nvPr/>
+      </p:nvGrpSpPr>
+      <p:grpSpPr>
+        <a:xfrm>
+          <a:off x="0" y="0"/>
+          <a:ext cx="0" cy="0"/>
+          <a:chOff x="0" y="0"/>
+          <a:chExt cx="0" cy="0"/>
+        </a:xfrm>
+      </p:grpSpPr>
+      <p:sp>
+        <p:nvSpPr>
+          <p:cNvPr id="2" name="Slide Image Placeholder 1"/>
+          <p:cNvSpPr>
+            <a:spLocks noGrp="1" noRot="1" noChangeAspect="1"/>
+          </p:cNvSpPr>
+          <p:nvPr>
+            <p:ph type="sldImg"/>
+          </p:nvPr>
+        </p:nvSpPr>
+        <p:spPr/>
+      </p:sp>
+      <p:sp>
+        <p:nvSpPr>
+          <p:cNvPr id="3" name="Notes Placeholder 2"/>
+          <p:cNvSpPr>
+            <a:spLocks noGrp="1"/>
+          </p:cNvSpPr>
+          <p:nvPr>
+            <p:ph type="body" idx="1"/>
+          </p:nvPr>
+        </p:nvSpPr>
+        <p:spPr/>
+        <p:txBody>
+          <a:bodyPr/>
+          <a:lstStyle/>
+          <a:p>
+            <a:r>
+              <a:rPr lang="zh-CN" dirty="0"/>
+              <a:t>带着学生手算一遍。A=[[1,2],[3,4]]，B=[[5,6],[7,8]]。</a:t>
+            </a:r>
+          </a:p>
+          <a:p>
+            <a:r>
+              <a:rPr lang="zh-CN" dirty="0"/>
+              <a:t>i=0：Ci 从 [0,0] 开始。t=0 时 v=1，Bt=[5,6]，Ci 变成 [5,6]；t=1 时 v=2，Bt=[7,8]，加上 [14,16]，得 [19,22]，这就是 C 的第 0 行。</a:t>
+            </a:r>
+          </a:p>
+          <a:p>
+            <a:r>
+              <a:rPr lang="zh-CN" dirty="0"/>
+              <a:t>i=1：换新的 Ci，又从 [0,0] 开始。t=0 时 v=3，加 [15,18]；t=1 时 v=4，加 [28,32]，得 [43,50]。</a:t>
+            </a:r>
+          </a:p>
+          <a:p>
+            <a:r>
+              <a:rPr lang="zh-CN" dirty="0"/>
+              <a:t>强调：Ci 是每一轮累加出来的，不是每次重新算；每个 i 结束时，Ci 就是 C 的完整一行。</a:t>
+            </a:r>
+          </a:p>
+        </p:txBody>
+      </p:sp>
+      <p:sp>
+        <p:nvSpPr>
+          <p:cNvPr id="4" name="Slide Number Placeholder 3"/>
+          <p:cNvSpPr>
+            <a:spLocks noGrp="1"/>
+          </p:cNvSpPr>
+          <p:nvPr>
+            <p:ph type="sldNum" sz="quarter" idx="10"/>
+          </p:nvPr>
+        </p:nvSpPr>
+        <p:spPr/>
+        <p:txBody>
+          <a:bodyPr/>
+          <a:lstStyle/>
+          <a:p>
+            <a:fld id="{F7021451-1387-4CA6-816F-3879F97B5CBC}" type="slidenum">
+              <a:rPr lang="en-US"/>
+              <a:t>14</a:t>
+            </a:fld>
+            <a:endParaRPr lang="en-US"/>
+          </a:p>
+        </p:txBody>
+      </p:sp>
+    </p:spTree>
+    <p:extLst>
+      <p:ext uri="{BB962C8B-B14F-4D97-AF65-F5344CB8AC3E}">
+        <p14:creationId xmlns:p14="http://schemas.microsoft.com/office/powerpoint/2010/main" val="1024087093"/>
+      </p:ext>
+    </p:extLst>
+  </p:cSld>
+  <p:clrMapOvr>
+    <a:masterClrMapping/>
+  </p:clrMapOvr>
+</p:notes>
+</file>
+
+<file path=ppt/notesSlides/notesSlide103.xml><?xml version="1.0" encoding="utf-8"?>
+<p:notes xmlns:a="http://schemas.openxmlformats.org/drawingml/2006/main" xmlns:r="http://schemas.openxmlformats.org/officeDocument/2006/relationships" xmlns:p="http://schemas.openxmlformats.org/presentationml/2006/main">
+  <p:cSld>
+    <p:spTree>
+      <p:nvGrpSpPr>
+        <p:cNvPr id="1" name=""/>
+        <p:cNvGrpSpPr/>
+        <p:nvPr/>
+      </p:nvGrpSpPr>
+      <p:grpSpPr>
+        <a:xfrm>
+          <a:off x="0" y="0"/>
+          <a:ext cx="0" cy="0"/>
+          <a:chOff x="0" y="0"/>
+          <a:chExt cx="0" cy="0"/>
+        </a:xfrm>
+      </p:grpSpPr>
+      <p:sp>
+        <p:nvSpPr>
+          <p:cNvPr id="2" name="Slide Image Placeholder 1"/>
+          <p:cNvSpPr>
+            <a:spLocks noGrp="1" noRot="1" noChangeAspect="1"/>
+          </p:cNvSpPr>
+          <p:nvPr>
+            <p:ph type="sldImg"/>
+          </p:nvPr>
+        </p:nvSpPr>
+        <p:spPr/>
+      </p:sp>
+      <p:sp>
+        <p:nvSpPr>
+          <p:cNvPr id="3" name="Notes Placeholder 2"/>
+          <p:cNvSpPr>
+            <a:spLocks noGrp="1"/>
+          </p:cNvSpPr>
+          <p:nvPr>
+            <p:ph type="body" idx="1"/>
+          </p:nvPr>
+        </p:nvSpPr>
+        <p:spPr/>
+        <p:txBody>
+          <a:bodyPr/>
+          <a:lstStyle/>
+          <a:p>
+            <a:r>
+              <a:rPr lang="zh-CN" dirty="0"/>
+              <a:t>三个优化技巧，都只是常数优化。</a:t>
+            </a:r>
+          </a:p>
+          <a:p>
+            <a:r>
+              <a:rPr lang="zh-CN" dirty="0"/>
+              <a:t>1. 局部变量：Ai=A[i]、Ci=C[i]、Bt,v=B[t],Ai[t]，内层只剩一维索引。Ci 和 C[i] 是同一个列表，改 Ci 就是改 C。</a:t>
+            </a:r>
+          </a:p>
+          <a:p>
+            <a:r>
+              <a:rPr lang="zh-CN" dirty="0"/>
+              <a:t>2. 跳过 0：A[i][t]=0 时这一轮加的全是 0，直接跳过内层 n 次循环；矩阵 0 多时更明显。</a:t>
+            </a:r>
+          </a:p>
+          <a:p>
+            <a:r>
+              <a:rPr lang="zh-CN" dirty="0"/>
+              <a:t>3. 按行连续访问：内层沿着 B 的一行走，比在列上跳着读更顺。</a:t>
+            </a:r>
+          </a:p>
+          <a:p>
+            <a:r>
+              <a:rPr lang="zh-CN" dirty="0"/>
+              <a:t>最后强调两点：复杂度仍是 O(m·k·n)，n=1000 时约 10⁹，Python 必然 TLE；这段代码默认 len(A[0]) == len(B)，做 E18161 要先判断维度，不匹配输出 Error!。</a:t>
+            </a:r>
+          </a:p>
+        </p:txBody>
+      </p:sp>
+      <p:sp>
+        <p:nvSpPr>
+          <p:cNvPr id="4" name="Slide Number Placeholder 3"/>
+          <p:cNvSpPr>
+            <a:spLocks noGrp="1"/>
+          </p:cNvSpPr>
+          <p:nvPr>
+            <p:ph type="sldNum" sz="quarter" idx="10"/>
+          </p:nvPr>
+        </p:nvSpPr>
+        <p:spPr/>
+        <p:txBody>
+          <a:bodyPr/>
+          <a:lstStyle/>
+          <a:p>
+            <a:fld id="{F7021451-1387-4CA6-816F-3879F97B5CBC}" type="slidenum">
+              <a:rPr lang="en-US"/>
+              <a:t>15</a:t>
+            </a:fld>
+            <a:endParaRPr lang="en-US"/>
+          </a:p>
+        </p:txBody>
+      </p:sp>
+    </p:spTree>
+    <p:extLst>
+      <p:ext uri="{BB962C8B-B14F-4D97-AF65-F5344CB8AC3E}">
+        <p14:creationId xmlns:p14="http://schemas.microsoft.com/office/powerpoint/2010/main" val="1024087094"/>
+      </p:ext>
+    </p:extLst>
+  </p:cSld>
+  <p:clrMapOvr>
+    <a:masterClrMapping/>
+  </p:clrMapOvr>
+</p:notes>
+</file>
+
 <file path=ppt/notesSlides/notesSlide11.xml><?xml version="1.0" encoding="utf-8"?>
 <p:notes xmlns:a="http://schemas.openxmlformats.org/drawingml/2006/main" xmlns:r="http://schemas.openxmlformats.org/officeDocument/2006/relationships" xmlns:p="http://schemas.openxmlformats.org/presentationml/2006/main">
   <p:cSld>
@@ -809,10 +1133,21 @@
           <a:lstStyle/>
           <a:p>
             <a:r>
-              <a:rPr lang="en-US" dirty="0"/>
-              <a:t/>
-            </a:r>
-            <a:endParaRPr lang="en-US" dirty="0"/>
+              <a:rPr lang="zh-CN" dirty="0"/>
+              <a:t>这页代码的特别之处：三层循环的顺序是 i→t→j，不是常见的 i→j→t。先让大家看代码，问一句“内层循环在干什么”：拿 A[i][t] 这一个数 v，去乘 B 的第 t 整行，累加到 C 的第 i 整行。</a:t>
+            </a:r>
+          </a:p>
+          <a:p>
+            <a:r>
+              <a:rPr lang="zh-CN" dirty="0"/>
+              <a:t>注释里的两个小技巧（提出 Ai/Ci、跳过零）下面第 15 页展开。右侧两张卡片：复杂度 O(m·k·n)；E18161 要先判断维度，不匹配输出 Error!。</a:t>
+            </a:r>
+          </a:p>
+          <a:p>
+            <a:r>
+              <a:rPr lang="zh-CN" dirty="0"/>
+              <a:t>接下来三页：13 页讲为什么能换顺序，14 页手算追踪，15 页讲优化技巧和注意事项。</a:t>
+            </a:r>
           </a:p>
         </p:txBody>
       </p:sp>
@@ -8590,6 +8925,105 @@
           </a:p>
         </p:txBody>
       </p:sp>
+      <p:sp>
+        <p:nvSpPr>
+          <p:cNvPr id="224" name="Shape 224"/>
+          <p:cNvSpPr/>
+          <p:nvPr/>
+        </p:nvSpPr>
+        <p:spPr>
+          <a:xfrm>
+            <a:off x="457200" y="3900000"/>
+            <a:ext cx="8229600" cy="800000"/>
+          </a:xfrm>
+          <a:prstGeom prst="roundRect">
+            <a:avLst>
+              <a:gd name="adj" fmla="val 4000"/>
+            </a:avLst>
+          </a:prstGeom>
+          <a:solidFill>
+            <a:srgbClr val="CFE0D8"/>
+          </a:solidFill>
+          <a:ln>
+            <a:noFill/>
+          </a:ln>
+        </p:spPr>
+      </p:sp>
+      <p:sp>
+        <p:nvSpPr>
+          <p:cNvPr id="225" name="Text 225"/>
+          <p:cNvSpPr txBox="1"/>
+          <p:nvPr/>
+        </p:nvSpPr>
+        <p:spPr>
+          <a:xfrm>
+            <a:off x="607200" y="3950000"/>
+            <a:ext cx="7929600" cy="700000"/>
+          </a:xfrm>
+          <a:prstGeom prst="rect">
+            <a:avLst/>
+          </a:prstGeom>
+          <a:noFill/>
+          <a:ln>
+            <a:noFill/>
+          </a:ln>
+        </p:spPr>
+        <p:txBody>
+          <a:bodyPr wrap="square" lIns="0" tIns="0" rIns="0" bIns="0" rtlCol="0" anchor="ctr">
+            <a:normAutofit/>
+          </a:bodyPr>
+          <a:lstStyle/>
+          <a:p>
+            <a:pPr algn="l" indent="0" marL="0">
+              <a:spcAft>
+                <a:spcPts val="500"/>
+              </a:spcAft>
+              <a:buNone/>
+            </a:pPr>
+            <a:r>
+              <a:rPr lang="zh-CN" sz="1100" b="1" dirty="0">
+                <a:solidFill>
+                  <a:srgbClr val="1E3D34"/>
+                </a:solidFill>
+                <a:latin typeface="Microsoft YaHei"/>
+                <a:ea typeface="Microsoft YaHei"/>
+                <a:cs typeface="Microsoft YaHei"/>
+              </a:rPr>
+              <a:t xml:space="preserve">一句话：</a:t>
+            </a:r>
+            <a:r>
+              <a:rPr lang="zh-CN" sz="1100" dirty="0">
+                <a:solidFill>
+                  <a:srgbClr val="2B2B2B"/>
+                </a:solidFill>
+                <a:latin typeface="Microsoft YaHei"/>
+                <a:ea typeface="Microsoft YaHei"/>
+                <a:cs typeface="Microsoft YaHei"/>
+              </a:rPr>
+              <a:t xml:space="preserve">换成 i→t→j 的顺序，“算一个格子”变成“拿 A 的一个数乘 B 的一整行，累加到 C 的一整行”。</a:t>
+            </a:r>
+          </a:p>
+          <a:p>
+            <a:pPr algn="l" indent="0" marL="0">
+              <a:spcAft>
+                <a:spcPts val="0"/>
+              </a:spcAft>
+              <a:buNone/>
+            </a:pPr>
+            <a:r>
+              <a:rPr lang="zh-CN" sz="1050" dirty="0">
+                <a:solidFill>
+                  <a:srgbClr val="3E7C68"/>
+                </a:solidFill>
+                <a:latin typeface="Microsoft YaHei"/>
+                <a:ea typeface="Microsoft YaHei"/>
+                <a:cs typeface="Microsoft YaHei"/>
+              </a:rPr>
+              <a:t xml:space="preserve">→ 下面 3 页：循环顺序对比、手算追踪、三个优化技巧</a:t>
+            </a:r>
+          </a:p>
+        </p:txBody>
+      </p:sp>
     </p:spTree>
   </p:cSld>
   <p:clrMapOvr>
@@ -8792,7 +9226,7 @@
                 <a:ea typeface="Microsoft YaHei" pitchFamily="34" charset="-122"/>
                 <a:cs typeface="Microsoft YaHei" pitchFamily="34" charset="-120"/>
               </a:rPr>
-              <a:t>13</a:t>
+              <a:t>16</a:t>
             </a:r>
             <a:endParaRPr lang="en-US" sz="900" dirty="0"/>
           </a:p>
@@ -9507,7 +9941,7 @@
                 <a:ea typeface="Microsoft YaHei" pitchFamily="34" charset="-122"/>
                 <a:cs typeface="Microsoft YaHei" pitchFamily="34" charset="-120"/>
               </a:rPr>
-              <a:t>14</a:t>
+              <a:t>17</a:t>
             </a:r>
             <a:endParaRPr lang="en-US" sz="900" dirty="0"/>
           </a:p>
@@ -10954,7 +11388,7 @@
                 <a:ea typeface="Microsoft YaHei" pitchFamily="34" charset="-122"/>
                 <a:cs typeface="Microsoft YaHei" pitchFamily="34" charset="-120"/>
               </a:rPr>
-              <a:t>16</a:t>
+              <a:t>19</a:t>
             </a:r>
             <a:endParaRPr lang="en-US" sz="900" dirty="0"/>
           </a:p>
@@ -11557,7 +11991,7 @@
                 <a:ea typeface="Microsoft YaHei" pitchFamily="34" charset="-122"/>
                 <a:cs typeface="Microsoft YaHei" pitchFamily="34" charset="-120"/>
               </a:rPr>
-              <a:t>17</a:t>
+              <a:t>20</a:t>
             </a:r>
             <a:endParaRPr lang="en-US" sz="900" dirty="0"/>
           </a:p>
@@ -12086,7 +12520,7 @@
                 <a:ea typeface="Microsoft YaHei" pitchFamily="34" charset="-122"/>
                 <a:cs typeface="Microsoft YaHei" pitchFamily="34" charset="-120"/>
               </a:rPr>
-              <a:t>18</a:t>
+              <a:t>21</a:t>
             </a:r>
             <a:endParaRPr lang="en-US" sz="900" dirty="0"/>
           </a:p>
@@ -14935,7 +15369,7 @@
                 <a:ea typeface="Microsoft YaHei" pitchFamily="34" charset="-122"/>
                 <a:cs typeface="Microsoft YaHei" pitchFamily="34" charset="-120"/>
               </a:rPr>
-              <a:t>19</a:t>
+              <a:t>22</a:t>
             </a:r>
             <a:endParaRPr lang="en-US" sz="900" dirty="0"/>
           </a:p>
@@ -16801,7 +17235,7 @@
                 <a:ea typeface="Microsoft YaHei" pitchFamily="34" charset="-122"/>
                 <a:cs typeface="Microsoft YaHei" pitchFamily="34" charset="-120"/>
               </a:rPr>
-              <a:t>20</a:t>
+              <a:t>23</a:t>
             </a:r>
             <a:endParaRPr lang="en-US" sz="900" dirty="0"/>
           </a:p>
@@ -17756,7 +18190,7 @@
                 <a:ea typeface="Microsoft YaHei" pitchFamily="34" charset="-122"/>
                 <a:cs typeface="Microsoft YaHei" pitchFamily="34" charset="-120"/>
               </a:rPr>
-              <a:t>21</a:t>
+              <a:t>24</a:t>
             </a:r>
             <a:endParaRPr lang="en-US" sz="900" dirty="0"/>
           </a:p>
@@ -18313,7 +18747,7 @@
                 <a:ea typeface="Microsoft YaHei" pitchFamily="34" charset="-122"/>
                 <a:cs typeface="Microsoft YaHei" pitchFamily="34" charset="-120"/>
               </a:rPr>
-              <a:t>22</a:t>
+              <a:t>25</a:t>
             </a:r>
             <a:endParaRPr lang="en-US" sz="900" dirty="0"/>
           </a:p>
@@ -19057,7 +19491,7 @@
                 <a:ea typeface="Microsoft YaHei" pitchFamily="34" charset="-122"/>
                 <a:cs typeface="Microsoft YaHei" pitchFamily="34" charset="-120"/>
               </a:rPr>
-              <a:t>23</a:t>
+              <a:t>26</a:t>
             </a:r>
             <a:endParaRPr lang="en-US" sz="900" dirty="0"/>
           </a:p>
@@ -20369,7 +20803,7 @@
                 <a:ea typeface="Microsoft YaHei" pitchFamily="34" charset="-122"/>
                 <a:cs typeface="Microsoft YaHei" pitchFamily="34" charset="-120"/>
               </a:rPr>
-              <a:t>25</a:t>
+              <a:t>28</a:t>
             </a:r>
             <a:endParaRPr lang="en-US" sz="900" dirty="0"/>
           </a:p>
@@ -21188,7 +21622,7 @@
                 <a:ea typeface="Microsoft YaHei" pitchFamily="34" charset="-122"/>
                 <a:cs typeface="Microsoft YaHei" pitchFamily="34" charset="-120"/>
               </a:rPr>
-              <a:t>26</a:t>
+              <a:t>29</a:t>
             </a:r>
             <a:endParaRPr lang="en-US" sz="900" dirty="0"/>
           </a:p>
@@ -21869,7 +22303,7 @@
                 <a:ea typeface="Microsoft YaHei" pitchFamily="34" charset="-122"/>
                 <a:cs typeface="Microsoft YaHei" pitchFamily="34" charset="-120"/>
               </a:rPr>
-              <a:t>27</a:t>
+              <a:t>30</a:t>
             </a:r>
             <a:endParaRPr lang="en-US" sz="900" dirty="0"/>
           </a:p>
@@ -23274,7 +23708,7 @@
                 <a:ea typeface="Microsoft YaHei" pitchFamily="34" charset="-122"/>
                 <a:cs typeface="Microsoft YaHei" pitchFamily="34" charset="-120"/>
               </a:rPr>
-              <a:t>28</a:t>
+              <a:t>31</a:t>
             </a:r>
             <a:endParaRPr lang="en-US" sz="900" dirty="0"/>
           </a:p>
@@ -23926,7 +24360,7 @@
                 <a:ea typeface="Microsoft YaHei" pitchFamily="34" charset="-122"/>
                 <a:cs typeface="Microsoft YaHei" pitchFamily="34" charset="-120"/>
               </a:rPr>
-              <a:t>29</a:t>
+              <a:t>32</a:t>
             </a:r>
             <a:endParaRPr lang="en-US" sz="900" dirty="0"/>
           </a:p>
@@ -25542,7 +25976,7 @@
                 <a:ea typeface="Microsoft YaHei" pitchFamily="34" charset="-122"/>
                 <a:cs typeface="Microsoft YaHei" pitchFamily="34" charset="-120"/>
               </a:rPr>
-              <a:t>30</a:t>
+              <a:t>33</a:t>
             </a:r>
             <a:endParaRPr lang="en-US" sz="900" dirty="0"/>
           </a:p>
@@ -26457,7 +26891,7 @@
                 <a:ea typeface="Microsoft YaHei" pitchFamily="34" charset="-122"/>
                 <a:cs typeface="Microsoft YaHei" pitchFamily="34" charset="-120"/>
               </a:rPr>
-              <a:t>31</a:t>
+              <a:t>34</a:t>
             </a:r>
             <a:endParaRPr lang="en-US" sz="900" dirty="0"/>
           </a:p>
@@ -27115,7 +27549,7 @@
                 <a:ea typeface="Microsoft YaHei" pitchFamily="34" charset="-122"/>
                 <a:cs typeface="Microsoft YaHei" pitchFamily="34" charset="-120"/>
               </a:rPr>
-              <a:t>32</a:t>
+              <a:t>35</a:t>
             </a:r>
             <a:endParaRPr lang="en-US" sz="900" dirty="0"/>
           </a:p>
@@ -30327,7 +30761,7 @@
                 <a:ea typeface="Microsoft YaHei" pitchFamily="34" charset="-122"/>
                 <a:cs typeface="Microsoft YaHei" pitchFamily="34" charset="-120"/>
               </a:rPr>
-              <a:t>33</a:t>
+              <a:t>36</a:t>
             </a:r>
             <a:endParaRPr lang="en-US" sz="900" dirty="0"/>
           </a:p>
@@ -31176,7 +31610,7 @@
                 <a:ea typeface="Microsoft YaHei" pitchFamily="34" charset="-122"/>
                 <a:cs typeface="Microsoft YaHei" pitchFamily="34" charset="-120"/>
               </a:rPr>
-              <a:t>34</a:t>
+              <a:t>37</a:t>
             </a:r>
             <a:endParaRPr lang="en-US" sz="900" dirty="0"/>
           </a:p>
@@ -31715,7 +32149,7 @@
                 <a:ea typeface="Microsoft YaHei" pitchFamily="34" charset="-122"/>
                 <a:cs typeface="Microsoft YaHei" pitchFamily="34" charset="-120"/>
               </a:rPr>
-              <a:t>35</a:t>
+              <a:t>38</a:t>
             </a:r>
             <a:endParaRPr lang="en-US" sz="900" dirty="0"/>
           </a:p>
@@ -32794,7 +33228,7 @@
                 <a:ea typeface="Microsoft YaHei" pitchFamily="34" charset="-122"/>
                 <a:cs typeface="Microsoft YaHei" pitchFamily="34" charset="-120"/>
               </a:rPr>
-              <a:t>36</a:t>
+              <a:t>39</a:t>
             </a:r>
             <a:endParaRPr lang="en-US" sz="900" dirty="0"/>
           </a:p>
@@ -33498,7 +33932,7 @@
                 <a:ea typeface="Microsoft YaHei" pitchFamily="34" charset="-122"/>
                 <a:cs typeface="Microsoft YaHei" pitchFamily="34" charset="-120"/>
               </a:rPr>
-              <a:t>37</a:t>
+              <a:t>40</a:t>
             </a:r>
             <a:endParaRPr lang="en-US" sz="900" dirty="0"/>
           </a:p>
@@ -34605,7 +35039,7 @@
                 <a:ea typeface="Microsoft YaHei" pitchFamily="34" charset="-122"/>
                 <a:cs typeface="Microsoft YaHei" pitchFamily="34" charset="-120"/>
               </a:rPr>
-              <a:t>38</a:t>
+              <a:t>41</a:t>
             </a:r>
             <a:endParaRPr lang="en-US" sz="900" dirty="0"/>
           </a:p>
@@ -37685,7 +38119,7 @@
                 <a:ea typeface="Microsoft YaHei" pitchFamily="34" charset="-122"/>
                 <a:cs typeface="Microsoft YaHei" pitchFamily="34" charset="-120"/>
               </a:rPr>
-              <a:t>40</a:t>
+              <a:t>43</a:t>
             </a:r>
             <a:endParaRPr lang="en-US" sz="900" dirty="0"/>
           </a:p>
@@ -38580,7 +39014,7 @@
                 <a:ea typeface="Microsoft YaHei" pitchFamily="34" charset="-122"/>
                 <a:cs typeface="Microsoft YaHei" pitchFamily="34" charset="-120"/>
               </a:rPr>
-              <a:t>41</a:t>
+              <a:t>44</a:t>
             </a:r>
             <a:endParaRPr lang="en-US" sz="900" dirty="0"/>
           </a:p>
@@ -40041,7 +40475,7 @@
                 <a:ea typeface="Microsoft YaHei" pitchFamily="34" charset="-122"/>
                 <a:cs typeface="Microsoft YaHei" pitchFamily="34" charset="-120"/>
               </a:rPr>
-              <a:t>42</a:t>
+              <a:t>45</a:t>
             </a:r>
             <a:endParaRPr lang="en-US" sz="900" dirty="0"/>
           </a:p>
@@ -43334,7 +43768,7 @@
                 <a:ea typeface="Microsoft YaHei" pitchFamily="34" charset="-122"/>
                 <a:cs typeface="Microsoft YaHei" pitchFamily="34" charset="-120"/>
               </a:rPr>
-              <a:t>43</a:t>
+              <a:t>46</a:t>
             </a:r>
             <a:endParaRPr lang="en-US" sz="900" dirty="0"/>
           </a:p>
@@ -45577,6 +46011,5385 @@
               <a:t>栈与队列 · 单调栈 · 单调队列</a:t>
             </a:r>
             <a:endParaRPr lang="en-US" sz="1300" dirty="0"/>
+          </a:p>
+        </p:txBody>
+      </p:sp>
+    </p:spTree>
+  </p:cSld>
+  <p:clrMapOvr>
+    <a:masterClrMapping/>
+  </p:clrMapOvr>
+</p:sld>
+</file>
+
+<file path=ppt/slides/slide46.xml><?xml version="1.0" encoding="utf-8"?>
+<p:sld xmlns:a="http://schemas.openxmlformats.org/drawingml/2006/main" xmlns:r="http://schemas.openxmlformats.org/officeDocument/2006/relationships" xmlns:p="http://schemas.openxmlformats.org/presentationml/2006/main">
+  <p:cSld name="Slide 12">
+    <p:bg>
+      <p:bgPr>
+        <a:solidFill>
+          <a:srgbClr val="FFFFFF"/>
+        </a:solidFill>
+      </p:bgPr>
+    </p:bg>
+    <p:spTree>
+      <p:nvGrpSpPr>
+        <p:cNvPr id="1" name=""/>
+        <p:cNvGrpSpPr/>
+        <p:nvPr/>
+      </p:nvGrpSpPr>
+      <p:grpSpPr>
+        <a:xfrm>
+          <a:off x="0" y="0"/>
+          <a:ext cx="0" cy="0"/>
+          <a:chOff x="0" y="0"/>
+          <a:chExt cx="0" cy="0"/>
+        </a:xfrm>
+      </p:grpSpPr>
+      <p:sp>
+        <p:nvSpPr>
+          <p:cNvPr id="2" name="Shape 0"/>
+          <p:cNvSpPr/>
+          <p:nvPr/>
+        </p:nvSpPr>
+        <p:spPr>
+          <a:xfrm>
+            <a:off x="365760" y="256032"/>
+            <a:ext cx="475488" cy="475488"/>
+          </a:xfrm>
+          <a:prstGeom prst="ellipse">
+            <a:avLst/>
+          </a:prstGeom>
+          <a:solidFill>
+            <a:srgbClr val="1E3D34"/>
+          </a:solidFill>
+          <a:ln/>
+        </p:spPr>
+      </p:sp>
+      <p:sp>
+        <p:nvSpPr>
+          <p:cNvPr id="3" name="Text 1"/>
+          <p:cNvSpPr txBox="1"/>
+          <p:nvPr/>
+        </p:nvSpPr>
+        <p:spPr>
+          <a:xfrm>
+            <a:off x="365760" y="256032"/>
+            <a:ext cx="475488" cy="475488"/>
+          </a:xfrm>
+          <a:prstGeom prst="rect">
+            <a:avLst/>
+          </a:prstGeom>
+          <a:noFill/>
+          <a:ln/>
+        </p:spPr>
+        <p:txBody>
+          <a:bodyPr wrap="square" lIns="0" tIns="0" rIns="0" bIns="0" rtlCol="0" anchor="ctr"/>
+          <a:lstStyle/>
+          <a:p>
+            <a:pPr algn="ctr" indent="0" marL="0">
+              <a:buNone/>
+            </a:pPr>
+            <a:r>
+              <a:rPr lang="en-US" sz="1100" b="1" dirty="0">
+                <a:solidFill>
+                  <a:srgbClr val="F2B134"/>
+                </a:solidFill>
+                <a:latin typeface="Microsoft YaHei" pitchFamily="34" charset="0"/>
+                <a:ea typeface="Microsoft YaHei" pitchFamily="34" charset="-122"/>
+                <a:cs typeface="Microsoft YaHei" pitchFamily="34" charset="-120"/>
+              </a:rPr>
+              <a:t>1.4</a:t>
+            </a:r>
+            <a:endParaRPr lang="en-US" sz="1100" dirty="0"/>
+          </a:p>
+        </p:txBody>
+      </p:sp>
+      <p:sp>
+        <p:nvSpPr>
+          <p:cNvPr id="4" name="Text 2"/>
+          <p:cNvSpPr txBox="1"/>
+          <p:nvPr/>
+        </p:nvSpPr>
+        <p:spPr>
+          <a:xfrm>
+            <a:off x="960120" y="219456"/>
+            <a:ext cx="6858000" cy="228600"/>
+          </a:xfrm>
+          <a:prstGeom prst="rect">
+            <a:avLst/>
+          </a:prstGeom>
+          <a:noFill/>
+          <a:ln/>
+        </p:spPr>
+        <p:txBody>
+          <a:bodyPr wrap="square" lIns="0" tIns="0" rIns="0" bIns="0" rtlCol="0" anchor="t"/>
+          <a:lstStyle/>
+          <a:p>
+            <a:pPr algn="l" indent="0" marL="0">
+              <a:buNone/>
+            </a:pPr>
+            <a:r>
+              <a:rPr lang="en-US" sz="900" b="1" dirty="0">
+                <a:solidFill>
+                  <a:srgbClr val="3E7C68"/>
+                </a:solidFill>
+                <a:latin typeface="Microsoft YaHei" pitchFamily="34" charset="0"/>
+                <a:ea typeface="Microsoft YaHei" pitchFamily="34" charset="-122"/>
+                <a:cs typeface="Microsoft YaHei" pitchFamily="34" charset="-120"/>
+              </a:rPr>
+              <a:t>1 矩阵 · 矩阵乘法</a:t>
+            </a:r>
+            <a:endParaRPr lang="en-US" sz="900" dirty="0"/>
+          </a:p>
+        </p:txBody>
+      </p:sp>
+      <p:sp>
+        <p:nvSpPr>
+          <p:cNvPr id="5" name="Text 3"/>
+          <p:cNvSpPr txBox="1"/>
+          <p:nvPr/>
+        </p:nvSpPr>
+        <p:spPr>
+          <a:xfrm>
+            <a:off x="960120" y="420624"/>
+            <a:ext cx="7772400" cy="384048"/>
+          </a:xfrm>
+          <a:prstGeom prst="rect">
+            <a:avLst/>
+          </a:prstGeom>
+          <a:noFill/>
+          <a:ln/>
+        </p:spPr>
+        <p:txBody>
+          <a:bodyPr wrap="square" lIns="0" tIns="0" rIns="0" bIns="0" rtlCol="0" anchor="t"/>
+          <a:lstStyle/>
+          <a:p>
+            <a:pPr algn="l" indent="0" marL="0">
+              <a:buNone/>
+            </a:pPr>
+            <a:r>
+              <a:rPr lang="en-US" sz="2000" b="1" dirty="0">
+                <a:solidFill>
+                  <a:srgbClr val="1E3D34"/>
+                </a:solidFill>
+                <a:latin typeface="Microsoft YaHei" pitchFamily="34" charset="0"/>
+                <a:ea typeface="Microsoft YaHei" pitchFamily="34" charset="-122"/>
+                <a:cs typeface="Microsoft YaHei" pitchFamily="34" charset="-120"/>
+              </a:rPr>
+              <a:t>先搞懂：循环顺序为什么能换</a:t>
+            </a:r>
+            <a:endParaRPr lang="en-US" sz="2000" dirty="0"/>
+          </a:p>
+        </p:txBody>
+      </p:sp>
+      <p:sp>
+        <p:nvSpPr>
+          <p:cNvPr id="6" name="Text 4"/>
+          <p:cNvSpPr txBox="1"/>
+          <p:nvPr/>
+        </p:nvSpPr>
+        <p:spPr>
+          <a:xfrm>
+            <a:off x="8503920" y="4828032"/>
+            <a:ext cx="457200" cy="228600"/>
+          </a:xfrm>
+          <a:prstGeom prst="rect">
+            <a:avLst/>
+          </a:prstGeom>
+          <a:noFill/>
+          <a:ln/>
+        </p:spPr>
+        <p:txBody>
+          <a:bodyPr wrap="square" lIns="0" tIns="0" rIns="0" bIns="0" rtlCol="0" anchor="t"/>
+          <a:lstStyle/>
+          <a:p>
+            <a:pPr algn="r" indent="0" marL="0">
+              <a:buNone/>
+            </a:pPr>
+            <a:r>
+              <a:rPr lang="en-US" sz="900" dirty="0">
+                <a:solidFill>
+                  <a:srgbClr val="6B7B74"/>
+                </a:solidFill>
+                <a:latin typeface="Microsoft YaHei" pitchFamily="34" charset="0"/>
+                <a:ea typeface="Microsoft YaHei" pitchFamily="34" charset="-122"/>
+                <a:cs typeface="Microsoft YaHei" pitchFamily="34" charset="-120"/>
+              </a:rPr>
+              <a:t>13</a:t>
+            </a:r>
+            <a:endParaRPr lang="en-US" sz="900" dirty="0"/>
+          </a:p>
+        </p:txBody>
+      </p:sp>
+      <p:sp>
+        <p:nvSpPr>
+          <p:cNvPr id="101" name="Shape 101"/>
+          <p:cNvSpPr/>
+          <p:nvPr/>
+        </p:nvSpPr>
+        <p:spPr>
+          <a:xfrm>
+            <a:off x="457200" y="960120"/>
+            <a:ext cx="4023360" cy="2240000"/>
+          </a:xfrm>
+          <a:prstGeom prst="roundRect">
+            <a:avLst>
+              <a:gd name="adj" fmla="val 4000"/>
+            </a:avLst>
+          </a:prstGeom>
+          <a:solidFill>
+            <a:srgbClr val="F1F4F2"/>
+          </a:solidFill>
+          <a:ln>
+            <a:noFill/>
+          </a:ln>
+        </p:spPr>
+      </p:sp>
+      <p:sp>
+        <p:nvSpPr>
+          <p:cNvPr id="102" name="Text 102"/>
+          <p:cNvSpPr txBox="1"/>
+          <p:nvPr/>
+        </p:nvSpPr>
+        <p:spPr>
+          <a:xfrm>
+            <a:off x="587200" y="1020000"/>
+            <a:ext cx="3763360" cy="300000"/>
+          </a:xfrm>
+          <a:prstGeom prst="rect">
+            <a:avLst/>
+          </a:prstGeom>
+          <a:noFill/>
+          <a:ln>
+            <a:noFill/>
+          </a:ln>
+        </p:spPr>
+        <p:txBody>
+          <a:bodyPr wrap="square" lIns="0" tIns="0" rIns="0" bIns="0" rtlCol="0" anchor="t">
+            <a:normAutofit/>
+          </a:bodyPr>
+          <a:lstStyle/>
+          <a:p>
+            <a:pPr algn="l" indent="0" marL="0">
+              <a:spcAft>
+                <a:spcPts val="0"/>
+              </a:spcAft>
+              <a:buNone/>
+            </a:pPr>
+            <a:r>
+              <a:rPr lang="zh-CN" sz="1200" b="1" dirty="0">
+                <a:solidFill>
+                  <a:srgbClr val="1E3D34"/>
+                </a:solidFill>
+                <a:latin typeface="Microsoft YaHei"/>
+                <a:ea typeface="Microsoft YaHei"/>
+                <a:cs typeface="Microsoft YaHei"/>
+              </a:rPr>
+              <a:t xml:space="preserve">经典写法：i → j → t（一次算一个格子）</a:t>
+            </a:r>
+          </a:p>
+        </p:txBody>
+      </p:sp>
+      <p:sp>
+        <p:nvSpPr>
+          <p:cNvPr id="103" name="Text 103"/>
+          <p:cNvSpPr txBox="1"/>
+          <p:nvPr/>
+        </p:nvSpPr>
+        <p:spPr>
+          <a:xfrm>
+            <a:off x="587200" y="1340000"/>
+            <a:ext cx="3763360" cy="800000"/>
+          </a:xfrm>
+          <a:prstGeom prst="rect">
+            <a:avLst/>
+          </a:prstGeom>
+          <a:noFill/>
+          <a:ln>
+            <a:noFill/>
+          </a:ln>
+        </p:spPr>
+        <p:txBody>
+          <a:bodyPr wrap="square" lIns="0" tIns="0" rIns="0" bIns="0" rtlCol="0" anchor="t">
+            <a:normAutofit/>
+          </a:bodyPr>
+          <a:lstStyle/>
+          <a:p>
+            <a:pPr algn="l" indent="0" marL="0">
+              <a:spcAft>
+                <a:spcPts val="0"/>
+              </a:spcAft>
+              <a:buNone/>
+            </a:pPr>
+            <a:r>
+              <a:rPr lang="zh-CN" sz="1050" dirty="0">
+                <a:solidFill>
+                  <a:srgbClr val="2B2B2B"/>
+                </a:solidFill>
+                <a:latin typeface="Consolas"/>
+                <a:ea typeface="Microsoft YaHei"/>
+                <a:cs typeface="Consolas"/>
+              </a:rPr>
+              <a:t xml:space="preserve">for i in range(m):</a:t>
+            </a:r>
+          </a:p>
+          <a:p>
+            <a:pPr algn="l" indent="0" marL="0">
+              <a:spcAft>
+                <a:spcPts val="0"/>
+              </a:spcAft>
+              <a:buNone/>
+            </a:pPr>
+            <a:r>
+              <a:rPr lang="zh-CN" sz="1050" dirty="0">
+                <a:solidFill>
+                  <a:srgbClr val="2B2B2B"/>
+                </a:solidFill>
+                <a:latin typeface="Consolas"/>
+                <a:ea typeface="Microsoft YaHei"/>
+                <a:cs typeface="Consolas"/>
+              </a:rPr>
+              <a:t xml:space="preserve">  for j in range(n):</a:t>
+            </a:r>
+          </a:p>
+          <a:p>
+            <a:pPr algn="l" indent="0" marL="0">
+              <a:spcAft>
+                <a:spcPts val="0"/>
+              </a:spcAft>
+              <a:buNone/>
+            </a:pPr>
+            <a:r>
+              <a:rPr lang="zh-CN" sz="1050" dirty="0">
+                <a:solidFill>
+                  <a:srgbClr val="2B2B2B"/>
+                </a:solidFill>
+                <a:latin typeface="Consolas"/>
+                <a:ea typeface="Microsoft YaHei"/>
+                <a:cs typeface="Consolas"/>
+              </a:rPr>
+              <a:t xml:space="preserve">    for t in range(k):</a:t>
+            </a:r>
+          </a:p>
+          <a:p>
+            <a:pPr algn="l" indent="0" marL="0">
+              <a:spcAft>
+                <a:spcPts val="0"/>
+              </a:spcAft>
+              <a:buNone/>
+            </a:pPr>
+            <a:r>
+              <a:rPr lang="zh-CN" sz="1050" dirty="0">
+                <a:solidFill>
+                  <a:srgbClr val="2B2B2B"/>
+                </a:solidFill>
+                <a:latin typeface="Consolas"/>
+                <a:ea typeface="Microsoft YaHei"/>
+                <a:cs typeface="Consolas"/>
+              </a:rPr>
+              <a:t xml:space="preserve">      C[i][j] += A[i][t]*B[t][j]</a:t>
+            </a:r>
+          </a:p>
+        </p:txBody>
+      </p:sp>
+      <p:sp>
+        <p:nvSpPr>
+          <p:cNvPr id="104" name="Text 104"/>
+          <p:cNvSpPr txBox="1"/>
+          <p:nvPr/>
+        </p:nvSpPr>
+        <p:spPr>
+          <a:xfrm>
+            <a:off x="587200" y="2330000"/>
+            <a:ext cx="3763360" cy="820000"/>
+          </a:xfrm>
+          <a:prstGeom prst="rect">
+            <a:avLst/>
+          </a:prstGeom>
+          <a:noFill/>
+          <a:ln>
+            <a:noFill/>
+          </a:ln>
+        </p:spPr>
+        <p:txBody>
+          <a:bodyPr wrap="square" lIns="0" tIns="0" rIns="0" bIns="0" rtlCol="0" anchor="t">
+            <a:normAutofit/>
+          </a:bodyPr>
+          <a:lstStyle/>
+          <a:p>
+            <a:pPr algn="l" indent="0" marL="0">
+              <a:spcAft>
+                <a:spcPts val="0"/>
+              </a:spcAft>
+              <a:buNone/>
+            </a:pPr>
+            <a:r>
+              <a:rPr lang="zh-CN" sz="1100" dirty="0">
+                <a:solidFill>
+                  <a:srgbClr val="2B2B2B"/>
+                </a:solidFill>
+                <a:latin typeface="Microsoft YaHei"/>
+                <a:ea typeface="Microsoft YaHei"/>
+                <a:cs typeface="Microsoft YaHei"/>
+              </a:rPr>
+              <a:t xml:space="preserve">固定一个格子 C[i][j]，把 k 项乘积一次加完（点积：A 的第 i 行 · B 的第 j 列）。</a:t>
+            </a:r>
+          </a:p>
+        </p:txBody>
+      </p:sp>
+      <p:sp>
+        <p:nvSpPr>
+          <p:cNvPr id="105" name="Shape 105"/>
+          <p:cNvSpPr/>
+          <p:nvPr/>
+        </p:nvSpPr>
+        <p:spPr>
+          <a:xfrm>
+            <a:off x="4663440" y="960120"/>
+            <a:ext cx="4023360" cy="2240000"/>
+          </a:xfrm>
+          <a:prstGeom prst="roundRect">
+            <a:avLst>
+              <a:gd name="adj" fmla="val 4000"/>
+            </a:avLst>
+          </a:prstGeom>
+          <a:solidFill>
+            <a:srgbClr val="CFE0D8"/>
+          </a:solidFill>
+          <a:ln>
+            <a:noFill/>
+          </a:ln>
+        </p:spPr>
+      </p:sp>
+      <p:sp>
+        <p:nvSpPr>
+          <p:cNvPr id="106" name="Text 106"/>
+          <p:cNvSpPr txBox="1"/>
+          <p:nvPr/>
+        </p:nvSpPr>
+        <p:spPr>
+          <a:xfrm>
+            <a:off x="4793440" y="1020000"/>
+            <a:ext cx="3763360" cy="300000"/>
+          </a:xfrm>
+          <a:prstGeom prst="rect">
+            <a:avLst/>
+          </a:prstGeom>
+          <a:noFill/>
+          <a:ln>
+            <a:noFill/>
+          </a:ln>
+        </p:spPr>
+        <p:txBody>
+          <a:bodyPr wrap="square" lIns="0" tIns="0" rIns="0" bIns="0" rtlCol="0" anchor="t">
+            <a:normAutofit/>
+          </a:bodyPr>
+          <a:lstStyle/>
+          <a:p>
+            <a:pPr algn="l" indent="0" marL="0">
+              <a:spcAft>
+                <a:spcPts val="0"/>
+              </a:spcAft>
+              <a:buNone/>
+            </a:pPr>
+            <a:r>
+              <a:rPr lang="zh-CN" sz="1200" b="1" dirty="0">
+                <a:solidFill>
+                  <a:srgbClr val="1E3D34"/>
+                </a:solidFill>
+                <a:latin typeface="Microsoft YaHei"/>
+                <a:ea typeface="Microsoft YaHei"/>
+                <a:cs typeface="Microsoft YaHei"/>
+              </a:rPr>
+              <a:t xml:space="preserve">本页写法：i → t → j（一次更新一整行）</a:t>
+            </a:r>
+          </a:p>
+        </p:txBody>
+      </p:sp>
+      <p:sp>
+        <p:nvSpPr>
+          <p:cNvPr id="107" name="Text 107"/>
+          <p:cNvSpPr txBox="1"/>
+          <p:nvPr/>
+        </p:nvSpPr>
+        <p:spPr>
+          <a:xfrm>
+            <a:off x="4793440" y="1340000"/>
+            <a:ext cx="3763360" cy="800000"/>
+          </a:xfrm>
+          <a:prstGeom prst="rect">
+            <a:avLst/>
+          </a:prstGeom>
+          <a:noFill/>
+          <a:ln>
+            <a:noFill/>
+          </a:ln>
+        </p:spPr>
+        <p:txBody>
+          <a:bodyPr wrap="square" lIns="0" tIns="0" rIns="0" bIns="0" rtlCol="0" anchor="t">
+            <a:normAutofit/>
+          </a:bodyPr>
+          <a:lstStyle/>
+          <a:p>
+            <a:pPr algn="l" indent="0" marL="0">
+              <a:spcAft>
+                <a:spcPts val="0"/>
+              </a:spcAft>
+              <a:buNone/>
+            </a:pPr>
+            <a:r>
+              <a:rPr lang="zh-CN" sz="1000" dirty="0">
+                <a:solidFill>
+                  <a:srgbClr val="2B2B2B"/>
+                </a:solidFill>
+                <a:latin typeface="Consolas"/>
+                <a:ea typeface="Microsoft YaHei"/>
+                <a:cs typeface="Consolas"/>
+              </a:rPr>
+              <a:t xml:space="preserve">for i in range(m):</a:t>
+            </a:r>
+          </a:p>
+          <a:p>
+            <a:pPr algn="l" indent="0" marL="0">
+              <a:spcAft>
+                <a:spcPts val="0"/>
+              </a:spcAft>
+              <a:buNone/>
+            </a:pPr>
+            <a:r>
+              <a:rPr lang="zh-CN" sz="1000" dirty="0">
+                <a:solidFill>
+                  <a:srgbClr val="2B2B2B"/>
+                </a:solidFill>
+                <a:latin typeface="Consolas"/>
+                <a:ea typeface="Microsoft YaHei"/>
+                <a:cs typeface="Consolas"/>
+              </a:rPr>
+              <a:t xml:space="preserve">  for t in range(k):</a:t>
+            </a:r>
+          </a:p>
+          <a:p>
+            <a:pPr algn="l" indent="0" marL="0">
+              <a:spcAft>
+                <a:spcPts val="0"/>
+              </a:spcAft>
+              <a:buNone/>
+            </a:pPr>
+            <a:r>
+              <a:rPr lang="zh-CN" sz="1000" dirty="0">
+                <a:solidFill>
+                  <a:srgbClr val="2B2B2B"/>
+                </a:solidFill>
+                <a:latin typeface="Consolas"/>
+                <a:ea typeface="Microsoft YaHei"/>
+                <a:cs typeface="Consolas"/>
+              </a:rPr>
+              <a:t xml:space="preserve">    v = A[i][t]</a:t>
+            </a:r>
+          </a:p>
+          <a:p>
+            <a:pPr algn="l" indent="0" marL="0">
+              <a:spcAft>
+                <a:spcPts val="0"/>
+              </a:spcAft>
+              <a:buNone/>
+            </a:pPr>
+            <a:r>
+              <a:rPr lang="zh-CN" sz="1000" dirty="0">
+                <a:solidFill>
+                  <a:srgbClr val="2B2B2B"/>
+                </a:solidFill>
+                <a:latin typeface="Consolas"/>
+                <a:ea typeface="Microsoft YaHei"/>
+                <a:cs typeface="Consolas"/>
+              </a:rPr>
+              <a:t xml:space="preserve">    for j in range(n):  Ci[j] += v*B[t][j]</a:t>
+            </a:r>
+          </a:p>
+        </p:txBody>
+      </p:sp>
+      <p:sp>
+        <p:nvSpPr>
+          <p:cNvPr id="108" name="Text 108"/>
+          <p:cNvSpPr txBox="1"/>
+          <p:nvPr/>
+        </p:nvSpPr>
+        <p:spPr>
+          <a:xfrm>
+            <a:off x="4793440" y="2330000"/>
+            <a:ext cx="3763360" cy="820000"/>
+          </a:xfrm>
+          <a:prstGeom prst="rect">
+            <a:avLst/>
+          </a:prstGeom>
+          <a:noFill/>
+          <a:ln>
+            <a:noFill/>
+          </a:ln>
+        </p:spPr>
+        <p:txBody>
+          <a:bodyPr wrap="square" lIns="0" tIns="0" rIns="0" bIns="0" rtlCol="0" anchor="t">
+            <a:normAutofit/>
+          </a:bodyPr>
+          <a:lstStyle/>
+          <a:p>
+            <a:pPr algn="l" indent="0" marL="0">
+              <a:spcAft>
+                <a:spcPts val="0"/>
+              </a:spcAft>
+              <a:buNone/>
+            </a:pPr>
+            <a:r>
+              <a:rPr lang="zh-CN" sz="1200" dirty="0">
+                <a:solidFill>
+                  <a:srgbClr val="2B2B2B"/>
+                </a:solidFill>
+                <a:latin typeface="Microsoft YaHei"/>
+                <a:ea typeface="Microsoft YaHei"/>
+                <a:cs typeface="Microsoft YaHei"/>
+              </a:rPr>
+              <a:t xml:space="preserve">取 A[i][t] 这一个数 v，乘 B 的第 t 整行，累加到 C 的第 i 整行。k 轮之后，C 的第 i 行就算完了。</a:t>
+            </a:r>
+          </a:p>
+        </p:txBody>
+      </p:sp>
+      <p:sp>
+        <p:nvSpPr>
+          <p:cNvPr id="109" name="Shape 109"/>
+          <p:cNvSpPr/>
+          <p:nvPr/>
+        </p:nvSpPr>
+        <p:spPr>
+          <a:xfrm>
+            <a:off x="457200" y="3330000"/>
+            <a:ext cx="8229600" cy="1400000"/>
+          </a:xfrm>
+          <a:prstGeom prst="roundRect">
+            <a:avLst>
+              <a:gd name="adj" fmla="val 4000"/>
+            </a:avLst>
+          </a:prstGeom>
+          <a:solidFill>
+            <a:srgbClr val="FFF6E0"/>
+          </a:solidFill>
+          <a:ln>
+            <a:noFill/>
+          </a:ln>
+        </p:spPr>
+      </p:sp>
+      <p:sp>
+        <p:nvSpPr>
+          <p:cNvPr id="110" name="Text 110"/>
+          <p:cNvSpPr txBox="1"/>
+          <p:nvPr/>
+        </p:nvSpPr>
+        <p:spPr>
+          <a:xfrm>
+            <a:off x="607200" y="3400000"/>
+            <a:ext cx="7929600" cy="1280000"/>
+          </a:xfrm>
+          <a:prstGeom prst="rect">
+            <a:avLst/>
+          </a:prstGeom>
+          <a:noFill/>
+          <a:ln>
+            <a:noFill/>
+          </a:ln>
+        </p:spPr>
+        <p:txBody>
+          <a:bodyPr wrap="square" lIns="0" tIns="0" rIns="0" bIns="0" rtlCol="0" anchor="t">
+            <a:normAutofit/>
+          </a:bodyPr>
+          <a:lstStyle/>
+          <a:p>
+            <a:pPr algn="l" indent="0" marL="0">
+              <a:spcAft>
+                <a:spcPts val="600"/>
+              </a:spcAft>
+              <a:buNone/>
+            </a:pPr>
+            <a:r>
+              <a:rPr lang="zh-CN" sz="1200" b="1" dirty="0">
+                <a:solidFill>
+                  <a:srgbClr val="A06A00"/>
+                </a:solidFill>
+                <a:latin typeface="Microsoft YaHei"/>
+                <a:ea typeface="Microsoft YaHei"/>
+                <a:cs typeface="Microsoft YaHei"/>
+              </a:rPr>
+              <a:t xml:space="preserve">为什么两种写法结果一样？</a:t>
+            </a:r>
+          </a:p>
+          <a:p>
+            <a:pPr algn="l" indent="0" marL="0">
+              <a:spcAft>
+                <a:spcPts val="600"/>
+              </a:spcAft>
+              <a:buNone/>
+            </a:pPr>
+            <a:r>
+              <a:rPr lang="zh-CN" sz="1050" dirty="0">
+                <a:solidFill>
+                  <a:srgbClr val="2B2B2B"/>
+                </a:solidFill>
+                <a:latin typeface="Consolas"/>
+                <a:ea typeface="Microsoft YaHei"/>
+                <a:cs typeface="Consolas"/>
+              </a:rPr>
+              <a:t xml:space="preserve">C[i][j] = A[i][0]·B[0][j] + A[i][1]·B[1][j] + … + A[i][k-1]·B[k-1][j]</a:t>
+            </a:r>
+          </a:p>
+          <a:p>
+            <a:pPr algn="l" indent="0" marL="0">
+              <a:spcAft>
+                <a:spcPts val="600"/>
+              </a:spcAft>
+              <a:buNone/>
+            </a:pPr>
+            <a:r>
+              <a:rPr lang="zh-CN" sz="1200" dirty="0">
+                <a:solidFill>
+                  <a:srgbClr val="2B2B2B"/>
+                </a:solidFill>
+                <a:latin typeface="Microsoft YaHei"/>
+                <a:ea typeface="Microsoft YaHei"/>
+                <a:cs typeface="Microsoft YaHei"/>
+              </a:rPr>
+              <a:t xml:space="preserve">加法满足交换律，加的顺序不影响总和。经典写法一次加完 k 项；本页写法分 k 轮（t=0,1,…），每一轮给这一行所有格子各加一项。</a:t>
+            </a:r>
+          </a:p>
+          <a:p>
+            <a:pPr algn="l" indent="0" marL="0">
+              <a:spcAft>
+                <a:spcPts val="0"/>
+              </a:spcAft>
+              <a:buNone/>
+            </a:pPr>
+            <a:r>
+              <a:rPr lang="zh-CN" sz="1200" b="1" dirty="0">
+                <a:solidFill>
+                  <a:srgbClr val="1E3D34"/>
+                </a:solidFill>
+                <a:latin typeface="Microsoft YaHei"/>
+                <a:ea typeface="Microsoft YaHei"/>
+                <a:cs typeface="Microsoft YaHei"/>
+              </a:rPr>
+              <a:t xml:space="preserve">记忆：C 的第 i 行 = Σₜ A[i][t] × （B 的第 t 行）</a:t>
+            </a:r>
+          </a:p>
+        </p:txBody>
+      </p:sp>
+    </p:spTree>
+  </p:cSld>
+  <p:clrMapOvr>
+    <a:masterClrMapping/>
+  </p:clrMapOvr>
+</p:sld>
+</file>
+
+<file path=ppt/slides/slide47.xml><?xml version="1.0" encoding="utf-8"?>
+<p:sld xmlns:a="http://schemas.openxmlformats.org/drawingml/2006/main" xmlns:r="http://schemas.openxmlformats.org/officeDocument/2006/relationships" xmlns:p="http://schemas.openxmlformats.org/presentationml/2006/main">
+  <p:cSld name="Slide 12">
+    <p:bg>
+      <p:bgPr>
+        <a:solidFill>
+          <a:srgbClr val="FFFFFF"/>
+        </a:solidFill>
+      </p:bgPr>
+    </p:bg>
+    <p:spTree>
+      <p:nvGrpSpPr>
+        <p:cNvPr id="1" name=""/>
+        <p:cNvGrpSpPr/>
+        <p:nvPr/>
+      </p:nvGrpSpPr>
+      <p:grpSpPr>
+        <a:xfrm>
+          <a:off x="0" y="0"/>
+          <a:ext cx="0" cy="0"/>
+          <a:chOff x="0" y="0"/>
+          <a:chExt cx="0" cy="0"/>
+        </a:xfrm>
+      </p:grpSpPr>
+      <p:sp>
+        <p:nvSpPr>
+          <p:cNvPr id="2" name="Shape 0"/>
+          <p:cNvSpPr/>
+          <p:nvPr/>
+        </p:nvSpPr>
+        <p:spPr>
+          <a:xfrm>
+            <a:off x="365760" y="256032"/>
+            <a:ext cx="475488" cy="475488"/>
+          </a:xfrm>
+          <a:prstGeom prst="ellipse">
+            <a:avLst/>
+          </a:prstGeom>
+          <a:solidFill>
+            <a:srgbClr val="1E3D34"/>
+          </a:solidFill>
+          <a:ln/>
+        </p:spPr>
+      </p:sp>
+      <p:sp>
+        <p:nvSpPr>
+          <p:cNvPr id="3" name="Text 1"/>
+          <p:cNvSpPr txBox="1"/>
+          <p:nvPr/>
+        </p:nvSpPr>
+        <p:spPr>
+          <a:xfrm>
+            <a:off x="365760" y="256032"/>
+            <a:ext cx="475488" cy="475488"/>
+          </a:xfrm>
+          <a:prstGeom prst="rect">
+            <a:avLst/>
+          </a:prstGeom>
+          <a:noFill/>
+          <a:ln/>
+        </p:spPr>
+        <p:txBody>
+          <a:bodyPr wrap="square" lIns="0" tIns="0" rIns="0" bIns="0" rtlCol="0" anchor="ctr"/>
+          <a:lstStyle/>
+          <a:p>
+            <a:pPr algn="ctr" indent="0" marL="0">
+              <a:buNone/>
+            </a:pPr>
+            <a:r>
+              <a:rPr lang="en-US" sz="1100" b="1" dirty="0">
+                <a:solidFill>
+                  <a:srgbClr val="F2B134"/>
+                </a:solidFill>
+                <a:latin typeface="Microsoft YaHei" pitchFamily="34" charset="0"/>
+                <a:ea typeface="Microsoft YaHei" pitchFamily="34" charset="-122"/>
+                <a:cs typeface="Microsoft YaHei" pitchFamily="34" charset="-120"/>
+              </a:rPr>
+              <a:t>1.4</a:t>
+            </a:r>
+            <a:endParaRPr lang="en-US" sz="1100" dirty="0"/>
+          </a:p>
+        </p:txBody>
+      </p:sp>
+      <p:sp>
+        <p:nvSpPr>
+          <p:cNvPr id="4" name="Text 2"/>
+          <p:cNvSpPr txBox="1"/>
+          <p:nvPr/>
+        </p:nvSpPr>
+        <p:spPr>
+          <a:xfrm>
+            <a:off x="960120" y="219456"/>
+            <a:ext cx="6858000" cy="228600"/>
+          </a:xfrm>
+          <a:prstGeom prst="rect">
+            <a:avLst/>
+          </a:prstGeom>
+          <a:noFill/>
+          <a:ln/>
+        </p:spPr>
+        <p:txBody>
+          <a:bodyPr wrap="square" lIns="0" tIns="0" rIns="0" bIns="0" rtlCol="0" anchor="t"/>
+          <a:lstStyle/>
+          <a:p>
+            <a:pPr algn="l" indent="0" marL="0">
+              <a:buNone/>
+            </a:pPr>
+            <a:r>
+              <a:rPr lang="en-US" sz="900" b="1" dirty="0">
+                <a:solidFill>
+                  <a:srgbClr val="3E7C68"/>
+                </a:solidFill>
+                <a:latin typeface="Microsoft YaHei" pitchFamily="34" charset="0"/>
+                <a:ea typeface="Microsoft YaHei" pitchFamily="34" charset="-122"/>
+                <a:cs typeface="Microsoft YaHei" pitchFamily="34" charset="-120"/>
+              </a:rPr>
+              <a:t>1 矩阵 · 矩阵乘法</a:t>
+            </a:r>
+            <a:endParaRPr lang="en-US" sz="900" dirty="0"/>
+          </a:p>
+        </p:txBody>
+      </p:sp>
+      <p:sp>
+        <p:nvSpPr>
+          <p:cNvPr id="5" name="Text 3"/>
+          <p:cNvSpPr txBox="1"/>
+          <p:nvPr/>
+        </p:nvSpPr>
+        <p:spPr>
+          <a:xfrm>
+            <a:off x="960120" y="420624"/>
+            <a:ext cx="7772400" cy="384048"/>
+          </a:xfrm>
+          <a:prstGeom prst="rect">
+            <a:avLst/>
+          </a:prstGeom>
+          <a:noFill/>
+          <a:ln/>
+        </p:spPr>
+        <p:txBody>
+          <a:bodyPr wrap="square" lIns="0" tIns="0" rIns="0" bIns="0" rtlCol="0" anchor="t"/>
+          <a:lstStyle/>
+          <a:p>
+            <a:pPr algn="l" indent="0" marL="0">
+              <a:buNone/>
+            </a:pPr>
+            <a:r>
+              <a:rPr lang="en-US" sz="2000" b="1" dirty="0">
+                <a:solidFill>
+                  <a:srgbClr val="1E3D34"/>
+                </a:solidFill>
+                <a:latin typeface="Microsoft YaHei" pitchFamily="34" charset="0"/>
+                <a:ea typeface="Microsoft YaHei" pitchFamily="34" charset="-122"/>
+                <a:cs typeface="Microsoft YaHei" pitchFamily="34" charset="-120"/>
+              </a:rPr>
+              <a:t>用 A=[[1,2],[3,4]]、B=[[5,6],[7,8]] 手算一遍</a:t>
+            </a:r>
+            <a:endParaRPr lang="en-US" sz="2000" dirty="0"/>
+          </a:p>
+        </p:txBody>
+      </p:sp>
+      <p:sp>
+        <p:nvSpPr>
+          <p:cNvPr id="6" name="Text 4"/>
+          <p:cNvSpPr txBox="1"/>
+          <p:nvPr/>
+        </p:nvSpPr>
+        <p:spPr>
+          <a:xfrm>
+            <a:off x="8503920" y="4828032"/>
+            <a:ext cx="457200" cy="228600"/>
+          </a:xfrm>
+          <a:prstGeom prst="rect">
+            <a:avLst/>
+          </a:prstGeom>
+          <a:noFill/>
+          <a:ln/>
+        </p:spPr>
+        <p:txBody>
+          <a:bodyPr wrap="square" lIns="0" tIns="0" rIns="0" bIns="0" rtlCol="0" anchor="t"/>
+          <a:lstStyle/>
+          <a:p>
+            <a:pPr algn="r" indent="0" marL="0">
+              <a:buNone/>
+            </a:pPr>
+            <a:r>
+              <a:rPr lang="en-US" sz="900" dirty="0">
+                <a:solidFill>
+                  <a:srgbClr val="6B7B74"/>
+                </a:solidFill>
+                <a:latin typeface="Microsoft YaHei" pitchFamily="34" charset="0"/>
+                <a:ea typeface="Microsoft YaHei" pitchFamily="34" charset="-122"/>
+                <a:cs typeface="Microsoft YaHei" pitchFamily="34" charset="-120"/>
+              </a:rPr>
+              <a:t>14</a:t>
+            </a:r>
+            <a:endParaRPr lang="en-US" sz="900" dirty="0"/>
+          </a:p>
+        </p:txBody>
+      </p:sp>
+      <p:sp>
+        <p:nvSpPr>
+          <p:cNvPr id="111" name="Text 111"/>
+          <p:cNvSpPr txBox="1"/>
+          <p:nvPr/>
+        </p:nvSpPr>
+        <p:spPr>
+          <a:xfrm>
+            <a:off x="557200" y="1000000"/>
+            <a:ext cx="760000" cy="220000"/>
+          </a:xfrm>
+          <a:prstGeom prst="rect">
+            <a:avLst/>
+          </a:prstGeom>
+          <a:noFill/>
+          <a:ln>
+            <a:noFill/>
+          </a:ln>
+        </p:spPr>
+        <p:txBody>
+          <a:bodyPr wrap="square" lIns="0" tIns="0" rIns="0" bIns="0" rtlCol="0" anchor="t">
+            <a:normAutofit/>
+          </a:bodyPr>
+          <a:lstStyle/>
+          <a:p>
+            <a:pPr algn="ctr" indent="0" marL="0">
+              <a:spcAft>
+                <a:spcPts val="0"/>
+              </a:spcAft>
+              <a:buNone/>
+            </a:pPr>
+            <a:r>
+              <a:rPr lang="zh-CN" sz="1100" b="1" dirty="0">
+                <a:solidFill>
+                  <a:srgbClr val="3E7C68"/>
+                </a:solidFill>
+                <a:latin typeface="Microsoft YaHei"/>
+                <a:ea typeface="Microsoft YaHei"/>
+                <a:cs typeface="Microsoft YaHei"/>
+              </a:rPr>
+              <a:t xml:space="preserve">A</a:t>
+            </a:r>
+          </a:p>
+        </p:txBody>
+      </p:sp>
+      <p:sp>
+        <p:nvSpPr>
+          <p:cNvPr id="112" name="Shape 112"/>
+          <p:cNvSpPr/>
+          <p:nvPr/>
+        </p:nvSpPr>
+        <p:spPr>
+          <a:xfrm>
+            <a:off x="557200" y="1250000"/>
+            <a:ext cx="350000" cy="350000"/>
+          </a:xfrm>
+          <a:prstGeom prst="roundRect">
+            <a:avLst>
+              <a:gd name="adj" fmla="val 4000"/>
+            </a:avLst>
+          </a:prstGeom>
+          <a:solidFill>
+            <a:srgbClr val="F1F4F2"/>
+          </a:solidFill>
+          <a:ln>
+            <a:noFill/>
+          </a:ln>
+        </p:spPr>
+      </p:sp>
+      <p:sp>
+        <p:nvSpPr>
+          <p:cNvPr id="113" name="Text 113"/>
+          <p:cNvSpPr txBox="1"/>
+          <p:nvPr/>
+        </p:nvSpPr>
+        <p:spPr>
+          <a:xfrm>
+            <a:off x="557200" y="1250000"/>
+            <a:ext cx="350000" cy="350000"/>
+          </a:xfrm>
+          <a:prstGeom prst="rect">
+            <a:avLst/>
+          </a:prstGeom>
+          <a:noFill/>
+          <a:ln>
+            <a:noFill/>
+          </a:ln>
+        </p:spPr>
+        <p:txBody>
+          <a:bodyPr wrap="square" lIns="0" tIns="0" rIns="0" bIns="0" rtlCol="0" anchor="ctr">
+            <a:normAutofit/>
+          </a:bodyPr>
+          <a:lstStyle/>
+          <a:p>
+            <a:pPr algn="ctr" indent="0" marL="0">
+              <a:spcAft>
+                <a:spcPts val="0"/>
+              </a:spcAft>
+              <a:buNone/>
+            </a:pPr>
+            <a:r>
+              <a:rPr lang="zh-CN" sz="1400" b="1" dirty="0">
+                <a:solidFill>
+                  <a:srgbClr val="1E3D34"/>
+                </a:solidFill>
+                <a:latin typeface="Microsoft YaHei"/>
+                <a:ea typeface="Microsoft YaHei"/>
+                <a:cs typeface="Microsoft YaHei"/>
+              </a:rPr>
+              <a:t xml:space="preserve">1</a:t>
+            </a:r>
+          </a:p>
+        </p:txBody>
+      </p:sp>
+      <p:sp>
+        <p:nvSpPr>
+          <p:cNvPr id="114" name="Shape 114"/>
+          <p:cNvSpPr/>
+          <p:nvPr/>
+        </p:nvSpPr>
+        <p:spPr>
+          <a:xfrm>
+            <a:off x="937200" y="1250000"/>
+            <a:ext cx="350000" cy="350000"/>
+          </a:xfrm>
+          <a:prstGeom prst="roundRect">
+            <a:avLst>
+              <a:gd name="adj" fmla="val 4000"/>
+            </a:avLst>
+          </a:prstGeom>
+          <a:solidFill>
+            <a:srgbClr val="F1F4F2"/>
+          </a:solidFill>
+          <a:ln>
+            <a:noFill/>
+          </a:ln>
+        </p:spPr>
+      </p:sp>
+      <p:sp>
+        <p:nvSpPr>
+          <p:cNvPr id="115" name="Text 115"/>
+          <p:cNvSpPr txBox="1"/>
+          <p:nvPr/>
+        </p:nvSpPr>
+        <p:spPr>
+          <a:xfrm>
+            <a:off x="937200" y="1250000"/>
+            <a:ext cx="350000" cy="350000"/>
+          </a:xfrm>
+          <a:prstGeom prst="rect">
+            <a:avLst/>
+          </a:prstGeom>
+          <a:noFill/>
+          <a:ln>
+            <a:noFill/>
+          </a:ln>
+        </p:spPr>
+        <p:txBody>
+          <a:bodyPr wrap="square" lIns="0" tIns="0" rIns="0" bIns="0" rtlCol="0" anchor="ctr">
+            <a:normAutofit/>
+          </a:bodyPr>
+          <a:lstStyle/>
+          <a:p>
+            <a:pPr algn="ctr" indent="0" marL="0">
+              <a:spcAft>
+                <a:spcPts val="0"/>
+              </a:spcAft>
+              <a:buNone/>
+            </a:pPr>
+            <a:r>
+              <a:rPr lang="zh-CN" sz="1400" b="1" dirty="0">
+                <a:solidFill>
+                  <a:srgbClr val="1E3D34"/>
+                </a:solidFill>
+                <a:latin typeface="Microsoft YaHei"/>
+                <a:ea typeface="Microsoft YaHei"/>
+                <a:cs typeface="Microsoft YaHei"/>
+              </a:rPr>
+              <a:t xml:space="preserve">2</a:t>
+            </a:r>
+          </a:p>
+        </p:txBody>
+      </p:sp>
+      <p:sp>
+        <p:nvSpPr>
+          <p:cNvPr id="116" name="Shape 116"/>
+          <p:cNvSpPr/>
+          <p:nvPr/>
+        </p:nvSpPr>
+        <p:spPr>
+          <a:xfrm>
+            <a:off x="557200" y="1630000"/>
+            <a:ext cx="350000" cy="350000"/>
+          </a:xfrm>
+          <a:prstGeom prst="roundRect">
+            <a:avLst>
+              <a:gd name="adj" fmla="val 4000"/>
+            </a:avLst>
+          </a:prstGeom>
+          <a:solidFill>
+            <a:srgbClr val="F1F4F2"/>
+          </a:solidFill>
+          <a:ln>
+            <a:noFill/>
+          </a:ln>
+        </p:spPr>
+      </p:sp>
+      <p:sp>
+        <p:nvSpPr>
+          <p:cNvPr id="117" name="Text 117"/>
+          <p:cNvSpPr txBox="1"/>
+          <p:nvPr/>
+        </p:nvSpPr>
+        <p:spPr>
+          <a:xfrm>
+            <a:off x="557200" y="1630000"/>
+            <a:ext cx="350000" cy="350000"/>
+          </a:xfrm>
+          <a:prstGeom prst="rect">
+            <a:avLst/>
+          </a:prstGeom>
+          <a:noFill/>
+          <a:ln>
+            <a:noFill/>
+          </a:ln>
+        </p:spPr>
+        <p:txBody>
+          <a:bodyPr wrap="square" lIns="0" tIns="0" rIns="0" bIns="0" rtlCol="0" anchor="ctr">
+            <a:normAutofit/>
+          </a:bodyPr>
+          <a:lstStyle/>
+          <a:p>
+            <a:pPr algn="ctr" indent="0" marL="0">
+              <a:spcAft>
+                <a:spcPts val="0"/>
+              </a:spcAft>
+              <a:buNone/>
+            </a:pPr>
+            <a:r>
+              <a:rPr lang="zh-CN" sz="1400" b="1" dirty="0">
+                <a:solidFill>
+                  <a:srgbClr val="1E3D34"/>
+                </a:solidFill>
+                <a:latin typeface="Microsoft YaHei"/>
+                <a:ea typeface="Microsoft YaHei"/>
+                <a:cs typeface="Microsoft YaHei"/>
+              </a:rPr>
+              <a:t xml:space="preserve">3</a:t>
+            </a:r>
+          </a:p>
+        </p:txBody>
+      </p:sp>
+      <p:sp>
+        <p:nvSpPr>
+          <p:cNvPr id="118" name="Shape 118"/>
+          <p:cNvSpPr/>
+          <p:nvPr/>
+        </p:nvSpPr>
+        <p:spPr>
+          <a:xfrm>
+            <a:off x="937200" y="1630000"/>
+            <a:ext cx="350000" cy="350000"/>
+          </a:xfrm>
+          <a:prstGeom prst="roundRect">
+            <a:avLst>
+              <a:gd name="adj" fmla="val 4000"/>
+            </a:avLst>
+          </a:prstGeom>
+          <a:solidFill>
+            <a:srgbClr val="F1F4F2"/>
+          </a:solidFill>
+          <a:ln>
+            <a:noFill/>
+          </a:ln>
+        </p:spPr>
+      </p:sp>
+      <p:sp>
+        <p:nvSpPr>
+          <p:cNvPr id="119" name="Text 119"/>
+          <p:cNvSpPr txBox="1"/>
+          <p:nvPr/>
+        </p:nvSpPr>
+        <p:spPr>
+          <a:xfrm>
+            <a:off x="937200" y="1630000"/>
+            <a:ext cx="350000" cy="350000"/>
+          </a:xfrm>
+          <a:prstGeom prst="rect">
+            <a:avLst/>
+          </a:prstGeom>
+          <a:noFill/>
+          <a:ln>
+            <a:noFill/>
+          </a:ln>
+        </p:spPr>
+        <p:txBody>
+          <a:bodyPr wrap="square" lIns="0" tIns="0" rIns="0" bIns="0" rtlCol="0" anchor="ctr">
+            <a:normAutofit/>
+          </a:bodyPr>
+          <a:lstStyle/>
+          <a:p>
+            <a:pPr algn="ctr" indent="0" marL="0">
+              <a:spcAft>
+                <a:spcPts val="0"/>
+              </a:spcAft>
+              <a:buNone/>
+            </a:pPr>
+            <a:r>
+              <a:rPr lang="zh-CN" sz="1400" b="1" dirty="0">
+                <a:solidFill>
+                  <a:srgbClr val="1E3D34"/>
+                </a:solidFill>
+                <a:latin typeface="Microsoft YaHei"/>
+                <a:ea typeface="Microsoft YaHei"/>
+                <a:cs typeface="Microsoft YaHei"/>
+              </a:rPr>
+              <a:t xml:space="preserve">4</a:t>
+            </a:r>
+          </a:p>
+        </p:txBody>
+      </p:sp>
+      <p:sp>
+        <p:nvSpPr>
+          <p:cNvPr id="120" name="Text 120"/>
+          <p:cNvSpPr txBox="1"/>
+          <p:nvPr/>
+        </p:nvSpPr>
+        <p:spPr>
+          <a:xfrm>
+            <a:off x="1417200" y="1470000"/>
+            <a:ext cx="250000" cy="300000"/>
+          </a:xfrm>
+          <a:prstGeom prst="rect">
+            <a:avLst/>
+          </a:prstGeom>
+          <a:noFill/>
+          <a:ln>
+            <a:noFill/>
+          </a:ln>
+        </p:spPr>
+        <p:txBody>
+          <a:bodyPr wrap="square" lIns="0" tIns="0" rIns="0" bIns="0" rtlCol="0" anchor="ctr">
+            <a:normAutofit/>
+          </a:bodyPr>
+          <a:lstStyle/>
+          <a:p>
+            <a:pPr algn="ctr" indent="0" marL="0">
+              <a:spcAft>
+                <a:spcPts val="0"/>
+              </a:spcAft>
+              <a:buNone/>
+            </a:pPr>
+            <a:r>
+              <a:rPr lang="zh-CN" sz="1600" b="1" dirty="0">
+                <a:solidFill>
+                  <a:srgbClr val="3E7C68"/>
+                </a:solidFill>
+                <a:latin typeface="Microsoft YaHei"/>
+                <a:ea typeface="Microsoft YaHei"/>
+                <a:cs typeface="Microsoft YaHei"/>
+              </a:rPr>
+              <a:t xml:space="preserve">×</a:t>
+            </a:r>
+          </a:p>
+        </p:txBody>
+      </p:sp>
+      <p:sp>
+        <p:nvSpPr>
+          <p:cNvPr id="121" name="Text 121"/>
+          <p:cNvSpPr txBox="1"/>
+          <p:nvPr/>
+        </p:nvSpPr>
+        <p:spPr>
+          <a:xfrm>
+            <a:off x="1707200" y="1000000"/>
+            <a:ext cx="760000" cy="220000"/>
+          </a:xfrm>
+          <a:prstGeom prst="rect">
+            <a:avLst/>
+          </a:prstGeom>
+          <a:noFill/>
+          <a:ln>
+            <a:noFill/>
+          </a:ln>
+        </p:spPr>
+        <p:txBody>
+          <a:bodyPr wrap="square" lIns="0" tIns="0" rIns="0" bIns="0" rtlCol="0" anchor="t">
+            <a:normAutofit/>
+          </a:bodyPr>
+          <a:lstStyle/>
+          <a:p>
+            <a:pPr algn="ctr" indent="0" marL="0">
+              <a:spcAft>
+                <a:spcPts val="0"/>
+              </a:spcAft>
+              <a:buNone/>
+            </a:pPr>
+            <a:r>
+              <a:rPr lang="zh-CN" sz="1100" b="1" dirty="0">
+                <a:solidFill>
+                  <a:srgbClr val="3E7C68"/>
+                </a:solidFill>
+                <a:latin typeface="Microsoft YaHei"/>
+                <a:ea typeface="Microsoft YaHei"/>
+                <a:cs typeface="Microsoft YaHei"/>
+              </a:rPr>
+              <a:t xml:space="preserve">B</a:t>
+            </a:r>
+          </a:p>
+        </p:txBody>
+      </p:sp>
+      <p:sp>
+        <p:nvSpPr>
+          <p:cNvPr id="122" name="Shape 122"/>
+          <p:cNvSpPr/>
+          <p:nvPr/>
+        </p:nvSpPr>
+        <p:spPr>
+          <a:xfrm>
+            <a:off x="1707200" y="1250000"/>
+            <a:ext cx="350000" cy="350000"/>
+          </a:xfrm>
+          <a:prstGeom prst="roundRect">
+            <a:avLst>
+              <a:gd name="adj" fmla="val 4000"/>
+            </a:avLst>
+          </a:prstGeom>
+          <a:solidFill>
+            <a:srgbClr val="F1F4F2"/>
+          </a:solidFill>
+          <a:ln>
+            <a:noFill/>
+          </a:ln>
+        </p:spPr>
+      </p:sp>
+      <p:sp>
+        <p:nvSpPr>
+          <p:cNvPr id="123" name="Text 123"/>
+          <p:cNvSpPr txBox="1"/>
+          <p:nvPr/>
+        </p:nvSpPr>
+        <p:spPr>
+          <a:xfrm>
+            <a:off x="1707200" y="1250000"/>
+            <a:ext cx="350000" cy="350000"/>
+          </a:xfrm>
+          <a:prstGeom prst="rect">
+            <a:avLst/>
+          </a:prstGeom>
+          <a:noFill/>
+          <a:ln>
+            <a:noFill/>
+          </a:ln>
+        </p:spPr>
+        <p:txBody>
+          <a:bodyPr wrap="square" lIns="0" tIns="0" rIns="0" bIns="0" rtlCol="0" anchor="ctr">
+            <a:normAutofit/>
+          </a:bodyPr>
+          <a:lstStyle/>
+          <a:p>
+            <a:pPr algn="ctr" indent="0" marL="0">
+              <a:spcAft>
+                <a:spcPts val="0"/>
+              </a:spcAft>
+              <a:buNone/>
+            </a:pPr>
+            <a:r>
+              <a:rPr lang="zh-CN" sz="1400" b="1" dirty="0">
+                <a:solidFill>
+                  <a:srgbClr val="1E3D34"/>
+                </a:solidFill>
+                <a:latin typeface="Microsoft YaHei"/>
+                <a:ea typeface="Microsoft YaHei"/>
+                <a:cs typeface="Microsoft YaHei"/>
+              </a:rPr>
+              <a:t xml:space="preserve">5</a:t>
+            </a:r>
+          </a:p>
+        </p:txBody>
+      </p:sp>
+      <p:sp>
+        <p:nvSpPr>
+          <p:cNvPr id="124" name="Shape 124"/>
+          <p:cNvSpPr/>
+          <p:nvPr/>
+        </p:nvSpPr>
+        <p:spPr>
+          <a:xfrm>
+            <a:off x="2087200" y="1250000"/>
+            <a:ext cx="350000" cy="350000"/>
+          </a:xfrm>
+          <a:prstGeom prst="roundRect">
+            <a:avLst>
+              <a:gd name="adj" fmla="val 4000"/>
+            </a:avLst>
+          </a:prstGeom>
+          <a:solidFill>
+            <a:srgbClr val="F1F4F2"/>
+          </a:solidFill>
+          <a:ln>
+            <a:noFill/>
+          </a:ln>
+        </p:spPr>
+      </p:sp>
+      <p:sp>
+        <p:nvSpPr>
+          <p:cNvPr id="125" name="Text 125"/>
+          <p:cNvSpPr txBox="1"/>
+          <p:nvPr/>
+        </p:nvSpPr>
+        <p:spPr>
+          <a:xfrm>
+            <a:off x="2087200" y="1250000"/>
+            <a:ext cx="350000" cy="350000"/>
+          </a:xfrm>
+          <a:prstGeom prst="rect">
+            <a:avLst/>
+          </a:prstGeom>
+          <a:noFill/>
+          <a:ln>
+            <a:noFill/>
+          </a:ln>
+        </p:spPr>
+        <p:txBody>
+          <a:bodyPr wrap="square" lIns="0" tIns="0" rIns="0" bIns="0" rtlCol="0" anchor="ctr">
+            <a:normAutofit/>
+          </a:bodyPr>
+          <a:lstStyle/>
+          <a:p>
+            <a:pPr algn="ctr" indent="0" marL="0">
+              <a:spcAft>
+                <a:spcPts val="0"/>
+              </a:spcAft>
+              <a:buNone/>
+            </a:pPr>
+            <a:r>
+              <a:rPr lang="zh-CN" sz="1400" b="1" dirty="0">
+                <a:solidFill>
+                  <a:srgbClr val="1E3D34"/>
+                </a:solidFill>
+                <a:latin typeface="Microsoft YaHei"/>
+                <a:ea typeface="Microsoft YaHei"/>
+                <a:cs typeface="Microsoft YaHei"/>
+              </a:rPr>
+              <a:t xml:space="preserve">6</a:t>
+            </a:r>
+          </a:p>
+        </p:txBody>
+      </p:sp>
+      <p:sp>
+        <p:nvSpPr>
+          <p:cNvPr id="126" name="Shape 126"/>
+          <p:cNvSpPr/>
+          <p:nvPr/>
+        </p:nvSpPr>
+        <p:spPr>
+          <a:xfrm>
+            <a:off x="1707200" y="1630000"/>
+            <a:ext cx="350000" cy="350000"/>
+          </a:xfrm>
+          <a:prstGeom prst="roundRect">
+            <a:avLst>
+              <a:gd name="adj" fmla="val 4000"/>
+            </a:avLst>
+          </a:prstGeom>
+          <a:solidFill>
+            <a:srgbClr val="F1F4F2"/>
+          </a:solidFill>
+          <a:ln>
+            <a:noFill/>
+          </a:ln>
+        </p:spPr>
+      </p:sp>
+      <p:sp>
+        <p:nvSpPr>
+          <p:cNvPr id="127" name="Text 127"/>
+          <p:cNvSpPr txBox="1"/>
+          <p:nvPr/>
+        </p:nvSpPr>
+        <p:spPr>
+          <a:xfrm>
+            <a:off x="1707200" y="1630000"/>
+            <a:ext cx="350000" cy="350000"/>
+          </a:xfrm>
+          <a:prstGeom prst="rect">
+            <a:avLst/>
+          </a:prstGeom>
+          <a:noFill/>
+          <a:ln>
+            <a:noFill/>
+          </a:ln>
+        </p:spPr>
+        <p:txBody>
+          <a:bodyPr wrap="square" lIns="0" tIns="0" rIns="0" bIns="0" rtlCol="0" anchor="ctr">
+            <a:normAutofit/>
+          </a:bodyPr>
+          <a:lstStyle/>
+          <a:p>
+            <a:pPr algn="ctr" indent="0" marL="0">
+              <a:spcAft>
+                <a:spcPts val="0"/>
+              </a:spcAft>
+              <a:buNone/>
+            </a:pPr>
+            <a:r>
+              <a:rPr lang="zh-CN" sz="1400" b="1" dirty="0">
+                <a:solidFill>
+                  <a:srgbClr val="1E3D34"/>
+                </a:solidFill>
+                <a:latin typeface="Microsoft YaHei"/>
+                <a:ea typeface="Microsoft YaHei"/>
+                <a:cs typeface="Microsoft YaHei"/>
+              </a:rPr>
+              <a:t xml:space="preserve">7</a:t>
+            </a:r>
+          </a:p>
+        </p:txBody>
+      </p:sp>
+      <p:sp>
+        <p:nvSpPr>
+          <p:cNvPr id="128" name="Shape 128"/>
+          <p:cNvSpPr/>
+          <p:nvPr/>
+        </p:nvSpPr>
+        <p:spPr>
+          <a:xfrm>
+            <a:off x="2087200" y="1630000"/>
+            <a:ext cx="350000" cy="350000"/>
+          </a:xfrm>
+          <a:prstGeom prst="roundRect">
+            <a:avLst>
+              <a:gd name="adj" fmla="val 4000"/>
+            </a:avLst>
+          </a:prstGeom>
+          <a:solidFill>
+            <a:srgbClr val="F1F4F2"/>
+          </a:solidFill>
+          <a:ln>
+            <a:noFill/>
+          </a:ln>
+        </p:spPr>
+      </p:sp>
+      <p:sp>
+        <p:nvSpPr>
+          <p:cNvPr id="129" name="Text 129"/>
+          <p:cNvSpPr txBox="1"/>
+          <p:nvPr/>
+        </p:nvSpPr>
+        <p:spPr>
+          <a:xfrm>
+            <a:off x="2087200" y="1630000"/>
+            <a:ext cx="350000" cy="350000"/>
+          </a:xfrm>
+          <a:prstGeom prst="rect">
+            <a:avLst/>
+          </a:prstGeom>
+          <a:noFill/>
+          <a:ln>
+            <a:noFill/>
+          </a:ln>
+        </p:spPr>
+        <p:txBody>
+          <a:bodyPr wrap="square" lIns="0" tIns="0" rIns="0" bIns="0" rtlCol="0" anchor="ctr">
+            <a:normAutofit/>
+          </a:bodyPr>
+          <a:lstStyle/>
+          <a:p>
+            <a:pPr algn="ctr" indent="0" marL="0">
+              <a:spcAft>
+                <a:spcPts val="0"/>
+              </a:spcAft>
+              <a:buNone/>
+            </a:pPr>
+            <a:r>
+              <a:rPr lang="zh-CN" sz="1400" b="1" dirty="0">
+                <a:solidFill>
+                  <a:srgbClr val="1E3D34"/>
+                </a:solidFill>
+                <a:latin typeface="Microsoft YaHei"/>
+                <a:ea typeface="Microsoft YaHei"/>
+                <a:cs typeface="Microsoft YaHei"/>
+              </a:rPr>
+              <a:t xml:space="preserve">8</a:t>
+            </a:r>
+          </a:p>
+        </p:txBody>
+      </p:sp>
+      <p:sp>
+        <p:nvSpPr>
+          <p:cNvPr id="130" name="Text 130"/>
+          <p:cNvSpPr txBox="1"/>
+          <p:nvPr/>
+        </p:nvSpPr>
+        <p:spPr>
+          <a:xfrm>
+            <a:off x="2567200" y="1470000"/>
+            <a:ext cx="250000" cy="300000"/>
+          </a:xfrm>
+          <a:prstGeom prst="rect">
+            <a:avLst/>
+          </a:prstGeom>
+          <a:noFill/>
+          <a:ln>
+            <a:noFill/>
+          </a:ln>
+        </p:spPr>
+        <p:txBody>
+          <a:bodyPr wrap="square" lIns="0" tIns="0" rIns="0" bIns="0" rtlCol="0" anchor="ctr">
+            <a:normAutofit/>
+          </a:bodyPr>
+          <a:lstStyle/>
+          <a:p>
+            <a:pPr algn="ctr" indent="0" marL="0">
+              <a:spcAft>
+                <a:spcPts val="0"/>
+              </a:spcAft>
+              <a:buNone/>
+            </a:pPr>
+            <a:r>
+              <a:rPr lang="zh-CN" sz="1600" b="1" dirty="0">
+                <a:solidFill>
+                  <a:srgbClr val="3E7C68"/>
+                </a:solidFill>
+                <a:latin typeface="Microsoft YaHei"/>
+                <a:ea typeface="Microsoft YaHei"/>
+                <a:cs typeface="Microsoft YaHei"/>
+              </a:rPr>
+              <a:t xml:space="preserve">=</a:t>
+            </a:r>
+          </a:p>
+        </p:txBody>
+      </p:sp>
+      <p:sp>
+        <p:nvSpPr>
+          <p:cNvPr id="131" name="Text 131"/>
+          <p:cNvSpPr txBox="1"/>
+          <p:nvPr/>
+        </p:nvSpPr>
+        <p:spPr>
+          <a:xfrm>
+            <a:off x="2857200" y="1000000"/>
+            <a:ext cx="760000" cy="220000"/>
+          </a:xfrm>
+          <a:prstGeom prst="rect">
+            <a:avLst/>
+          </a:prstGeom>
+          <a:noFill/>
+          <a:ln>
+            <a:noFill/>
+          </a:ln>
+        </p:spPr>
+        <p:txBody>
+          <a:bodyPr wrap="square" lIns="0" tIns="0" rIns="0" bIns="0" rtlCol="0" anchor="t">
+            <a:normAutofit/>
+          </a:bodyPr>
+          <a:lstStyle/>
+          <a:p>
+            <a:pPr algn="ctr" indent="0" marL="0">
+              <a:spcAft>
+                <a:spcPts val="0"/>
+              </a:spcAft>
+              <a:buNone/>
+            </a:pPr>
+            <a:r>
+              <a:rPr lang="zh-CN" sz="1100" b="1" dirty="0">
+                <a:solidFill>
+                  <a:srgbClr val="3E7C68"/>
+                </a:solidFill>
+                <a:latin typeface="Microsoft YaHei"/>
+                <a:ea typeface="Microsoft YaHei"/>
+                <a:cs typeface="Microsoft YaHei"/>
+              </a:rPr>
+              <a:t xml:space="preserve">C</a:t>
+            </a:r>
+          </a:p>
+        </p:txBody>
+      </p:sp>
+      <p:sp>
+        <p:nvSpPr>
+          <p:cNvPr id="132" name="Shape 132"/>
+          <p:cNvSpPr/>
+          <p:nvPr/>
+        </p:nvSpPr>
+        <p:spPr>
+          <a:xfrm>
+            <a:off x="2857200" y="1250000"/>
+            <a:ext cx="350000" cy="350000"/>
+          </a:xfrm>
+          <a:prstGeom prst="roundRect">
+            <a:avLst>
+              <a:gd name="adj" fmla="val 4000"/>
+            </a:avLst>
+          </a:prstGeom>
+          <a:solidFill>
+            <a:srgbClr val="F1F4F2"/>
+          </a:solidFill>
+          <a:ln>
+            <a:noFill/>
+          </a:ln>
+        </p:spPr>
+      </p:sp>
+      <p:sp>
+        <p:nvSpPr>
+          <p:cNvPr id="133" name="Text 133"/>
+          <p:cNvSpPr txBox="1"/>
+          <p:nvPr/>
+        </p:nvSpPr>
+        <p:spPr>
+          <a:xfrm>
+            <a:off x="2857200" y="1250000"/>
+            <a:ext cx="350000" cy="350000"/>
+          </a:xfrm>
+          <a:prstGeom prst="rect">
+            <a:avLst/>
+          </a:prstGeom>
+          <a:noFill/>
+          <a:ln>
+            <a:noFill/>
+          </a:ln>
+        </p:spPr>
+        <p:txBody>
+          <a:bodyPr wrap="square" lIns="0" tIns="0" rIns="0" bIns="0" rtlCol="0" anchor="ctr">
+            <a:normAutofit/>
+          </a:bodyPr>
+          <a:lstStyle/>
+          <a:p>
+            <a:pPr algn="ctr" indent="0" marL="0">
+              <a:spcAft>
+                <a:spcPts val="0"/>
+              </a:spcAft>
+              <a:buNone/>
+            </a:pPr>
+            <a:r>
+              <a:rPr lang="zh-CN" sz="1400" b="1" dirty="0">
+                <a:solidFill>
+                  <a:srgbClr val="1E3D34"/>
+                </a:solidFill>
+                <a:latin typeface="Microsoft YaHei"/>
+                <a:ea typeface="Microsoft YaHei"/>
+                <a:cs typeface="Microsoft YaHei"/>
+              </a:rPr>
+              <a:t xml:space="preserve">19</a:t>
+            </a:r>
+          </a:p>
+        </p:txBody>
+      </p:sp>
+      <p:sp>
+        <p:nvSpPr>
+          <p:cNvPr id="134" name="Shape 134"/>
+          <p:cNvSpPr/>
+          <p:nvPr/>
+        </p:nvSpPr>
+        <p:spPr>
+          <a:xfrm>
+            <a:off x="3237200" y="1250000"/>
+            <a:ext cx="350000" cy="350000"/>
+          </a:xfrm>
+          <a:prstGeom prst="roundRect">
+            <a:avLst>
+              <a:gd name="adj" fmla="val 4000"/>
+            </a:avLst>
+          </a:prstGeom>
+          <a:solidFill>
+            <a:srgbClr val="F1F4F2"/>
+          </a:solidFill>
+          <a:ln>
+            <a:noFill/>
+          </a:ln>
+        </p:spPr>
+      </p:sp>
+      <p:sp>
+        <p:nvSpPr>
+          <p:cNvPr id="135" name="Text 135"/>
+          <p:cNvSpPr txBox="1"/>
+          <p:nvPr/>
+        </p:nvSpPr>
+        <p:spPr>
+          <a:xfrm>
+            <a:off x="3237200" y="1250000"/>
+            <a:ext cx="350000" cy="350000"/>
+          </a:xfrm>
+          <a:prstGeom prst="rect">
+            <a:avLst/>
+          </a:prstGeom>
+          <a:noFill/>
+          <a:ln>
+            <a:noFill/>
+          </a:ln>
+        </p:spPr>
+        <p:txBody>
+          <a:bodyPr wrap="square" lIns="0" tIns="0" rIns="0" bIns="0" rtlCol="0" anchor="ctr">
+            <a:normAutofit/>
+          </a:bodyPr>
+          <a:lstStyle/>
+          <a:p>
+            <a:pPr algn="ctr" indent="0" marL="0">
+              <a:spcAft>
+                <a:spcPts val="0"/>
+              </a:spcAft>
+              <a:buNone/>
+            </a:pPr>
+            <a:r>
+              <a:rPr lang="zh-CN" sz="1400" b="1" dirty="0">
+                <a:solidFill>
+                  <a:srgbClr val="1E3D34"/>
+                </a:solidFill>
+                <a:latin typeface="Microsoft YaHei"/>
+                <a:ea typeface="Microsoft YaHei"/>
+                <a:cs typeface="Microsoft YaHei"/>
+              </a:rPr>
+              <a:t xml:space="preserve">22</a:t>
+            </a:r>
+          </a:p>
+        </p:txBody>
+      </p:sp>
+      <p:sp>
+        <p:nvSpPr>
+          <p:cNvPr id="136" name="Shape 136"/>
+          <p:cNvSpPr/>
+          <p:nvPr/>
+        </p:nvSpPr>
+        <p:spPr>
+          <a:xfrm>
+            <a:off x="2857200" y="1630000"/>
+            <a:ext cx="350000" cy="350000"/>
+          </a:xfrm>
+          <a:prstGeom prst="roundRect">
+            <a:avLst>
+              <a:gd name="adj" fmla="val 4000"/>
+            </a:avLst>
+          </a:prstGeom>
+          <a:solidFill>
+            <a:srgbClr val="F1F4F2"/>
+          </a:solidFill>
+          <a:ln>
+            <a:noFill/>
+          </a:ln>
+        </p:spPr>
+      </p:sp>
+      <p:sp>
+        <p:nvSpPr>
+          <p:cNvPr id="137" name="Text 137"/>
+          <p:cNvSpPr txBox="1"/>
+          <p:nvPr/>
+        </p:nvSpPr>
+        <p:spPr>
+          <a:xfrm>
+            <a:off x="2857200" y="1630000"/>
+            <a:ext cx="350000" cy="350000"/>
+          </a:xfrm>
+          <a:prstGeom prst="rect">
+            <a:avLst/>
+          </a:prstGeom>
+          <a:noFill/>
+          <a:ln>
+            <a:noFill/>
+          </a:ln>
+        </p:spPr>
+        <p:txBody>
+          <a:bodyPr wrap="square" lIns="0" tIns="0" rIns="0" bIns="0" rtlCol="0" anchor="ctr">
+            <a:normAutofit/>
+          </a:bodyPr>
+          <a:lstStyle/>
+          <a:p>
+            <a:pPr algn="ctr" indent="0" marL="0">
+              <a:spcAft>
+                <a:spcPts val="0"/>
+              </a:spcAft>
+              <a:buNone/>
+            </a:pPr>
+            <a:r>
+              <a:rPr lang="zh-CN" sz="1400" b="1" dirty="0">
+                <a:solidFill>
+                  <a:srgbClr val="1E3D34"/>
+                </a:solidFill>
+                <a:latin typeface="Microsoft YaHei"/>
+                <a:ea typeface="Microsoft YaHei"/>
+                <a:cs typeface="Microsoft YaHei"/>
+              </a:rPr>
+              <a:t xml:space="preserve">43</a:t>
+            </a:r>
+          </a:p>
+        </p:txBody>
+      </p:sp>
+      <p:sp>
+        <p:nvSpPr>
+          <p:cNvPr id="138" name="Shape 138"/>
+          <p:cNvSpPr/>
+          <p:nvPr/>
+        </p:nvSpPr>
+        <p:spPr>
+          <a:xfrm>
+            <a:off x="3237200" y="1630000"/>
+            <a:ext cx="350000" cy="350000"/>
+          </a:xfrm>
+          <a:prstGeom prst="roundRect">
+            <a:avLst>
+              <a:gd name="adj" fmla="val 4000"/>
+            </a:avLst>
+          </a:prstGeom>
+          <a:solidFill>
+            <a:srgbClr val="F1F4F2"/>
+          </a:solidFill>
+          <a:ln>
+            <a:noFill/>
+          </a:ln>
+        </p:spPr>
+      </p:sp>
+      <p:sp>
+        <p:nvSpPr>
+          <p:cNvPr id="139" name="Text 139"/>
+          <p:cNvSpPr txBox="1"/>
+          <p:nvPr/>
+        </p:nvSpPr>
+        <p:spPr>
+          <a:xfrm>
+            <a:off x="3237200" y="1630000"/>
+            <a:ext cx="350000" cy="350000"/>
+          </a:xfrm>
+          <a:prstGeom prst="rect">
+            <a:avLst/>
+          </a:prstGeom>
+          <a:noFill/>
+          <a:ln>
+            <a:noFill/>
+          </a:ln>
+        </p:spPr>
+        <p:txBody>
+          <a:bodyPr wrap="square" lIns="0" tIns="0" rIns="0" bIns="0" rtlCol="0" anchor="ctr">
+            <a:normAutofit/>
+          </a:bodyPr>
+          <a:lstStyle/>
+          <a:p>
+            <a:pPr algn="ctr" indent="0" marL="0">
+              <a:spcAft>
+                <a:spcPts val="0"/>
+              </a:spcAft>
+              <a:buNone/>
+            </a:pPr>
+            <a:r>
+              <a:rPr lang="zh-CN" sz="1400" b="1" dirty="0">
+                <a:solidFill>
+                  <a:srgbClr val="1E3D34"/>
+                </a:solidFill>
+                <a:latin typeface="Microsoft YaHei"/>
+                <a:ea typeface="Microsoft YaHei"/>
+                <a:cs typeface="Microsoft YaHei"/>
+              </a:rPr>
+              <a:t xml:space="preserve">50</a:t>
+            </a:r>
+          </a:p>
+        </p:txBody>
+      </p:sp>
+      <p:sp>
+        <p:nvSpPr>
+          <p:cNvPr id="140" name="Shape 140"/>
+          <p:cNvSpPr/>
+          <p:nvPr/>
+        </p:nvSpPr>
+        <p:spPr>
+          <a:xfrm>
+            <a:off x="457200" y="2200000"/>
+            <a:ext cx="3250000" cy="2500000"/>
+          </a:xfrm>
+          <a:prstGeom prst="roundRect">
+            <a:avLst>
+              <a:gd name="adj" fmla="val 4000"/>
+            </a:avLst>
+          </a:prstGeom>
+          <a:solidFill>
+            <a:srgbClr val="FFF6E0"/>
+          </a:solidFill>
+          <a:ln>
+            <a:noFill/>
+          </a:ln>
+        </p:spPr>
+      </p:sp>
+      <p:sp>
+        <p:nvSpPr>
+          <p:cNvPr id="141" name="Text 141"/>
+          <p:cNvSpPr txBox="1"/>
+          <p:nvPr/>
+        </p:nvSpPr>
+        <p:spPr>
+          <a:xfrm>
+            <a:off x="587200" y="2260000"/>
+            <a:ext cx="3000000" cy="2400000"/>
+          </a:xfrm>
+          <a:prstGeom prst="rect">
+            <a:avLst/>
+          </a:prstGeom>
+          <a:noFill/>
+          <a:ln>
+            <a:noFill/>
+          </a:ln>
+        </p:spPr>
+        <p:txBody>
+          <a:bodyPr wrap="square" lIns="0" tIns="0" rIns="0" bIns="0" rtlCol="0" anchor="t">
+            <a:normAutofit/>
+          </a:bodyPr>
+          <a:lstStyle/>
+          <a:p>
+            <a:pPr algn="l" indent="0" marL="0">
+              <a:spcAft>
+                <a:spcPts val="600"/>
+              </a:spcAft>
+              <a:buNone/>
+            </a:pPr>
+            <a:r>
+              <a:rPr lang="zh-CN" sz="1200" b="1" dirty="0">
+                <a:solidFill>
+                  <a:srgbClr val="A06A00"/>
+                </a:solidFill>
+                <a:latin typeface="Microsoft YaHei"/>
+                <a:ea typeface="Microsoft YaHei"/>
+                <a:cs typeface="Microsoft YaHei"/>
+              </a:rPr>
+              <a:t xml:space="preserve">怎么读右边的表</a:t>
+            </a:r>
+          </a:p>
+          <a:p>
+            <a:pPr algn="l" indent="0" marL="0">
+              <a:spcAft>
+                <a:spcPts val="500"/>
+              </a:spcAft>
+              <a:buNone/>
+            </a:pPr>
+            <a:r>
+              <a:rPr lang="zh-CN" sz="1200" dirty="0">
+                <a:solidFill>
+                  <a:srgbClr val="2B2B2B"/>
+                </a:solidFill>
+                <a:latin typeface="Microsoft YaHei"/>
+                <a:ea typeface="Microsoft YaHei"/>
+                <a:cs typeface="Microsoft YaHei"/>
+              </a:rPr>
+              <a:t xml:space="preserve">v = A[i][t]：当前取出的那一个数</a:t>
+            </a:r>
+          </a:p>
+          <a:p>
+            <a:pPr algn="l" indent="0" marL="0">
+              <a:spcAft>
+                <a:spcPts val="500"/>
+              </a:spcAft>
+              <a:buNone/>
+            </a:pPr>
+            <a:r>
+              <a:rPr lang="zh-CN" sz="1200" dirty="0">
+                <a:solidFill>
+                  <a:srgbClr val="2B2B2B"/>
+                </a:solidFill>
+                <a:latin typeface="Microsoft YaHei"/>
+                <a:ea typeface="Microsoft YaHei"/>
+                <a:cs typeface="Microsoft YaHei"/>
+              </a:rPr>
+              <a:t xml:space="preserve">Bt = B[t]：B 的第 t 行，整行拿来乘</a:t>
+            </a:r>
+          </a:p>
+          <a:p>
+            <a:pPr algn="l" indent="0" marL="0">
+              <a:spcAft>
+                <a:spcPts val="500"/>
+              </a:spcAft>
+              <a:buNone/>
+            </a:pPr>
+            <a:r>
+              <a:rPr lang="zh-CN" sz="1200" dirty="0">
+                <a:solidFill>
+                  <a:srgbClr val="2B2B2B"/>
+                </a:solidFill>
+                <a:latin typeface="Microsoft YaHei"/>
+                <a:ea typeface="Microsoft YaHei"/>
+                <a:cs typeface="Microsoft YaHei"/>
+              </a:rPr>
+              <a:t xml:space="preserve">Ci：C 的第 i 行，每一轮在它上面累加，不是重新算</a:t>
+            </a:r>
+          </a:p>
+          <a:p>
+            <a:pPr algn="l" indent="0" marL="0">
+              <a:spcAft>
+                <a:spcPts val="0"/>
+              </a:spcAft>
+              <a:buNone/>
+            </a:pPr>
+            <a:r>
+              <a:rPr lang="zh-CN" sz="1200" b="1" dirty="0">
+                <a:solidFill>
+                  <a:srgbClr val="1E3D34"/>
+                </a:solidFill>
+                <a:latin typeface="Microsoft YaHei"/>
+                <a:ea typeface="Microsoft YaHei"/>
+                <a:cs typeface="Microsoft YaHei"/>
+              </a:rPr>
+              <a:t xml:space="preserve">例：C 的第 0 行 = 1×[5,6] + 2×[7,8] = [5,6] + [14,16] = [19,22]</a:t>
+            </a:r>
+          </a:p>
+        </p:txBody>
+      </p:sp>
+      <p:sp>
+        <p:nvSpPr>
+          <p:cNvPr id="142" name="Text 142"/>
+          <p:cNvSpPr txBox="1"/>
+          <p:nvPr/>
+        </p:nvSpPr>
+        <p:spPr>
+          <a:xfrm>
+            <a:off x="3857200" y="960120"/>
+            <a:ext cx="4829600" cy="250000"/>
+          </a:xfrm>
+          <a:prstGeom prst="rect">
+            <a:avLst/>
+          </a:prstGeom>
+          <a:noFill/>
+          <a:ln>
+            <a:noFill/>
+          </a:ln>
+        </p:spPr>
+        <p:txBody>
+          <a:bodyPr wrap="square" lIns="0" tIns="0" rIns="0" bIns="0" rtlCol="0" anchor="t">
+            <a:normAutofit/>
+          </a:bodyPr>
+          <a:lstStyle/>
+          <a:p>
+            <a:pPr algn="l" indent="0" marL="0">
+              <a:spcAft>
+                <a:spcPts val="0"/>
+              </a:spcAft>
+              <a:buNone/>
+            </a:pPr>
+            <a:r>
+              <a:rPr lang="zh-CN" sz="1200" b="1" dirty="0">
+                <a:solidFill>
+                  <a:srgbClr val="1E3D34"/>
+                </a:solidFill>
+                <a:latin typeface="Microsoft YaHei"/>
+                <a:ea typeface="Microsoft YaHei"/>
+                <a:cs typeface="Microsoft YaHei"/>
+              </a:rPr>
+              <a:t xml:space="preserve">手算追踪（Ci 起始为 [0, 0]）</a:t>
+            </a:r>
+          </a:p>
+        </p:txBody>
+      </p:sp>
+      <p:sp>
+        <p:nvSpPr>
+          <p:cNvPr id="143" name="Shape 143"/>
+          <p:cNvSpPr/>
+          <p:nvPr/>
+        </p:nvSpPr>
+        <p:spPr>
+          <a:xfrm>
+            <a:off x="3857200" y="1260120"/>
+            <a:ext cx="360000" cy="330000"/>
+          </a:xfrm>
+          <a:prstGeom prst="rect">
+            <a:avLst/>
+          </a:prstGeom>
+          <a:solidFill>
+            <a:srgbClr val="1E3D34"/>
+          </a:solidFill>
+          <a:ln>
+            <a:noFill/>
+          </a:ln>
+        </p:spPr>
+      </p:sp>
+      <p:sp>
+        <p:nvSpPr>
+          <p:cNvPr id="144" name="Text 144"/>
+          <p:cNvSpPr txBox="1"/>
+          <p:nvPr/>
+        </p:nvSpPr>
+        <p:spPr>
+          <a:xfrm>
+            <a:off x="3857200" y="1260120"/>
+            <a:ext cx="360000" cy="330000"/>
+          </a:xfrm>
+          <a:prstGeom prst="rect">
+            <a:avLst/>
+          </a:prstGeom>
+          <a:noFill/>
+          <a:ln>
+            <a:noFill/>
+          </a:ln>
+        </p:spPr>
+        <p:txBody>
+          <a:bodyPr wrap="square" lIns="0" tIns="0" rIns="0" bIns="0" rtlCol="0" anchor="ctr">
+            <a:normAutofit/>
+          </a:bodyPr>
+          <a:lstStyle/>
+          <a:p>
+            <a:pPr algn="ctr" indent="0" marL="0">
+              <a:spcAft>
+                <a:spcPts val="0"/>
+              </a:spcAft>
+              <a:buNone/>
+            </a:pPr>
+            <a:r>
+              <a:rPr lang="zh-CN" sz="1050" b="1" dirty="0">
+                <a:solidFill>
+                  <a:srgbClr val="FFFFFF"/>
+                </a:solidFill>
+                <a:latin typeface="Microsoft YaHei"/>
+                <a:ea typeface="Microsoft YaHei"/>
+                <a:cs typeface="Microsoft YaHei"/>
+              </a:rPr>
+              <a:t xml:space="preserve">i</a:t>
+            </a:r>
+          </a:p>
+        </p:txBody>
+      </p:sp>
+      <p:sp>
+        <p:nvSpPr>
+          <p:cNvPr id="145" name="Shape 145"/>
+          <p:cNvSpPr/>
+          <p:nvPr/>
+        </p:nvSpPr>
+        <p:spPr>
+          <a:xfrm>
+            <a:off x="4237200" y="1260120"/>
+            <a:ext cx="360000" cy="330000"/>
+          </a:xfrm>
+          <a:prstGeom prst="rect">
+            <a:avLst/>
+          </a:prstGeom>
+          <a:solidFill>
+            <a:srgbClr val="1E3D34"/>
+          </a:solidFill>
+          <a:ln>
+            <a:noFill/>
+          </a:ln>
+        </p:spPr>
+      </p:sp>
+      <p:sp>
+        <p:nvSpPr>
+          <p:cNvPr id="146" name="Text 146"/>
+          <p:cNvSpPr txBox="1"/>
+          <p:nvPr/>
+        </p:nvSpPr>
+        <p:spPr>
+          <a:xfrm>
+            <a:off x="4237200" y="1260120"/>
+            <a:ext cx="360000" cy="330000"/>
+          </a:xfrm>
+          <a:prstGeom prst="rect">
+            <a:avLst/>
+          </a:prstGeom>
+          <a:noFill/>
+          <a:ln>
+            <a:noFill/>
+          </a:ln>
+        </p:spPr>
+        <p:txBody>
+          <a:bodyPr wrap="square" lIns="0" tIns="0" rIns="0" bIns="0" rtlCol="0" anchor="ctr">
+            <a:normAutofit/>
+          </a:bodyPr>
+          <a:lstStyle/>
+          <a:p>
+            <a:pPr algn="ctr" indent="0" marL="0">
+              <a:spcAft>
+                <a:spcPts val="0"/>
+              </a:spcAft>
+              <a:buNone/>
+            </a:pPr>
+            <a:r>
+              <a:rPr lang="zh-CN" sz="1050" b="1" dirty="0">
+                <a:solidFill>
+                  <a:srgbClr val="FFFFFF"/>
+                </a:solidFill>
+                <a:latin typeface="Microsoft YaHei"/>
+                <a:ea typeface="Microsoft YaHei"/>
+                <a:cs typeface="Microsoft YaHei"/>
+              </a:rPr>
+              <a:t xml:space="preserve">t</a:t>
+            </a:r>
+          </a:p>
+        </p:txBody>
+      </p:sp>
+      <p:sp>
+        <p:nvSpPr>
+          <p:cNvPr id="147" name="Shape 147"/>
+          <p:cNvSpPr/>
+          <p:nvPr/>
+        </p:nvSpPr>
+        <p:spPr>
+          <a:xfrm>
+            <a:off x="4617200" y="1260120"/>
+            <a:ext cx="380000" cy="330000"/>
+          </a:xfrm>
+          <a:prstGeom prst="rect">
+            <a:avLst/>
+          </a:prstGeom>
+          <a:solidFill>
+            <a:srgbClr val="1E3D34"/>
+          </a:solidFill>
+          <a:ln>
+            <a:noFill/>
+          </a:ln>
+        </p:spPr>
+      </p:sp>
+      <p:sp>
+        <p:nvSpPr>
+          <p:cNvPr id="148" name="Text 148"/>
+          <p:cNvSpPr txBox="1"/>
+          <p:nvPr/>
+        </p:nvSpPr>
+        <p:spPr>
+          <a:xfrm>
+            <a:off x="4617200" y="1260120"/>
+            <a:ext cx="380000" cy="330000"/>
+          </a:xfrm>
+          <a:prstGeom prst="rect">
+            <a:avLst/>
+          </a:prstGeom>
+          <a:noFill/>
+          <a:ln>
+            <a:noFill/>
+          </a:ln>
+        </p:spPr>
+        <p:txBody>
+          <a:bodyPr wrap="square" lIns="0" tIns="0" rIns="0" bIns="0" rtlCol="0" anchor="ctr">
+            <a:normAutofit/>
+          </a:bodyPr>
+          <a:lstStyle/>
+          <a:p>
+            <a:pPr algn="ctr" indent="0" marL="0">
+              <a:spcAft>
+                <a:spcPts val="0"/>
+              </a:spcAft>
+              <a:buNone/>
+            </a:pPr>
+            <a:r>
+              <a:rPr lang="zh-CN" sz="1050" b="1" dirty="0">
+                <a:solidFill>
+                  <a:srgbClr val="FFFFFF"/>
+                </a:solidFill>
+                <a:latin typeface="Microsoft YaHei"/>
+                <a:ea typeface="Microsoft YaHei"/>
+                <a:cs typeface="Microsoft YaHei"/>
+              </a:rPr>
+              <a:t xml:space="preserve">v</a:t>
+            </a:r>
+          </a:p>
+        </p:txBody>
+      </p:sp>
+      <p:sp>
+        <p:nvSpPr>
+          <p:cNvPr id="149" name="Shape 149"/>
+          <p:cNvSpPr/>
+          <p:nvPr/>
+        </p:nvSpPr>
+        <p:spPr>
+          <a:xfrm>
+            <a:off x="5017200" y="1260120"/>
+            <a:ext cx="700000" cy="330000"/>
+          </a:xfrm>
+          <a:prstGeom prst="rect">
+            <a:avLst/>
+          </a:prstGeom>
+          <a:solidFill>
+            <a:srgbClr val="1E3D34"/>
+          </a:solidFill>
+          <a:ln>
+            <a:noFill/>
+          </a:ln>
+        </p:spPr>
+      </p:sp>
+      <p:sp>
+        <p:nvSpPr>
+          <p:cNvPr id="150" name="Text 150"/>
+          <p:cNvSpPr txBox="1"/>
+          <p:nvPr/>
+        </p:nvSpPr>
+        <p:spPr>
+          <a:xfrm>
+            <a:off x="5017200" y="1260120"/>
+            <a:ext cx="700000" cy="330000"/>
+          </a:xfrm>
+          <a:prstGeom prst="rect">
+            <a:avLst/>
+          </a:prstGeom>
+          <a:noFill/>
+          <a:ln>
+            <a:noFill/>
+          </a:ln>
+        </p:spPr>
+        <p:txBody>
+          <a:bodyPr wrap="square" lIns="0" tIns="0" rIns="0" bIns="0" rtlCol="0" anchor="ctr">
+            <a:normAutofit/>
+          </a:bodyPr>
+          <a:lstStyle/>
+          <a:p>
+            <a:pPr algn="ctr" indent="0" marL="0">
+              <a:spcAft>
+                <a:spcPts val="0"/>
+              </a:spcAft>
+              <a:buNone/>
+            </a:pPr>
+            <a:r>
+              <a:rPr lang="zh-CN" sz="1050" b="1" dirty="0">
+                <a:solidFill>
+                  <a:srgbClr val="FFFFFF"/>
+                </a:solidFill>
+                <a:latin typeface="Microsoft YaHei"/>
+                <a:ea typeface="Microsoft YaHei"/>
+                <a:cs typeface="Microsoft YaHei"/>
+              </a:rPr>
+              <a:t xml:space="preserve">Bt</a:t>
+            </a:r>
+          </a:p>
+        </p:txBody>
+      </p:sp>
+      <p:sp>
+        <p:nvSpPr>
+          <p:cNvPr id="151" name="Shape 151"/>
+          <p:cNvSpPr/>
+          <p:nvPr/>
+        </p:nvSpPr>
+        <p:spPr>
+          <a:xfrm>
+            <a:off x="5737200" y="1260120"/>
+            <a:ext cx="880000" cy="330000"/>
+          </a:xfrm>
+          <a:prstGeom prst="rect">
+            <a:avLst/>
+          </a:prstGeom>
+          <a:solidFill>
+            <a:srgbClr val="1E3D34"/>
+          </a:solidFill>
+          <a:ln>
+            <a:noFill/>
+          </a:ln>
+        </p:spPr>
+      </p:sp>
+      <p:sp>
+        <p:nvSpPr>
+          <p:cNvPr id="152" name="Text 152"/>
+          <p:cNvSpPr txBox="1"/>
+          <p:nvPr/>
+        </p:nvSpPr>
+        <p:spPr>
+          <a:xfrm>
+            <a:off x="5737200" y="1260120"/>
+            <a:ext cx="880000" cy="330000"/>
+          </a:xfrm>
+          <a:prstGeom prst="rect">
+            <a:avLst/>
+          </a:prstGeom>
+          <a:noFill/>
+          <a:ln>
+            <a:noFill/>
+          </a:ln>
+        </p:spPr>
+        <p:txBody>
+          <a:bodyPr wrap="square" lIns="0" tIns="0" rIns="0" bIns="0" rtlCol="0" anchor="ctr">
+            <a:normAutofit/>
+          </a:bodyPr>
+          <a:lstStyle/>
+          <a:p>
+            <a:pPr algn="ctr" indent="0" marL="0">
+              <a:spcAft>
+                <a:spcPts val="0"/>
+              </a:spcAft>
+              <a:buNone/>
+            </a:pPr>
+            <a:r>
+              <a:rPr lang="zh-CN" sz="1050" b="1" dirty="0">
+                <a:solidFill>
+                  <a:srgbClr val="FFFFFF"/>
+                </a:solidFill>
+                <a:latin typeface="Microsoft YaHei"/>
+                <a:ea typeface="Microsoft YaHei"/>
+                <a:cs typeface="Microsoft YaHei"/>
+              </a:rPr>
+              <a:t xml:space="preserve">v·Bt</a:t>
+            </a:r>
+          </a:p>
+        </p:txBody>
+      </p:sp>
+      <p:sp>
+        <p:nvSpPr>
+          <p:cNvPr id="153" name="Shape 153"/>
+          <p:cNvSpPr/>
+          <p:nvPr/>
+        </p:nvSpPr>
+        <p:spPr>
+          <a:xfrm>
+            <a:off x="6637200" y="1260120"/>
+            <a:ext cx="2029600" cy="330000"/>
+          </a:xfrm>
+          <a:prstGeom prst="rect">
+            <a:avLst/>
+          </a:prstGeom>
+          <a:solidFill>
+            <a:srgbClr val="1E3D34"/>
+          </a:solidFill>
+          <a:ln>
+            <a:noFill/>
+          </a:ln>
+        </p:spPr>
+      </p:sp>
+      <p:sp>
+        <p:nvSpPr>
+          <p:cNvPr id="154" name="Text 154"/>
+          <p:cNvSpPr txBox="1"/>
+          <p:nvPr/>
+        </p:nvSpPr>
+        <p:spPr>
+          <a:xfrm>
+            <a:off x="6637200" y="1260120"/>
+            <a:ext cx="2029600" cy="330000"/>
+          </a:xfrm>
+          <a:prstGeom prst="rect">
+            <a:avLst/>
+          </a:prstGeom>
+          <a:noFill/>
+          <a:ln>
+            <a:noFill/>
+          </a:ln>
+        </p:spPr>
+        <p:txBody>
+          <a:bodyPr wrap="square" lIns="0" tIns="0" rIns="0" bIns="0" rtlCol="0" anchor="ctr">
+            <a:normAutofit/>
+          </a:bodyPr>
+          <a:lstStyle/>
+          <a:p>
+            <a:pPr algn="ctr" indent="0" marL="0">
+              <a:spcAft>
+                <a:spcPts val="0"/>
+              </a:spcAft>
+              <a:buNone/>
+            </a:pPr>
+            <a:r>
+              <a:rPr lang="zh-CN" sz="1050" b="1" dirty="0">
+                <a:solidFill>
+                  <a:srgbClr val="FFFFFF"/>
+                </a:solidFill>
+                <a:latin typeface="Microsoft YaHei"/>
+                <a:ea typeface="Microsoft YaHei"/>
+                <a:cs typeface="Microsoft YaHei"/>
+              </a:rPr>
+              <a:t xml:space="preserve">累加后 Ci</a:t>
+            </a:r>
+          </a:p>
+        </p:txBody>
+      </p:sp>
+      <p:sp>
+        <p:nvSpPr>
+          <p:cNvPr id="155" name="Shape 155"/>
+          <p:cNvSpPr/>
+          <p:nvPr/>
+        </p:nvSpPr>
+        <p:spPr>
+          <a:xfrm>
+            <a:off x="3857200" y="1610120"/>
+            <a:ext cx="360000" cy="330000"/>
+          </a:xfrm>
+          <a:prstGeom prst="rect">
+            <a:avLst/>
+          </a:prstGeom>
+          <a:solidFill>
+            <a:srgbClr val="F1F4F2"/>
+          </a:solidFill>
+          <a:ln>
+            <a:noFill/>
+          </a:ln>
+        </p:spPr>
+      </p:sp>
+      <p:sp>
+        <p:nvSpPr>
+          <p:cNvPr id="156" name="Text 156"/>
+          <p:cNvSpPr txBox="1"/>
+          <p:nvPr/>
+        </p:nvSpPr>
+        <p:spPr>
+          <a:xfrm>
+            <a:off x="3857200" y="1610120"/>
+            <a:ext cx="360000" cy="330000"/>
+          </a:xfrm>
+          <a:prstGeom prst="rect">
+            <a:avLst/>
+          </a:prstGeom>
+          <a:noFill/>
+          <a:ln>
+            <a:noFill/>
+          </a:ln>
+        </p:spPr>
+        <p:txBody>
+          <a:bodyPr wrap="square" lIns="0" tIns="0" rIns="0" bIns="0" rtlCol="0" anchor="ctr">
+            <a:normAutofit/>
+          </a:bodyPr>
+          <a:lstStyle/>
+          <a:p>
+            <a:pPr algn="ctr" indent="0" marL="0">
+              <a:spcAft>
+                <a:spcPts val="0"/>
+              </a:spcAft>
+              <a:buNone/>
+            </a:pPr>
+            <a:r>
+              <a:rPr lang="zh-CN" sz="1050" dirty="0">
+                <a:solidFill>
+                  <a:srgbClr val="2B2B2B"/>
+                </a:solidFill>
+                <a:latin typeface="Consolas"/>
+                <a:ea typeface="Microsoft YaHei"/>
+                <a:cs typeface="Consolas"/>
+              </a:rPr>
+              <a:t xml:space="preserve">0</a:t>
+            </a:r>
+          </a:p>
+        </p:txBody>
+      </p:sp>
+      <p:sp>
+        <p:nvSpPr>
+          <p:cNvPr id="157" name="Shape 157"/>
+          <p:cNvSpPr/>
+          <p:nvPr/>
+        </p:nvSpPr>
+        <p:spPr>
+          <a:xfrm>
+            <a:off x="4237200" y="1610120"/>
+            <a:ext cx="360000" cy="330000"/>
+          </a:xfrm>
+          <a:prstGeom prst="rect">
+            <a:avLst/>
+          </a:prstGeom>
+          <a:solidFill>
+            <a:srgbClr val="F1F4F2"/>
+          </a:solidFill>
+          <a:ln>
+            <a:noFill/>
+          </a:ln>
+        </p:spPr>
+      </p:sp>
+      <p:sp>
+        <p:nvSpPr>
+          <p:cNvPr id="158" name="Text 158"/>
+          <p:cNvSpPr txBox="1"/>
+          <p:nvPr/>
+        </p:nvSpPr>
+        <p:spPr>
+          <a:xfrm>
+            <a:off x="4237200" y="1610120"/>
+            <a:ext cx="360000" cy="330000"/>
+          </a:xfrm>
+          <a:prstGeom prst="rect">
+            <a:avLst/>
+          </a:prstGeom>
+          <a:noFill/>
+          <a:ln>
+            <a:noFill/>
+          </a:ln>
+        </p:spPr>
+        <p:txBody>
+          <a:bodyPr wrap="square" lIns="0" tIns="0" rIns="0" bIns="0" rtlCol="0" anchor="ctr">
+            <a:normAutofit/>
+          </a:bodyPr>
+          <a:lstStyle/>
+          <a:p>
+            <a:pPr algn="ctr" indent="0" marL="0">
+              <a:spcAft>
+                <a:spcPts val="0"/>
+              </a:spcAft>
+              <a:buNone/>
+            </a:pPr>
+            <a:r>
+              <a:rPr lang="zh-CN" sz="1050" dirty="0">
+                <a:solidFill>
+                  <a:srgbClr val="2B2B2B"/>
+                </a:solidFill>
+                <a:latin typeface="Consolas"/>
+                <a:ea typeface="Microsoft YaHei"/>
+                <a:cs typeface="Consolas"/>
+              </a:rPr>
+              <a:t xml:space="preserve">0</a:t>
+            </a:r>
+          </a:p>
+        </p:txBody>
+      </p:sp>
+      <p:sp>
+        <p:nvSpPr>
+          <p:cNvPr id="159" name="Shape 159"/>
+          <p:cNvSpPr/>
+          <p:nvPr/>
+        </p:nvSpPr>
+        <p:spPr>
+          <a:xfrm>
+            <a:off x="4617200" y="1610120"/>
+            <a:ext cx="380000" cy="330000"/>
+          </a:xfrm>
+          <a:prstGeom prst="rect">
+            <a:avLst/>
+          </a:prstGeom>
+          <a:solidFill>
+            <a:srgbClr val="F1F4F2"/>
+          </a:solidFill>
+          <a:ln>
+            <a:noFill/>
+          </a:ln>
+        </p:spPr>
+      </p:sp>
+      <p:sp>
+        <p:nvSpPr>
+          <p:cNvPr id="160" name="Text 160"/>
+          <p:cNvSpPr txBox="1"/>
+          <p:nvPr/>
+        </p:nvSpPr>
+        <p:spPr>
+          <a:xfrm>
+            <a:off x="4617200" y="1610120"/>
+            <a:ext cx="380000" cy="330000"/>
+          </a:xfrm>
+          <a:prstGeom prst="rect">
+            <a:avLst/>
+          </a:prstGeom>
+          <a:noFill/>
+          <a:ln>
+            <a:noFill/>
+          </a:ln>
+        </p:spPr>
+        <p:txBody>
+          <a:bodyPr wrap="square" lIns="0" tIns="0" rIns="0" bIns="0" rtlCol="0" anchor="ctr">
+            <a:normAutofit/>
+          </a:bodyPr>
+          <a:lstStyle/>
+          <a:p>
+            <a:pPr algn="ctr" indent="0" marL="0">
+              <a:spcAft>
+                <a:spcPts val="0"/>
+              </a:spcAft>
+              <a:buNone/>
+            </a:pPr>
+            <a:r>
+              <a:rPr lang="zh-CN" sz="1050" dirty="0">
+                <a:solidFill>
+                  <a:srgbClr val="2B2B2B"/>
+                </a:solidFill>
+                <a:latin typeface="Consolas"/>
+                <a:ea typeface="Microsoft YaHei"/>
+                <a:cs typeface="Consolas"/>
+              </a:rPr>
+              <a:t xml:space="preserve">1</a:t>
+            </a:r>
+          </a:p>
+        </p:txBody>
+      </p:sp>
+      <p:sp>
+        <p:nvSpPr>
+          <p:cNvPr id="161" name="Shape 161"/>
+          <p:cNvSpPr/>
+          <p:nvPr/>
+        </p:nvSpPr>
+        <p:spPr>
+          <a:xfrm>
+            <a:off x="5017200" y="1610120"/>
+            <a:ext cx="700000" cy="330000"/>
+          </a:xfrm>
+          <a:prstGeom prst="rect">
+            <a:avLst/>
+          </a:prstGeom>
+          <a:solidFill>
+            <a:srgbClr val="F1F4F2"/>
+          </a:solidFill>
+          <a:ln>
+            <a:noFill/>
+          </a:ln>
+        </p:spPr>
+      </p:sp>
+      <p:sp>
+        <p:nvSpPr>
+          <p:cNvPr id="162" name="Text 162"/>
+          <p:cNvSpPr txBox="1"/>
+          <p:nvPr/>
+        </p:nvSpPr>
+        <p:spPr>
+          <a:xfrm>
+            <a:off x="5017200" y="1610120"/>
+            <a:ext cx="700000" cy="330000"/>
+          </a:xfrm>
+          <a:prstGeom prst="rect">
+            <a:avLst/>
+          </a:prstGeom>
+          <a:noFill/>
+          <a:ln>
+            <a:noFill/>
+          </a:ln>
+        </p:spPr>
+        <p:txBody>
+          <a:bodyPr wrap="square" lIns="0" tIns="0" rIns="0" bIns="0" rtlCol="0" anchor="ctr">
+            <a:normAutofit/>
+          </a:bodyPr>
+          <a:lstStyle/>
+          <a:p>
+            <a:pPr algn="ctr" indent="0" marL="0">
+              <a:spcAft>
+                <a:spcPts val="0"/>
+              </a:spcAft>
+              <a:buNone/>
+            </a:pPr>
+            <a:r>
+              <a:rPr lang="zh-CN" sz="1050" dirty="0">
+                <a:solidFill>
+                  <a:srgbClr val="2B2B2B"/>
+                </a:solidFill>
+                <a:latin typeface="Consolas"/>
+                <a:ea typeface="Microsoft YaHei"/>
+                <a:cs typeface="Consolas"/>
+              </a:rPr>
+              <a:t xml:space="preserve">[5, 6]</a:t>
+            </a:r>
+          </a:p>
+        </p:txBody>
+      </p:sp>
+      <p:sp>
+        <p:nvSpPr>
+          <p:cNvPr id="163" name="Shape 163"/>
+          <p:cNvSpPr/>
+          <p:nvPr/>
+        </p:nvSpPr>
+        <p:spPr>
+          <a:xfrm>
+            <a:off x="5737200" y="1610120"/>
+            <a:ext cx="880000" cy="330000"/>
+          </a:xfrm>
+          <a:prstGeom prst="rect">
+            <a:avLst/>
+          </a:prstGeom>
+          <a:solidFill>
+            <a:srgbClr val="F1F4F2"/>
+          </a:solidFill>
+          <a:ln>
+            <a:noFill/>
+          </a:ln>
+        </p:spPr>
+      </p:sp>
+      <p:sp>
+        <p:nvSpPr>
+          <p:cNvPr id="164" name="Text 164"/>
+          <p:cNvSpPr txBox="1"/>
+          <p:nvPr/>
+        </p:nvSpPr>
+        <p:spPr>
+          <a:xfrm>
+            <a:off x="5737200" y="1610120"/>
+            <a:ext cx="880000" cy="330000"/>
+          </a:xfrm>
+          <a:prstGeom prst="rect">
+            <a:avLst/>
+          </a:prstGeom>
+          <a:noFill/>
+          <a:ln>
+            <a:noFill/>
+          </a:ln>
+        </p:spPr>
+        <p:txBody>
+          <a:bodyPr wrap="square" lIns="0" tIns="0" rIns="0" bIns="0" rtlCol="0" anchor="ctr">
+            <a:normAutofit/>
+          </a:bodyPr>
+          <a:lstStyle/>
+          <a:p>
+            <a:pPr algn="ctr" indent="0" marL="0">
+              <a:spcAft>
+                <a:spcPts val="0"/>
+              </a:spcAft>
+              <a:buNone/>
+            </a:pPr>
+            <a:r>
+              <a:rPr lang="zh-CN" sz="1050" dirty="0">
+                <a:solidFill>
+                  <a:srgbClr val="2B2B2B"/>
+                </a:solidFill>
+                <a:latin typeface="Consolas"/>
+                <a:ea typeface="Microsoft YaHei"/>
+                <a:cs typeface="Consolas"/>
+              </a:rPr>
+              <a:t xml:space="preserve">[5, 6]</a:t>
+            </a:r>
+          </a:p>
+        </p:txBody>
+      </p:sp>
+      <p:sp>
+        <p:nvSpPr>
+          <p:cNvPr id="165" name="Shape 165"/>
+          <p:cNvSpPr/>
+          <p:nvPr/>
+        </p:nvSpPr>
+        <p:spPr>
+          <a:xfrm>
+            <a:off x="6637200" y="1610120"/>
+            <a:ext cx="2029600" cy="330000"/>
+          </a:xfrm>
+          <a:prstGeom prst="rect">
+            <a:avLst/>
+          </a:prstGeom>
+          <a:solidFill>
+            <a:srgbClr val="F1F4F2"/>
+          </a:solidFill>
+          <a:ln>
+            <a:noFill/>
+          </a:ln>
+        </p:spPr>
+      </p:sp>
+      <p:sp>
+        <p:nvSpPr>
+          <p:cNvPr id="166" name="Text 166"/>
+          <p:cNvSpPr txBox="1"/>
+          <p:nvPr/>
+        </p:nvSpPr>
+        <p:spPr>
+          <a:xfrm>
+            <a:off x="6637200" y="1610120"/>
+            <a:ext cx="2029600" cy="330000"/>
+          </a:xfrm>
+          <a:prstGeom prst="rect">
+            <a:avLst/>
+          </a:prstGeom>
+          <a:noFill/>
+          <a:ln>
+            <a:noFill/>
+          </a:ln>
+        </p:spPr>
+        <p:txBody>
+          <a:bodyPr wrap="square" lIns="0" tIns="0" rIns="0" bIns="0" rtlCol="0" anchor="ctr">
+            <a:normAutofit/>
+          </a:bodyPr>
+          <a:lstStyle/>
+          <a:p>
+            <a:pPr algn="ctr" indent="0" marL="0">
+              <a:spcAft>
+                <a:spcPts val="0"/>
+              </a:spcAft>
+              <a:buNone/>
+            </a:pPr>
+            <a:r>
+              <a:rPr lang="zh-CN" sz="1050" b="1" dirty="0">
+                <a:solidFill>
+                  <a:srgbClr val="1E3D34"/>
+                </a:solidFill>
+                <a:latin typeface="Consolas"/>
+                <a:ea typeface="Microsoft YaHei"/>
+                <a:cs typeface="Consolas"/>
+              </a:rPr>
+              <a:t xml:space="preserve">[5, 6]</a:t>
+            </a:r>
+          </a:p>
+        </p:txBody>
+      </p:sp>
+      <p:sp>
+        <p:nvSpPr>
+          <p:cNvPr id="167" name="Shape 167"/>
+          <p:cNvSpPr/>
+          <p:nvPr/>
+        </p:nvSpPr>
+        <p:spPr>
+          <a:xfrm>
+            <a:off x="3857200" y="1960120"/>
+            <a:ext cx="360000" cy="330000"/>
+          </a:xfrm>
+          <a:prstGeom prst="rect">
+            <a:avLst/>
+          </a:prstGeom>
+          <a:solidFill>
+            <a:srgbClr val="F1F4F2"/>
+          </a:solidFill>
+          <a:ln>
+            <a:noFill/>
+          </a:ln>
+        </p:spPr>
+      </p:sp>
+      <p:sp>
+        <p:nvSpPr>
+          <p:cNvPr id="168" name="Text 168"/>
+          <p:cNvSpPr txBox="1"/>
+          <p:nvPr/>
+        </p:nvSpPr>
+        <p:spPr>
+          <a:xfrm>
+            <a:off x="3857200" y="1960120"/>
+            <a:ext cx="360000" cy="330000"/>
+          </a:xfrm>
+          <a:prstGeom prst="rect">
+            <a:avLst/>
+          </a:prstGeom>
+          <a:noFill/>
+          <a:ln>
+            <a:noFill/>
+          </a:ln>
+        </p:spPr>
+        <p:txBody>
+          <a:bodyPr wrap="square" lIns="0" tIns="0" rIns="0" bIns="0" rtlCol="0" anchor="ctr">
+            <a:normAutofit/>
+          </a:bodyPr>
+          <a:lstStyle/>
+          <a:p>
+            <a:pPr algn="ctr" indent="0" marL="0">
+              <a:spcAft>
+                <a:spcPts val="0"/>
+              </a:spcAft>
+              <a:buNone/>
+            </a:pPr>
+            <a:r>
+              <a:rPr lang="zh-CN" sz="1050" dirty="0">
+                <a:solidFill>
+                  <a:srgbClr val="2B2B2B"/>
+                </a:solidFill>
+                <a:latin typeface="Consolas"/>
+                <a:ea typeface="Microsoft YaHei"/>
+                <a:cs typeface="Consolas"/>
+              </a:rPr>
+              <a:t xml:space="preserve">0</a:t>
+            </a:r>
+          </a:p>
+        </p:txBody>
+      </p:sp>
+      <p:sp>
+        <p:nvSpPr>
+          <p:cNvPr id="169" name="Shape 169"/>
+          <p:cNvSpPr/>
+          <p:nvPr/>
+        </p:nvSpPr>
+        <p:spPr>
+          <a:xfrm>
+            <a:off x="4237200" y="1960120"/>
+            <a:ext cx="360000" cy="330000"/>
+          </a:xfrm>
+          <a:prstGeom prst="rect">
+            <a:avLst/>
+          </a:prstGeom>
+          <a:solidFill>
+            <a:srgbClr val="F1F4F2"/>
+          </a:solidFill>
+          <a:ln>
+            <a:noFill/>
+          </a:ln>
+        </p:spPr>
+      </p:sp>
+      <p:sp>
+        <p:nvSpPr>
+          <p:cNvPr id="170" name="Text 170"/>
+          <p:cNvSpPr txBox="1"/>
+          <p:nvPr/>
+        </p:nvSpPr>
+        <p:spPr>
+          <a:xfrm>
+            <a:off x="4237200" y="1960120"/>
+            <a:ext cx="360000" cy="330000"/>
+          </a:xfrm>
+          <a:prstGeom prst="rect">
+            <a:avLst/>
+          </a:prstGeom>
+          <a:noFill/>
+          <a:ln>
+            <a:noFill/>
+          </a:ln>
+        </p:spPr>
+        <p:txBody>
+          <a:bodyPr wrap="square" lIns="0" tIns="0" rIns="0" bIns="0" rtlCol="0" anchor="ctr">
+            <a:normAutofit/>
+          </a:bodyPr>
+          <a:lstStyle/>
+          <a:p>
+            <a:pPr algn="ctr" indent="0" marL="0">
+              <a:spcAft>
+                <a:spcPts val="0"/>
+              </a:spcAft>
+              <a:buNone/>
+            </a:pPr>
+            <a:r>
+              <a:rPr lang="zh-CN" sz="1050" dirty="0">
+                <a:solidFill>
+                  <a:srgbClr val="2B2B2B"/>
+                </a:solidFill>
+                <a:latin typeface="Consolas"/>
+                <a:ea typeface="Microsoft YaHei"/>
+                <a:cs typeface="Consolas"/>
+              </a:rPr>
+              <a:t xml:space="preserve">1</a:t>
+            </a:r>
+          </a:p>
+        </p:txBody>
+      </p:sp>
+      <p:sp>
+        <p:nvSpPr>
+          <p:cNvPr id="171" name="Shape 171"/>
+          <p:cNvSpPr/>
+          <p:nvPr/>
+        </p:nvSpPr>
+        <p:spPr>
+          <a:xfrm>
+            <a:off x="4617200" y="1960120"/>
+            <a:ext cx="380000" cy="330000"/>
+          </a:xfrm>
+          <a:prstGeom prst="rect">
+            <a:avLst/>
+          </a:prstGeom>
+          <a:solidFill>
+            <a:srgbClr val="F1F4F2"/>
+          </a:solidFill>
+          <a:ln>
+            <a:noFill/>
+          </a:ln>
+        </p:spPr>
+      </p:sp>
+      <p:sp>
+        <p:nvSpPr>
+          <p:cNvPr id="172" name="Text 172"/>
+          <p:cNvSpPr txBox="1"/>
+          <p:nvPr/>
+        </p:nvSpPr>
+        <p:spPr>
+          <a:xfrm>
+            <a:off x="4617200" y="1960120"/>
+            <a:ext cx="380000" cy="330000"/>
+          </a:xfrm>
+          <a:prstGeom prst="rect">
+            <a:avLst/>
+          </a:prstGeom>
+          <a:noFill/>
+          <a:ln>
+            <a:noFill/>
+          </a:ln>
+        </p:spPr>
+        <p:txBody>
+          <a:bodyPr wrap="square" lIns="0" tIns="0" rIns="0" bIns="0" rtlCol="0" anchor="ctr">
+            <a:normAutofit/>
+          </a:bodyPr>
+          <a:lstStyle/>
+          <a:p>
+            <a:pPr algn="ctr" indent="0" marL="0">
+              <a:spcAft>
+                <a:spcPts val="0"/>
+              </a:spcAft>
+              <a:buNone/>
+            </a:pPr>
+            <a:r>
+              <a:rPr lang="zh-CN" sz="1050" dirty="0">
+                <a:solidFill>
+                  <a:srgbClr val="2B2B2B"/>
+                </a:solidFill>
+                <a:latin typeface="Consolas"/>
+                <a:ea typeface="Microsoft YaHei"/>
+                <a:cs typeface="Consolas"/>
+              </a:rPr>
+              <a:t xml:space="preserve">2</a:t>
+            </a:r>
+          </a:p>
+        </p:txBody>
+      </p:sp>
+      <p:sp>
+        <p:nvSpPr>
+          <p:cNvPr id="173" name="Shape 173"/>
+          <p:cNvSpPr/>
+          <p:nvPr/>
+        </p:nvSpPr>
+        <p:spPr>
+          <a:xfrm>
+            <a:off x="5017200" y="1960120"/>
+            <a:ext cx="700000" cy="330000"/>
+          </a:xfrm>
+          <a:prstGeom prst="rect">
+            <a:avLst/>
+          </a:prstGeom>
+          <a:solidFill>
+            <a:srgbClr val="F1F4F2"/>
+          </a:solidFill>
+          <a:ln>
+            <a:noFill/>
+          </a:ln>
+        </p:spPr>
+      </p:sp>
+      <p:sp>
+        <p:nvSpPr>
+          <p:cNvPr id="174" name="Text 174"/>
+          <p:cNvSpPr txBox="1"/>
+          <p:nvPr/>
+        </p:nvSpPr>
+        <p:spPr>
+          <a:xfrm>
+            <a:off x="5017200" y="1960120"/>
+            <a:ext cx="700000" cy="330000"/>
+          </a:xfrm>
+          <a:prstGeom prst="rect">
+            <a:avLst/>
+          </a:prstGeom>
+          <a:noFill/>
+          <a:ln>
+            <a:noFill/>
+          </a:ln>
+        </p:spPr>
+        <p:txBody>
+          <a:bodyPr wrap="square" lIns="0" tIns="0" rIns="0" bIns="0" rtlCol="0" anchor="ctr">
+            <a:normAutofit/>
+          </a:bodyPr>
+          <a:lstStyle/>
+          <a:p>
+            <a:pPr algn="ctr" indent="0" marL="0">
+              <a:spcAft>
+                <a:spcPts val="0"/>
+              </a:spcAft>
+              <a:buNone/>
+            </a:pPr>
+            <a:r>
+              <a:rPr lang="zh-CN" sz="1050" dirty="0">
+                <a:solidFill>
+                  <a:srgbClr val="2B2B2B"/>
+                </a:solidFill>
+                <a:latin typeface="Consolas"/>
+                <a:ea typeface="Microsoft YaHei"/>
+                <a:cs typeface="Consolas"/>
+              </a:rPr>
+              <a:t xml:space="preserve">[7, 8]</a:t>
+            </a:r>
+          </a:p>
+        </p:txBody>
+      </p:sp>
+      <p:sp>
+        <p:nvSpPr>
+          <p:cNvPr id="175" name="Shape 175"/>
+          <p:cNvSpPr/>
+          <p:nvPr/>
+        </p:nvSpPr>
+        <p:spPr>
+          <a:xfrm>
+            <a:off x="5737200" y="1960120"/>
+            <a:ext cx="880000" cy="330000"/>
+          </a:xfrm>
+          <a:prstGeom prst="rect">
+            <a:avLst/>
+          </a:prstGeom>
+          <a:solidFill>
+            <a:srgbClr val="F1F4F2"/>
+          </a:solidFill>
+          <a:ln>
+            <a:noFill/>
+          </a:ln>
+        </p:spPr>
+      </p:sp>
+      <p:sp>
+        <p:nvSpPr>
+          <p:cNvPr id="176" name="Text 176"/>
+          <p:cNvSpPr txBox="1"/>
+          <p:nvPr/>
+        </p:nvSpPr>
+        <p:spPr>
+          <a:xfrm>
+            <a:off x="5737200" y="1960120"/>
+            <a:ext cx="880000" cy="330000"/>
+          </a:xfrm>
+          <a:prstGeom prst="rect">
+            <a:avLst/>
+          </a:prstGeom>
+          <a:noFill/>
+          <a:ln>
+            <a:noFill/>
+          </a:ln>
+        </p:spPr>
+        <p:txBody>
+          <a:bodyPr wrap="square" lIns="0" tIns="0" rIns="0" bIns="0" rtlCol="0" anchor="ctr">
+            <a:normAutofit/>
+          </a:bodyPr>
+          <a:lstStyle/>
+          <a:p>
+            <a:pPr algn="ctr" indent="0" marL="0">
+              <a:spcAft>
+                <a:spcPts val="0"/>
+              </a:spcAft>
+              <a:buNone/>
+            </a:pPr>
+            <a:r>
+              <a:rPr lang="zh-CN" sz="1050" dirty="0">
+                <a:solidFill>
+                  <a:srgbClr val="2B2B2B"/>
+                </a:solidFill>
+                <a:latin typeface="Consolas"/>
+                <a:ea typeface="Microsoft YaHei"/>
+                <a:cs typeface="Consolas"/>
+              </a:rPr>
+              <a:t xml:space="preserve">[14, 16]</a:t>
+            </a:r>
+          </a:p>
+        </p:txBody>
+      </p:sp>
+      <p:sp>
+        <p:nvSpPr>
+          <p:cNvPr id="177" name="Shape 177"/>
+          <p:cNvSpPr/>
+          <p:nvPr/>
+        </p:nvSpPr>
+        <p:spPr>
+          <a:xfrm>
+            <a:off x="6637200" y="1960120"/>
+            <a:ext cx="2029600" cy="330000"/>
+          </a:xfrm>
+          <a:prstGeom prst="rect">
+            <a:avLst/>
+          </a:prstGeom>
+          <a:solidFill>
+            <a:srgbClr val="CFE0D8"/>
+          </a:solidFill>
+          <a:ln>
+            <a:noFill/>
+          </a:ln>
+        </p:spPr>
+      </p:sp>
+      <p:sp>
+        <p:nvSpPr>
+          <p:cNvPr id="178" name="Text 178"/>
+          <p:cNvSpPr txBox="1"/>
+          <p:nvPr/>
+        </p:nvSpPr>
+        <p:spPr>
+          <a:xfrm>
+            <a:off x="6637200" y="1960120"/>
+            <a:ext cx="2029600" cy="330000"/>
+          </a:xfrm>
+          <a:prstGeom prst="rect">
+            <a:avLst/>
+          </a:prstGeom>
+          <a:noFill/>
+          <a:ln>
+            <a:noFill/>
+          </a:ln>
+        </p:spPr>
+        <p:txBody>
+          <a:bodyPr wrap="square" lIns="0" tIns="0" rIns="0" bIns="0" rtlCol="0" anchor="ctr">
+            <a:normAutofit/>
+          </a:bodyPr>
+          <a:lstStyle/>
+          <a:p>
+            <a:pPr algn="ctr" indent="0" marL="0">
+              <a:spcAft>
+                <a:spcPts val="0"/>
+              </a:spcAft>
+              <a:buNone/>
+            </a:pPr>
+            <a:r>
+              <a:rPr lang="zh-CN" sz="1050" b="1" dirty="0">
+                <a:solidFill>
+                  <a:srgbClr val="1E3D34"/>
+                </a:solidFill>
+                <a:latin typeface="Consolas"/>
+                <a:ea typeface="Microsoft YaHei"/>
+                <a:cs typeface="Consolas"/>
+              </a:rPr>
+              <a:t xml:space="preserve">[19, 22]</a:t>
+            </a:r>
+          </a:p>
+        </p:txBody>
+      </p:sp>
+      <p:sp>
+        <p:nvSpPr>
+          <p:cNvPr id="179" name="Shape 179"/>
+          <p:cNvSpPr/>
+          <p:nvPr/>
+        </p:nvSpPr>
+        <p:spPr>
+          <a:xfrm>
+            <a:off x="3857200" y="2310120"/>
+            <a:ext cx="360000" cy="330000"/>
+          </a:xfrm>
+          <a:prstGeom prst="rect">
+            <a:avLst/>
+          </a:prstGeom>
+          <a:solidFill>
+            <a:srgbClr val="F1F4F2"/>
+          </a:solidFill>
+          <a:ln>
+            <a:noFill/>
+          </a:ln>
+        </p:spPr>
+      </p:sp>
+      <p:sp>
+        <p:nvSpPr>
+          <p:cNvPr id="180" name="Text 180"/>
+          <p:cNvSpPr txBox="1"/>
+          <p:nvPr/>
+        </p:nvSpPr>
+        <p:spPr>
+          <a:xfrm>
+            <a:off x="3857200" y="2310120"/>
+            <a:ext cx="360000" cy="330000"/>
+          </a:xfrm>
+          <a:prstGeom prst="rect">
+            <a:avLst/>
+          </a:prstGeom>
+          <a:noFill/>
+          <a:ln>
+            <a:noFill/>
+          </a:ln>
+        </p:spPr>
+        <p:txBody>
+          <a:bodyPr wrap="square" lIns="0" tIns="0" rIns="0" bIns="0" rtlCol="0" anchor="ctr">
+            <a:normAutofit/>
+          </a:bodyPr>
+          <a:lstStyle/>
+          <a:p>
+            <a:pPr algn="ctr" indent="0" marL="0">
+              <a:spcAft>
+                <a:spcPts val="0"/>
+              </a:spcAft>
+              <a:buNone/>
+            </a:pPr>
+            <a:r>
+              <a:rPr lang="zh-CN" sz="1050" dirty="0">
+                <a:solidFill>
+                  <a:srgbClr val="2B2B2B"/>
+                </a:solidFill>
+                <a:latin typeface="Consolas"/>
+                <a:ea typeface="Microsoft YaHei"/>
+                <a:cs typeface="Consolas"/>
+              </a:rPr>
+              <a:t xml:space="preserve">1</a:t>
+            </a:r>
+          </a:p>
+        </p:txBody>
+      </p:sp>
+      <p:sp>
+        <p:nvSpPr>
+          <p:cNvPr id="181" name="Shape 181"/>
+          <p:cNvSpPr/>
+          <p:nvPr/>
+        </p:nvSpPr>
+        <p:spPr>
+          <a:xfrm>
+            <a:off x="4237200" y="2310120"/>
+            <a:ext cx="360000" cy="330000"/>
+          </a:xfrm>
+          <a:prstGeom prst="rect">
+            <a:avLst/>
+          </a:prstGeom>
+          <a:solidFill>
+            <a:srgbClr val="F1F4F2"/>
+          </a:solidFill>
+          <a:ln>
+            <a:noFill/>
+          </a:ln>
+        </p:spPr>
+      </p:sp>
+      <p:sp>
+        <p:nvSpPr>
+          <p:cNvPr id="182" name="Text 182"/>
+          <p:cNvSpPr txBox="1"/>
+          <p:nvPr/>
+        </p:nvSpPr>
+        <p:spPr>
+          <a:xfrm>
+            <a:off x="4237200" y="2310120"/>
+            <a:ext cx="360000" cy="330000"/>
+          </a:xfrm>
+          <a:prstGeom prst="rect">
+            <a:avLst/>
+          </a:prstGeom>
+          <a:noFill/>
+          <a:ln>
+            <a:noFill/>
+          </a:ln>
+        </p:spPr>
+        <p:txBody>
+          <a:bodyPr wrap="square" lIns="0" tIns="0" rIns="0" bIns="0" rtlCol="0" anchor="ctr">
+            <a:normAutofit/>
+          </a:bodyPr>
+          <a:lstStyle/>
+          <a:p>
+            <a:pPr algn="ctr" indent="0" marL="0">
+              <a:spcAft>
+                <a:spcPts val="0"/>
+              </a:spcAft>
+              <a:buNone/>
+            </a:pPr>
+            <a:r>
+              <a:rPr lang="zh-CN" sz="1050" dirty="0">
+                <a:solidFill>
+                  <a:srgbClr val="2B2B2B"/>
+                </a:solidFill>
+                <a:latin typeface="Consolas"/>
+                <a:ea typeface="Microsoft YaHei"/>
+                <a:cs typeface="Consolas"/>
+              </a:rPr>
+              <a:t xml:space="preserve">0</a:t>
+            </a:r>
+          </a:p>
+        </p:txBody>
+      </p:sp>
+      <p:sp>
+        <p:nvSpPr>
+          <p:cNvPr id="183" name="Shape 183"/>
+          <p:cNvSpPr/>
+          <p:nvPr/>
+        </p:nvSpPr>
+        <p:spPr>
+          <a:xfrm>
+            <a:off x="4617200" y="2310120"/>
+            <a:ext cx="380000" cy="330000"/>
+          </a:xfrm>
+          <a:prstGeom prst="rect">
+            <a:avLst/>
+          </a:prstGeom>
+          <a:solidFill>
+            <a:srgbClr val="F1F4F2"/>
+          </a:solidFill>
+          <a:ln>
+            <a:noFill/>
+          </a:ln>
+        </p:spPr>
+      </p:sp>
+      <p:sp>
+        <p:nvSpPr>
+          <p:cNvPr id="184" name="Text 184"/>
+          <p:cNvSpPr txBox="1"/>
+          <p:nvPr/>
+        </p:nvSpPr>
+        <p:spPr>
+          <a:xfrm>
+            <a:off x="4617200" y="2310120"/>
+            <a:ext cx="380000" cy="330000"/>
+          </a:xfrm>
+          <a:prstGeom prst="rect">
+            <a:avLst/>
+          </a:prstGeom>
+          <a:noFill/>
+          <a:ln>
+            <a:noFill/>
+          </a:ln>
+        </p:spPr>
+        <p:txBody>
+          <a:bodyPr wrap="square" lIns="0" tIns="0" rIns="0" bIns="0" rtlCol="0" anchor="ctr">
+            <a:normAutofit/>
+          </a:bodyPr>
+          <a:lstStyle/>
+          <a:p>
+            <a:pPr algn="ctr" indent="0" marL="0">
+              <a:spcAft>
+                <a:spcPts val="0"/>
+              </a:spcAft>
+              <a:buNone/>
+            </a:pPr>
+            <a:r>
+              <a:rPr lang="zh-CN" sz="1050" dirty="0">
+                <a:solidFill>
+                  <a:srgbClr val="2B2B2B"/>
+                </a:solidFill>
+                <a:latin typeface="Consolas"/>
+                <a:ea typeface="Microsoft YaHei"/>
+                <a:cs typeface="Consolas"/>
+              </a:rPr>
+              <a:t xml:space="preserve">3</a:t>
+            </a:r>
+          </a:p>
+        </p:txBody>
+      </p:sp>
+      <p:sp>
+        <p:nvSpPr>
+          <p:cNvPr id="185" name="Shape 185"/>
+          <p:cNvSpPr/>
+          <p:nvPr/>
+        </p:nvSpPr>
+        <p:spPr>
+          <a:xfrm>
+            <a:off x="5017200" y="2310120"/>
+            <a:ext cx="700000" cy="330000"/>
+          </a:xfrm>
+          <a:prstGeom prst="rect">
+            <a:avLst/>
+          </a:prstGeom>
+          <a:solidFill>
+            <a:srgbClr val="F1F4F2"/>
+          </a:solidFill>
+          <a:ln>
+            <a:noFill/>
+          </a:ln>
+        </p:spPr>
+      </p:sp>
+      <p:sp>
+        <p:nvSpPr>
+          <p:cNvPr id="186" name="Text 186"/>
+          <p:cNvSpPr txBox="1"/>
+          <p:nvPr/>
+        </p:nvSpPr>
+        <p:spPr>
+          <a:xfrm>
+            <a:off x="5017200" y="2310120"/>
+            <a:ext cx="700000" cy="330000"/>
+          </a:xfrm>
+          <a:prstGeom prst="rect">
+            <a:avLst/>
+          </a:prstGeom>
+          <a:noFill/>
+          <a:ln>
+            <a:noFill/>
+          </a:ln>
+        </p:spPr>
+        <p:txBody>
+          <a:bodyPr wrap="square" lIns="0" tIns="0" rIns="0" bIns="0" rtlCol="0" anchor="ctr">
+            <a:normAutofit/>
+          </a:bodyPr>
+          <a:lstStyle/>
+          <a:p>
+            <a:pPr algn="ctr" indent="0" marL="0">
+              <a:spcAft>
+                <a:spcPts val="0"/>
+              </a:spcAft>
+              <a:buNone/>
+            </a:pPr>
+            <a:r>
+              <a:rPr lang="zh-CN" sz="1050" dirty="0">
+                <a:solidFill>
+                  <a:srgbClr val="2B2B2B"/>
+                </a:solidFill>
+                <a:latin typeface="Consolas"/>
+                <a:ea typeface="Microsoft YaHei"/>
+                <a:cs typeface="Consolas"/>
+              </a:rPr>
+              <a:t xml:space="preserve">[5, 6]</a:t>
+            </a:r>
+          </a:p>
+        </p:txBody>
+      </p:sp>
+      <p:sp>
+        <p:nvSpPr>
+          <p:cNvPr id="187" name="Shape 187"/>
+          <p:cNvSpPr/>
+          <p:nvPr/>
+        </p:nvSpPr>
+        <p:spPr>
+          <a:xfrm>
+            <a:off x="5737200" y="2310120"/>
+            <a:ext cx="880000" cy="330000"/>
+          </a:xfrm>
+          <a:prstGeom prst="rect">
+            <a:avLst/>
+          </a:prstGeom>
+          <a:solidFill>
+            <a:srgbClr val="F1F4F2"/>
+          </a:solidFill>
+          <a:ln>
+            <a:noFill/>
+          </a:ln>
+        </p:spPr>
+      </p:sp>
+      <p:sp>
+        <p:nvSpPr>
+          <p:cNvPr id="188" name="Text 188"/>
+          <p:cNvSpPr txBox="1"/>
+          <p:nvPr/>
+        </p:nvSpPr>
+        <p:spPr>
+          <a:xfrm>
+            <a:off x="5737200" y="2310120"/>
+            <a:ext cx="880000" cy="330000"/>
+          </a:xfrm>
+          <a:prstGeom prst="rect">
+            <a:avLst/>
+          </a:prstGeom>
+          <a:noFill/>
+          <a:ln>
+            <a:noFill/>
+          </a:ln>
+        </p:spPr>
+        <p:txBody>
+          <a:bodyPr wrap="square" lIns="0" tIns="0" rIns="0" bIns="0" rtlCol="0" anchor="ctr">
+            <a:normAutofit/>
+          </a:bodyPr>
+          <a:lstStyle/>
+          <a:p>
+            <a:pPr algn="ctr" indent="0" marL="0">
+              <a:spcAft>
+                <a:spcPts val="0"/>
+              </a:spcAft>
+              <a:buNone/>
+            </a:pPr>
+            <a:r>
+              <a:rPr lang="zh-CN" sz="1050" dirty="0">
+                <a:solidFill>
+                  <a:srgbClr val="2B2B2B"/>
+                </a:solidFill>
+                <a:latin typeface="Consolas"/>
+                <a:ea typeface="Microsoft YaHei"/>
+                <a:cs typeface="Consolas"/>
+              </a:rPr>
+              <a:t xml:space="preserve">[15, 18]</a:t>
+            </a:r>
+          </a:p>
+        </p:txBody>
+      </p:sp>
+      <p:sp>
+        <p:nvSpPr>
+          <p:cNvPr id="189" name="Shape 189"/>
+          <p:cNvSpPr/>
+          <p:nvPr/>
+        </p:nvSpPr>
+        <p:spPr>
+          <a:xfrm>
+            <a:off x="6637200" y="2310120"/>
+            <a:ext cx="2029600" cy="330000"/>
+          </a:xfrm>
+          <a:prstGeom prst="rect">
+            <a:avLst/>
+          </a:prstGeom>
+          <a:solidFill>
+            <a:srgbClr val="F1F4F2"/>
+          </a:solidFill>
+          <a:ln>
+            <a:noFill/>
+          </a:ln>
+        </p:spPr>
+      </p:sp>
+      <p:sp>
+        <p:nvSpPr>
+          <p:cNvPr id="190" name="Text 190"/>
+          <p:cNvSpPr txBox="1"/>
+          <p:nvPr/>
+        </p:nvSpPr>
+        <p:spPr>
+          <a:xfrm>
+            <a:off x="6637200" y="2310120"/>
+            <a:ext cx="2029600" cy="330000"/>
+          </a:xfrm>
+          <a:prstGeom prst="rect">
+            <a:avLst/>
+          </a:prstGeom>
+          <a:noFill/>
+          <a:ln>
+            <a:noFill/>
+          </a:ln>
+        </p:spPr>
+        <p:txBody>
+          <a:bodyPr wrap="square" lIns="0" tIns="0" rIns="0" bIns="0" rtlCol="0" anchor="ctr">
+            <a:normAutofit/>
+          </a:bodyPr>
+          <a:lstStyle/>
+          <a:p>
+            <a:pPr algn="ctr" indent="0" marL="0">
+              <a:spcAft>
+                <a:spcPts val="0"/>
+              </a:spcAft>
+              <a:buNone/>
+            </a:pPr>
+            <a:r>
+              <a:rPr lang="zh-CN" sz="1050" b="1" dirty="0">
+                <a:solidFill>
+                  <a:srgbClr val="1E3D34"/>
+                </a:solidFill>
+                <a:latin typeface="Consolas"/>
+                <a:ea typeface="Microsoft YaHei"/>
+                <a:cs typeface="Consolas"/>
+              </a:rPr>
+              <a:t xml:space="preserve">[15, 18]</a:t>
+            </a:r>
+          </a:p>
+        </p:txBody>
+      </p:sp>
+      <p:sp>
+        <p:nvSpPr>
+          <p:cNvPr id="191" name="Shape 191"/>
+          <p:cNvSpPr/>
+          <p:nvPr/>
+        </p:nvSpPr>
+        <p:spPr>
+          <a:xfrm>
+            <a:off x="3857200" y="2660120"/>
+            <a:ext cx="360000" cy="330000"/>
+          </a:xfrm>
+          <a:prstGeom prst="rect">
+            <a:avLst/>
+          </a:prstGeom>
+          <a:solidFill>
+            <a:srgbClr val="F1F4F2"/>
+          </a:solidFill>
+          <a:ln>
+            <a:noFill/>
+          </a:ln>
+        </p:spPr>
+      </p:sp>
+      <p:sp>
+        <p:nvSpPr>
+          <p:cNvPr id="192" name="Text 192"/>
+          <p:cNvSpPr txBox="1"/>
+          <p:nvPr/>
+        </p:nvSpPr>
+        <p:spPr>
+          <a:xfrm>
+            <a:off x="3857200" y="2660120"/>
+            <a:ext cx="360000" cy="330000"/>
+          </a:xfrm>
+          <a:prstGeom prst="rect">
+            <a:avLst/>
+          </a:prstGeom>
+          <a:noFill/>
+          <a:ln>
+            <a:noFill/>
+          </a:ln>
+        </p:spPr>
+        <p:txBody>
+          <a:bodyPr wrap="square" lIns="0" tIns="0" rIns="0" bIns="0" rtlCol="0" anchor="ctr">
+            <a:normAutofit/>
+          </a:bodyPr>
+          <a:lstStyle/>
+          <a:p>
+            <a:pPr algn="ctr" indent="0" marL="0">
+              <a:spcAft>
+                <a:spcPts val="0"/>
+              </a:spcAft>
+              <a:buNone/>
+            </a:pPr>
+            <a:r>
+              <a:rPr lang="zh-CN" sz="1050" dirty="0">
+                <a:solidFill>
+                  <a:srgbClr val="2B2B2B"/>
+                </a:solidFill>
+                <a:latin typeface="Consolas"/>
+                <a:ea typeface="Microsoft YaHei"/>
+                <a:cs typeface="Consolas"/>
+              </a:rPr>
+              <a:t xml:space="preserve">1</a:t>
+            </a:r>
+          </a:p>
+        </p:txBody>
+      </p:sp>
+      <p:sp>
+        <p:nvSpPr>
+          <p:cNvPr id="193" name="Shape 193"/>
+          <p:cNvSpPr/>
+          <p:nvPr/>
+        </p:nvSpPr>
+        <p:spPr>
+          <a:xfrm>
+            <a:off x="4237200" y="2660120"/>
+            <a:ext cx="360000" cy="330000"/>
+          </a:xfrm>
+          <a:prstGeom prst="rect">
+            <a:avLst/>
+          </a:prstGeom>
+          <a:solidFill>
+            <a:srgbClr val="F1F4F2"/>
+          </a:solidFill>
+          <a:ln>
+            <a:noFill/>
+          </a:ln>
+        </p:spPr>
+      </p:sp>
+      <p:sp>
+        <p:nvSpPr>
+          <p:cNvPr id="194" name="Text 194"/>
+          <p:cNvSpPr txBox="1"/>
+          <p:nvPr/>
+        </p:nvSpPr>
+        <p:spPr>
+          <a:xfrm>
+            <a:off x="4237200" y="2660120"/>
+            <a:ext cx="360000" cy="330000"/>
+          </a:xfrm>
+          <a:prstGeom prst="rect">
+            <a:avLst/>
+          </a:prstGeom>
+          <a:noFill/>
+          <a:ln>
+            <a:noFill/>
+          </a:ln>
+        </p:spPr>
+        <p:txBody>
+          <a:bodyPr wrap="square" lIns="0" tIns="0" rIns="0" bIns="0" rtlCol="0" anchor="ctr">
+            <a:normAutofit/>
+          </a:bodyPr>
+          <a:lstStyle/>
+          <a:p>
+            <a:pPr algn="ctr" indent="0" marL="0">
+              <a:spcAft>
+                <a:spcPts val="0"/>
+              </a:spcAft>
+              <a:buNone/>
+            </a:pPr>
+            <a:r>
+              <a:rPr lang="zh-CN" sz="1050" dirty="0">
+                <a:solidFill>
+                  <a:srgbClr val="2B2B2B"/>
+                </a:solidFill>
+                <a:latin typeface="Consolas"/>
+                <a:ea typeface="Microsoft YaHei"/>
+                <a:cs typeface="Consolas"/>
+              </a:rPr>
+              <a:t xml:space="preserve">1</a:t>
+            </a:r>
+          </a:p>
+        </p:txBody>
+      </p:sp>
+      <p:sp>
+        <p:nvSpPr>
+          <p:cNvPr id="195" name="Shape 195"/>
+          <p:cNvSpPr/>
+          <p:nvPr/>
+        </p:nvSpPr>
+        <p:spPr>
+          <a:xfrm>
+            <a:off x="4617200" y="2660120"/>
+            <a:ext cx="380000" cy="330000"/>
+          </a:xfrm>
+          <a:prstGeom prst="rect">
+            <a:avLst/>
+          </a:prstGeom>
+          <a:solidFill>
+            <a:srgbClr val="F1F4F2"/>
+          </a:solidFill>
+          <a:ln>
+            <a:noFill/>
+          </a:ln>
+        </p:spPr>
+      </p:sp>
+      <p:sp>
+        <p:nvSpPr>
+          <p:cNvPr id="196" name="Text 196"/>
+          <p:cNvSpPr txBox="1"/>
+          <p:nvPr/>
+        </p:nvSpPr>
+        <p:spPr>
+          <a:xfrm>
+            <a:off x="4617200" y="2660120"/>
+            <a:ext cx="380000" cy="330000"/>
+          </a:xfrm>
+          <a:prstGeom prst="rect">
+            <a:avLst/>
+          </a:prstGeom>
+          <a:noFill/>
+          <a:ln>
+            <a:noFill/>
+          </a:ln>
+        </p:spPr>
+        <p:txBody>
+          <a:bodyPr wrap="square" lIns="0" tIns="0" rIns="0" bIns="0" rtlCol="0" anchor="ctr">
+            <a:normAutofit/>
+          </a:bodyPr>
+          <a:lstStyle/>
+          <a:p>
+            <a:pPr algn="ctr" indent="0" marL="0">
+              <a:spcAft>
+                <a:spcPts val="0"/>
+              </a:spcAft>
+              <a:buNone/>
+            </a:pPr>
+            <a:r>
+              <a:rPr lang="zh-CN" sz="1050" dirty="0">
+                <a:solidFill>
+                  <a:srgbClr val="2B2B2B"/>
+                </a:solidFill>
+                <a:latin typeface="Consolas"/>
+                <a:ea typeface="Microsoft YaHei"/>
+                <a:cs typeface="Consolas"/>
+              </a:rPr>
+              <a:t xml:space="preserve">4</a:t>
+            </a:r>
+          </a:p>
+        </p:txBody>
+      </p:sp>
+      <p:sp>
+        <p:nvSpPr>
+          <p:cNvPr id="197" name="Shape 197"/>
+          <p:cNvSpPr/>
+          <p:nvPr/>
+        </p:nvSpPr>
+        <p:spPr>
+          <a:xfrm>
+            <a:off x="5017200" y="2660120"/>
+            <a:ext cx="700000" cy="330000"/>
+          </a:xfrm>
+          <a:prstGeom prst="rect">
+            <a:avLst/>
+          </a:prstGeom>
+          <a:solidFill>
+            <a:srgbClr val="F1F4F2"/>
+          </a:solidFill>
+          <a:ln>
+            <a:noFill/>
+          </a:ln>
+        </p:spPr>
+      </p:sp>
+      <p:sp>
+        <p:nvSpPr>
+          <p:cNvPr id="198" name="Text 198"/>
+          <p:cNvSpPr txBox="1"/>
+          <p:nvPr/>
+        </p:nvSpPr>
+        <p:spPr>
+          <a:xfrm>
+            <a:off x="5017200" y="2660120"/>
+            <a:ext cx="700000" cy="330000"/>
+          </a:xfrm>
+          <a:prstGeom prst="rect">
+            <a:avLst/>
+          </a:prstGeom>
+          <a:noFill/>
+          <a:ln>
+            <a:noFill/>
+          </a:ln>
+        </p:spPr>
+        <p:txBody>
+          <a:bodyPr wrap="square" lIns="0" tIns="0" rIns="0" bIns="0" rtlCol="0" anchor="ctr">
+            <a:normAutofit/>
+          </a:bodyPr>
+          <a:lstStyle/>
+          <a:p>
+            <a:pPr algn="ctr" indent="0" marL="0">
+              <a:spcAft>
+                <a:spcPts val="0"/>
+              </a:spcAft>
+              <a:buNone/>
+            </a:pPr>
+            <a:r>
+              <a:rPr lang="zh-CN" sz="1050" dirty="0">
+                <a:solidFill>
+                  <a:srgbClr val="2B2B2B"/>
+                </a:solidFill>
+                <a:latin typeface="Consolas"/>
+                <a:ea typeface="Microsoft YaHei"/>
+                <a:cs typeface="Consolas"/>
+              </a:rPr>
+              <a:t xml:space="preserve">[7, 8]</a:t>
+            </a:r>
+          </a:p>
+        </p:txBody>
+      </p:sp>
+      <p:sp>
+        <p:nvSpPr>
+          <p:cNvPr id="199" name="Shape 199"/>
+          <p:cNvSpPr/>
+          <p:nvPr/>
+        </p:nvSpPr>
+        <p:spPr>
+          <a:xfrm>
+            <a:off x="5737200" y="2660120"/>
+            <a:ext cx="880000" cy="330000"/>
+          </a:xfrm>
+          <a:prstGeom prst="rect">
+            <a:avLst/>
+          </a:prstGeom>
+          <a:solidFill>
+            <a:srgbClr val="F1F4F2"/>
+          </a:solidFill>
+          <a:ln>
+            <a:noFill/>
+          </a:ln>
+        </p:spPr>
+      </p:sp>
+      <p:sp>
+        <p:nvSpPr>
+          <p:cNvPr id="200" name="Text 200"/>
+          <p:cNvSpPr txBox="1"/>
+          <p:nvPr/>
+        </p:nvSpPr>
+        <p:spPr>
+          <a:xfrm>
+            <a:off x="5737200" y="2660120"/>
+            <a:ext cx="880000" cy="330000"/>
+          </a:xfrm>
+          <a:prstGeom prst="rect">
+            <a:avLst/>
+          </a:prstGeom>
+          <a:noFill/>
+          <a:ln>
+            <a:noFill/>
+          </a:ln>
+        </p:spPr>
+        <p:txBody>
+          <a:bodyPr wrap="square" lIns="0" tIns="0" rIns="0" bIns="0" rtlCol="0" anchor="ctr">
+            <a:normAutofit/>
+          </a:bodyPr>
+          <a:lstStyle/>
+          <a:p>
+            <a:pPr algn="ctr" indent="0" marL="0">
+              <a:spcAft>
+                <a:spcPts val="0"/>
+              </a:spcAft>
+              <a:buNone/>
+            </a:pPr>
+            <a:r>
+              <a:rPr lang="zh-CN" sz="1050" dirty="0">
+                <a:solidFill>
+                  <a:srgbClr val="2B2B2B"/>
+                </a:solidFill>
+                <a:latin typeface="Consolas"/>
+                <a:ea typeface="Microsoft YaHei"/>
+                <a:cs typeface="Consolas"/>
+              </a:rPr>
+              <a:t xml:space="preserve">[28, 32]</a:t>
+            </a:r>
+          </a:p>
+        </p:txBody>
+      </p:sp>
+      <p:sp>
+        <p:nvSpPr>
+          <p:cNvPr id="201" name="Shape 201"/>
+          <p:cNvSpPr/>
+          <p:nvPr/>
+        </p:nvSpPr>
+        <p:spPr>
+          <a:xfrm>
+            <a:off x="6637200" y="2660120"/>
+            <a:ext cx="2029600" cy="330000"/>
+          </a:xfrm>
+          <a:prstGeom prst="rect">
+            <a:avLst/>
+          </a:prstGeom>
+          <a:solidFill>
+            <a:srgbClr val="CFE0D8"/>
+          </a:solidFill>
+          <a:ln>
+            <a:noFill/>
+          </a:ln>
+        </p:spPr>
+      </p:sp>
+      <p:sp>
+        <p:nvSpPr>
+          <p:cNvPr id="202" name="Text 202"/>
+          <p:cNvSpPr txBox="1"/>
+          <p:nvPr/>
+        </p:nvSpPr>
+        <p:spPr>
+          <a:xfrm>
+            <a:off x="6637200" y="2660120"/>
+            <a:ext cx="2029600" cy="330000"/>
+          </a:xfrm>
+          <a:prstGeom prst="rect">
+            <a:avLst/>
+          </a:prstGeom>
+          <a:noFill/>
+          <a:ln>
+            <a:noFill/>
+          </a:ln>
+        </p:spPr>
+        <p:txBody>
+          <a:bodyPr wrap="square" lIns="0" tIns="0" rIns="0" bIns="0" rtlCol="0" anchor="ctr">
+            <a:normAutofit/>
+          </a:bodyPr>
+          <a:lstStyle/>
+          <a:p>
+            <a:pPr algn="ctr" indent="0" marL="0">
+              <a:spcAft>
+                <a:spcPts val="0"/>
+              </a:spcAft>
+              <a:buNone/>
+            </a:pPr>
+            <a:r>
+              <a:rPr lang="zh-CN" sz="1050" b="1" dirty="0">
+                <a:solidFill>
+                  <a:srgbClr val="1E3D34"/>
+                </a:solidFill>
+                <a:latin typeface="Consolas"/>
+                <a:ea typeface="Microsoft YaHei"/>
+                <a:cs typeface="Consolas"/>
+              </a:rPr>
+              <a:t xml:space="preserve">[43, 50]</a:t>
+            </a:r>
+          </a:p>
+        </p:txBody>
+      </p:sp>
+      <p:sp>
+        <p:nvSpPr>
+          <p:cNvPr id="203" name="Text 203"/>
+          <p:cNvSpPr txBox="1"/>
+          <p:nvPr/>
+        </p:nvSpPr>
+        <p:spPr>
+          <a:xfrm>
+            <a:off x="3857200" y="3070120"/>
+            <a:ext cx="4829600" cy="900000"/>
+          </a:xfrm>
+          <a:prstGeom prst="rect">
+            <a:avLst/>
+          </a:prstGeom>
+          <a:noFill/>
+          <a:ln>
+            <a:noFill/>
+          </a:ln>
+        </p:spPr>
+        <p:txBody>
+          <a:bodyPr wrap="square" lIns="0" tIns="0" rIns="0" bIns="0" rtlCol="0" anchor="t">
+            <a:normAutofit/>
+          </a:bodyPr>
+          <a:lstStyle/>
+          <a:p>
+            <a:pPr algn="l" indent="0" marL="0">
+              <a:spcAft>
+                <a:spcPts val="500"/>
+              </a:spcAft>
+              <a:buNone/>
+            </a:pPr>
+            <a:r>
+              <a:rPr lang="zh-CN" sz="1200" dirty="0">
+                <a:solidFill>
+                  <a:srgbClr val="2B2B2B"/>
+                </a:solidFill>
+                <a:latin typeface="Microsoft YaHei"/>
+                <a:ea typeface="Microsoft YaHei"/>
+                <a:cs typeface="Microsoft YaHei"/>
+              </a:rPr>
+              <a:t xml:space="preserve">i=0 的两轮结束得到 C 的第 0 行 [19, 22]；</a:t>
+            </a:r>
+          </a:p>
+          <a:p>
+            <a:pPr algn="l" indent="0" marL="0">
+              <a:spcAft>
+                <a:spcPts val="500"/>
+              </a:spcAft>
+              <a:buNone/>
+            </a:pPr>
+            <a:r>
+              <a:rPr lang="zh-CN" sz="1200" dirty="0">
+                <a:solidFill>
+                  <a:srgbClr val="2B2B2B"/>
+                </a:solidFill>
+                <a:latin typeface="Microsoft YaHei"/>
+                <a:ea typeface="Microsoft YaHei"/>
+                <a:cs typeface="Microsoft YaHei"/>
+              </a:rPr>
+              <a:t xml:space="preserve">i=1 换新的 Ci（又从 [0, 0] 开始），两轮后得到第 1 行 [43, 50]。</a:t>
+            </a:r>
+          </a:p>
+          <a:p>
+            <a:pPr algn="l" indent="0" marL="0">
+              <a:spcAft>
+                <a:spcPts val="0"/>
+              </a:spcAft>
+              <a:buNone/>
+            </a:pPr>
+            <a:r>
+              <a:rPr lang="zh-CN" sz="1100" dirty="0">
+                <a:solidFill>
+                  <a:srgbClr val="3E7C68"/>
+                </a:solidFill>
+                <a:latin typeface="Microsoft YaHei"/>
+                <a:ea typeface="Microsoft YaHei"/>
+                <a:cs typeface="Microsoft YaHei"/>
+              </a:rPr>
+              <a:t xml:space="preserve">绿色格子 = 该行算完，对应结果矩阵 C。</a:t>
+            </a:r>
+          </a:p>
+        </p:txBody>
+      </p:sp>
+    </p:spTree>
+  </p:cSld>
+  <p:clrMapOvr>
+    <a:masterClrMapping/>
+  </p:clrMapOvr>
+</p:sld>
+</file>
+
+<file path=ppt/slides/slide48.xml><?xml version="1.0" encoding="utf-8"?>
+<p:sld xmlns:a="http://schemas.openxmlformats.org/drawingml/2006/main" xmlns:r="http://schemas.openxmlformats.org/officeDocument/2006/relationships" xmlns:p="http://schemas.openxmlformats.org/presentationml/2006/main">
+  <p:cSld name="Slide 12">
+    <p:bg>
+      <p:bgPr>
+        <a:solidFill>
+          <a:srgbClr val="FFFFFF"/>
+        </a:solidFill>
+      </p:bgPr>
+    </p:bg>
+    <p:spTree>
+      <p:nvGrpSpPr>
+        <p:cNvPr id="1" name=""/>
+        <p:cNvGrpSpPr/>
+        <p:nvPr/>
+      </p:nvGrpSpPr>
+      <p:grpSpPr>
+        <a:xfrm>
+          <a:off x="0" y="0"/>
+          <a:ext cx="0" cy="0"/>
+          <a:chOff x="0" y="0"/>
+          <a:chExt cx="0" cy="0"/>
+        </a:xfrm>
+      </p:grpSpPr>
+      <p:sp>
+        <p:nvSpPr>
+          <p:cNvPr id="2" name="Shape 0"/>
+          <p:cNvSpPr/>
+          <p:nvPr/>
+        </p:nvSpPr>
+        <p:spPr>
+          <a:xfrm>
+            <a:off x="365760" y="256032"/>
+            <a:ext cx="475488" cy="475488"/>
+          </a:xfrm>
+          <a:prstGeom prst="ellipse">
+            <a:avLst/>
+          </a:prstGeom>
+          <a:solidFill>
+            <a:srgbClr val="1E3D34"/>
+          </a:solidFill>
+          <a:ln/>
+        </p:spPr>
+      </p:sp>
+      <p:sp>
+        <p:nvSpPr>
+          <p:cNvPr id="3" name="Text 1"/>
+          <p:cNvSpPr txBox="1"/>
+          <p:nvPr/>
+        </p:nvSpPr>
+        <p:spPr>
+          <a:xfrm>
+            <a:off x="365760" y="256032"/>
+            <a:ext cx="475488" cy="475488"/>
+          </a:xfrm>
+          <a:prstGeom prst="rect">
+            <a:avLst/>
+          </a:prstGeom>
+          <a:noFill/>
+          <a:ln/>
+        </p:spPr>
+        <p:txBody>
+          <a:bodyPr wrap="square" lIns="0" tIns="0" rIns="0" bIns="0" rtlCol="0" anchor="ctr"/>
+          <a:lstStyle/>
+          <a:p>
+            <a:pPr algn="ctr" indent="0" marL="0">
+              <a:buNone/>
+            </a:pPr>
+            <a:r>
+              <a:rPr lang="en-US" sz="1100" b="1" dirty="0">
+                <a:solidFill>
+                  <a:srgbClr val="F2B134"/>
+                </a:solidFill>
+                <a:latin typeface="Microsoft YaHei" pitchFamily="34" charset="0"/>
+                <a:ea typeface="Microsoft YaHei" pitchFamily="34" charset="-122"/>
+                <a:cs typeface="Microsoft YaHei" pitchFamily="34" charset="-120"/>
+              </a:rPr>
+              <a:t>1.4</a:t>
+            </a:r>
+            <a:endParaRPr lang="en-US" sz="1100" dirty="0"/>
+          </a:p>
+        </p:txBody>
+      </p:sp>
+      <p:sp>
+        <p:nvSpPr>
+          <p:cNvPr id="4" name="Text 2"/>
+          <p:cNvSpPr txBox="1"/>
+          <p:nvPr/>
+        </p:nvSpPr>
+        <p:spPr>
+          <a:xfrm>
+            <a:off x="960120" y="219456"/>
+            <a:ext cx="6858000" cy="228600"/>
+          </a:xfrm>
+          <a:prstGeom prst="rect">
+            <a:avLst/>
+          </a:prstGeom>
+          <a:noFill/>
+          <a:ln/>
+        </p:spPr>
+        <p:txBody>
+          <a:bodyPr wrap="square" lIns="0" tIns="0" rIns="0" bIns="0" rtlCol="0" anchor="t"/>
+          <a:lstStyle/>
+          <a:p>
+            <a:pPr algn="l" indent="0" marL="0">
+              <a:buNone/>
+            </a:pPr>
+            <a:r>
+              <a:rPr lang="en-US" sz="900" b="1" dirty="0">
+                <a:solidFill>
+                  <a:srgbClr val="3E7C68"/>
+                </a:solidFill>
+                <a:latin typeface="Microsoft YaHei" pitchFamily="34" charset="0"/>
+                <a:ea typeface="Microsoft YaHei" pitchFamily="34" charset="-122"/>
+                <a:cs typeface="Microsoft YaHei" pitchFamily="34" charset="-120"/>
+              </a:rPr>
+              <a:t>1 矩阵 · 矩阵乘法</a:t>
+            </a:r>
+            <a:endParaRPr lang="en-US" sz="900" dirty="0"/>
+          </a:p>
+        </p:txBody>
+      </p:sp>
+      <p:sp>
+        <p:nvSpPr>
+          <p:cNvPr id="5" name="Text 3"/>
+          <p:cNvSpPr txBox="1"/>
+          <p:nvPr/>
+        </p:nvSpPr>
+        <p:spPr>
+          <a:xfrm>
+            <a:off x="960120" y="420624"/>
+            <a:ext cx="7772400" cy="384048"/>
+          </a:xfrm>
+          <a:prstGeom prst="rect">
+            <a:avLst/>
+          </a:prstGeom>
+          <a:noFill/>
+          <a:ln/>
+        </p:spPr>
+        <p:txBody>
+          <a:bodyPr wrap="square" lIns="0" tIns="0" rIns="0" bIns="0" rtlCol="0" anchor="t"/>
+          <a:lstStyle/>
+          <a:p>
+            <a:pPr algn="l" indent="0" marL="0">
+              <a:buNone/>
+            </a:pPr>
+            <a:r>
+              <a:rPr lang="en-US" sz="2000" b="1" dirty="0">
+                <a:solidFill>
+                  <a:srgbClr val="1E3D34"/>
+                </a:solidFill>
+                <a:latin typeface="Microsoft YaHei" pitchFamily="34" charset="0"/>
+                <a:ea typeface="Microsoft YaHei" pitchFamily="34" charset="-122"/>
+                <a:cs typeface="Microsoft YaHei" pitchFamily="34" charset="-120"/>
+              </a:rPr>
+              <a:t>三个优化技巧 + 做题注意</a:t>
+            </a:r>
+            <a:endParaRPr lang="en-US" sz="2000" dirty="0"/>
+          </a:p>
+        </p:txBody>
+      </p:sp>
+      <p:sp>
+        <p:nvSpPr>
+          <p:cNvPr id="6" name="Text 4"/>
+          <p:cNvSpPr txBox="1"/>
+          <p:nvPr/>
+        </p:nvSpPr>
+        <p:spPr>
+          <a:xfrm>
+            <a:off x="8503920" y="4828032"/>
+            <a:ext cx="457200" cy="228600"/>
+          </a:xfrm>
+          <a:prstGeom prst="rect">
+            <a:avLst/>
+          </a:prstGeom>
+          <a:noFill/>
+          <a:ln/>
+        </p:spPr>
+        <p:txBody>
+          <a:bodyPr wrap="square" lIns="0" tIns="0" rIns="0" bIns="0" rtlCol="0" anchor="t"/>
+          <a:lstStyle/>
+          <a:p>
+            <a:pPr algn="r" indent="0" marL="0">
+              <a:buNone/>
+            </a:pPr>
+            <a:r>
+              <a:rPr lang="en-US" sz="900" dirty="0">
+                <a:solidFill>
+                  <a:srgbClr val="6B7B74"/>
+                </a:solidFill>
+                <a:latin typeface="Microsoft YaHei" pitchFamily="34" charset="0"/>
+                <a:ea typeface="Microsoft YaHei" pitchFamily="34" charset="-122"/>
+                <a:cs typeface="Microsoft YaHei" pitchFamily="34" charset="-120"/>
+              </a:rPr>
+              <a:t>15</a:t>
+            </a:r>
+            <a:endParaRPr lang="en-US" sz="900" dirty="0"/>
+          </a:p>
+        </p:txBody>
+      </p:sp>
+      <p:sp>
+        <p:nvSpPr>
+          <p:cNvPr id="204" name="Shape 204"/>
+          <p:cNvSpPr/>
+          <p:nvPr/>
+        </p:nvSpPr>
+        <p:spPr>
+          <a:xfrm>
+            <a:off x="457200" y="960120"/>
+            <a:ext cx="2640000" cy="2450000"/>
+          </a:xfrm>
+          <a:prstGeom prst="roundRect">
+            <a:avLst>
+              <a:gd name="adj" fmla="val 4000"/>
+            </a:avLst>
+          </a:prstGeom>
+          <a:solidFill>
+            <a:srgbClr val="F1F4F2"/>
+          </a:solidFill>
+          <a:ln>
+            <a:noFill/>
+          </a:ln>
+        </p:spPr>
+      </p:sp>
+      <p:sp>
+        <p:nvSpPr>
+          <p:cNvPr id="205" name="Shape 205"/>
+          <p:cNvSpPr/>
+          <p:nvPr/>
+        </p:nvSpPr>
+        <p:spPr>
+          <a:xfrm>
+            <a:off x="567200" y="1050000"/>
+            <a:ext cx="300000" cy="300000"/>
+          </a:xfrm>
+          <a:prstGeom prst="ellipse">
+            <a:avLst/>
+          </a:prstGeom>
+          <a:solidFill>
+            <a:srgbClr val="1E3D34"/>
+          </a:solidFill>
+          <a:ln>
+            <a:noFill/>
+          </a:ln>
+        </p:spPr>
+      </p:sp>
+      <p:sp>
+        <p:nvSpPr>
+          <p:cNvPr id="206" name="Text 206"/>
+          <p:cNvSpPr txBox="1"/>
+          <p:nvPr/>
+        </p:nvSpPr>
+        <p:spPr>
+          <a:xfrm>
+            <a:off x="567200" y="1050000"/>
+            <a:ext cx="300000" cy="300000"/>
+          </a:xfrm>
+          <a:prstGeom prst="rect">
+            <a:avLst/>
+          </a:prstGeom>
+          <a:noFill/>
+          <a:ln>
+            <a:noFill/>
+          </a:ln>
+        </p:spPr>
+        <p:txBody>
+          <a:bodyPr wrap="square" lIns="0" tIns="0" rIns="0" bIns="0" rtlCol="0" anchor="ctr">
+            <a:normAutofit/>
+          </a:bodyPr>
+          <a:lstStyle/>
+          <a:p>
+            <a:pPr algn="ctr" indent="0" marL="0">
+              <a:spcAft>
+                <a:spcPts val="0"/>
+              </a:spcAft>
+              <a:buNone/>
+            </a:pPr>
+            <a:r>
+              <a:rPr lang="zh-CN" sz="1200" b="1" dirty="0">
+                <a:solidFill>
+                  <a:srgbClr val="F2B134"/>
+                </a:solidFill>
+                <a:latin typeface="Microsoft YaHei"/>
+                <a:ea typeface="Microsoft YaHei"/>
+                <a:cs typeface="Microsoft YaHei"/>
+              </a:rPr>
+              <a:t xml:space="preserve">1</a:t>
+            </a:r>
+          </a:p>
+        </p:txBody>
+      </p:sp>
+      <p:sp>
+        <p:nvSpPr>
+          <p:cNvPr id="207" name="Text 207"/>
+          <p:cNvSpPr txBox="1"/>
+          <p:nvPr/>
+        </p:nvSpPr>
+        <p:spPr>
+          <a:xfrm>
+            <a:off x="927200" y="1050000"/>
+            <a:ext cx="2080000" cy="300000"/>
+          </a:xfrm>
+          <a:prstGeom prst="rect">
+            <a:avLst/>
+          </a:prstGeom>
+          <a:noFill/>
+          <a:ln>
+            <a:noFill/>
+          </a:ln>
+        </p:spPr>
+        <p:txBody>
+          <a:bodyPr wrap="square" lIns="0" tIns="0" rIns="0" bIns="0" rtlCol="0" anchor="ctr">
+            <a:normAutofit/>
+          </a:bodyPr>
+          <a:lstStyle/>
+          <a:p>
+            <a:pPr algn="l" indent="0" marL="0">
+              <a:spcAft>
+                <a:spcPts val="0"/>
+              </a:spcAft>
+              <a:buNone/>
+            </a:pPr>
+            <a:r>
+              <a:rPr lang="zh-CN" sz="1150" b="1" dirty="0">
+                <a:solidFill>
+                  <a:srgbClr val="1E3D34"/>
+                </a:solidFill>
+                <a:latin typeface="Microsoft YaHei"/>
+                <a:ea typeface="Microsoft YaHei"/>
+                <a:cs typeface="Microsoft YaHei"/>
+              </a:rPr>
+              <a:t xml:space="preserve">局部变量，少一次索引</a:t>
+            </a:r>
+          </a:p>
+        </p:txBody>
+      </p:sp>
+      <p:sp>
+        <p:nvSpPr>
+          <p:cNvPr id="208" name="Text 208"/>
+          <p:cNvSpPr txBox="1"/>
+          <p:nvPr/>
+        </p:nvSpPr>
+        <p:spPr>
+          <a:xfrm>
+            <a:off x="587200" y="1450000"/>
+            <a:ext cx="2380000" cy="700000"/>
+          </a:xfrm>
+          <a:prstGeom prst="rect">
+            <a:avLst/>
+          </a:prstGeom>
+          <a:noFill/>
+          <a:ln>
+            <a:noFill/>
+          </a:ln>
+        </p:spPr>
+        <p:txBody>
+          <a:bodyPr wrap="square" lIns="0" tIns="0" rIns="0" bIns="0" rtlCol="0" anchor="t">
+            <a:normAutofit/>
+          </a:bodyPr>
+          <a:lstStyle/>
+          <a:p>
+            <a:pPr algn="l" indent="0" marL="0">
+              <a:spcAft>
+                <a:spcPts val="0"/>
+              </a:spcAft>
+              <a:buNone/>
+            </a:pPr>
+            <a:r>
+              <a:rPr lang="zh-CN" sz="1000" dirty="0">
+                <a:solidFill>
+                  <a:srgbClr val="2B2B2B"/>
+                </a:solidFill>
+                <a:latin typeface="Consolas"/>
+                <a:ea typeface="Microsoft YaHei"/>
+                <a:cs typeface="Consolas"/>
+              </a:rPr>
+              <a:t xml:space="preserve">Ai = A[i]</a:t>
+            </a:r>
+          </a:p>
+          <a:p>
+            <a:pPr algn="l" indent="0" marL="0">
+              <a:spcAft>
+                <a:spcPts val="0"/>
+              </a:spcAft>
+              <a:buNone/>
+            </a:pPr>
+            <a:r>
+              <a:rPr lang="zh-CN" sz="1000" dirty="0">
+                <a:solidFill>
+                  <a:srgbClr val="2B2B2B"/>
+                </a:solidFill>
+                <a:latin typeface="Consolas"/>
+                <a:ea typeface="Microsoft YaHei"/>
+                <a:cs typeface="Consolas"/>
+              </a:rPr>
+              <a:t xml:space="preserve">Ci = C[i]</a:t>
+            </a:r>
+          </a:p>
+          <a:p>
+            <a:pPr algn="l" indent="0" marL="0">
+              <a:spcAft>
+                <a:spcPts val="0"/>
+              </a:spcAft>
+              <a:buNone/>
+            </a:pPr>
+            <a:r>
+              <a:rPr lang="zh-CN" sz="1000" dirty="0">
+                <a:solidFill>
+                  <a:srgbClr val="2B2B2B"/>
+                </a:solidFill>
+                <a:latin typeface="Consolas"/>
+                <a:ea typeface="Microsoft YaHei"/>
+                <a:cs typeface="Consolas"/>
+              </a:rPr>
+              <a:t xml:space="preserve">Bt, v = B[t], Ai[t]</a:t>
+            </a:r>
+          </a:p>
+        </p:txBody>
+      </p:sp>
+      <p:sp>
+        <p:nvSpPr>
+          <p:cNvPr id="209" name="Text 209"/>
+          <p:cNvSpPr txBox="1"/>
+          <p:nvPr/>
+        </p:nvSpPr>
+        <p:spPr>
+          <a:xfrm>
+            <a:off x="587200" y="2200000"/>
+            <a:ext cx="2380000" cy="1150000"/>
+          </a:xfrm>
+          <a:prstGeom prst="rect">
+            <a:avLst/>
+          </a:prstGeom>
+          <a:noFill/>
+          <a:ln>
+            <a:noFill/>
+          </a:ln>
+        </p:spPr>
+        <p:txBody>
+          <a:bodyPr wrap="square" lIns="0" tIns="0" rIns="0" bIns="0" rtlCol="0" anchor="t">
+            <a:normAutofit/>
+          </a:bodyPr>
+          <a:lstStyle/>
+          <a:p>
+            <a:pPr algn="l" indent="0" marL="0">
+              <a:spcAft>
+                <a:spcPts val="0"/>
+              </a:spcAft>
+              <a:buNone/>
+            </a:pPr>
+            <a:r>
+              <a:rPr lang="zh-CN" sz="1200" dirty="0">
+                <a:solidFill>
+                  <a:srgbClr val="2B2B2B"/>
+                </a:solidFill>
+                <a:latin typeface="Microsoft YaHei"/>
+                <a:ea typeface="Microsoft YaHei"/>
+                <a:cs typeface="Microsoft YaHei"/>
+              </a:rPr>
+              <a:t xml:space="preserve">内层只剩一维索引 Ci[j] += v*Bt[j]，比反复写 C[i][j] 快。Ci 和 C[i] 是同一个列表，改 Ci 就是改 C。</a:t>
+            </a:r>
+          </a:p>
+        </p:txBody>
+      </p:sp>
+      <p:sp>
+        <p:nvSpPr>
+          <p:cNvPr id="210" name="Shape 210"/>
+          <p:cNvSpPr/>
+          <p:nvPr/>
+        </p:nvSpPr>
+        <p:spPr>
+          <a:xfrm>
+            <a:off x="3252000" y="960120"/>
+            <a:ext cx="2640000" cy="2450000"/>
+          </a:xfrm>
+          <a:prstGeom prst="roundRect">
+            <a:avLst>
+              <a:gd name="adj" fmla="val 4000"/>
+            </a:avLst>
+          </a:prstGeom>
+          <a:solidFill>
+            <a:srgbClr val="F1F4F2"/>
+          </a:solidFill>
+          <a:ln>
+            <a:noFill/>
+          </a:ln>
+        </p:spPr>
+      </p:sp>
+      <p:sp>
+        <p:nvSpPr>
+          <p:cNvPr id="211" name="Shape 211"/>
+          <p:cNvSpPr/>
+          <p:nvPr/>
+        </p:nvSpPr>
+        <p:spPr>
+          <a:xfrm>
+            <a:off x="3362000" y="1050000"/>
+            <a:ext cx="300000" cy="300000"/>
+          </a:xfrm>
+          <a:prstGeom prst="ellipse">
+            <a:avLst/>
+          </a:prstGeom>
+          <a:solidFill>
+            <a:srgbClr val="1E3D34"/>
+          </a:solidFill>
+          <a:ln>
+            <a:noFill/>
+          </a:ln>
+        </p:spPr>
+      </p:sp>
+      <p:sp>
+        <p:nvSpPr>
+          <p:cNvPr id="212" name="Text 212"/>
+          <p:cNvSpPr txBox="1"/>
+          <p:nvPr/>
+        </p:nvSpPr>
+        <p:spPr>
+          <a:xfrm>
+            <a:off x="3362000" y="1050000"/>
+            <a:ext cx="300000" cy="300000"/>
+          </a:xfrm>
+          <a:prstGeom prst="rect">
+            <a:avLst/>
+          </a:prstGeom>
+          <a:noFill/>
+          <a:ln>
+            <a:noFill/>
+          </a:ln>
+        </p:spPr>
+        <p:txBody>
+          <a:bodyPr wrap="square" lIns="0" tIns="0" rIns="0" bIns="0" rtlCol="0" anchor="ctr">
+            <a:normAutofit/>
+          </a:bodyPr>
+          <a:lstStyle/>
+          <a:p>
+            <a:pPr algn="ctr" indent="0" marL="0">
+              <a:spcAft>
+                <a:spcPts val="0"/>
+              </a:spcAft>
+              <a:buNone/>
+            </a:pPr>
+            <a:r>
+              <a:rPr lang="zh-CN" sz="1200" b="1" dirty="0">
+                <a:solidFill>
+                  <a:srgbClr val="F2B134"/>
+                </a:solidFill>
+                <a:latin typeface="Microsoft YaHei"/>
+                <a:ea typeface="Microsoft YaHei"/>
+                <a:cs typeface="Microsoft YaHei"/>
+              </a:rPr>
+              <a:t xml:space="preserve">2</a:t>
+            </a:r>
+          </a:p>
+        </p:txBody>
+      </p:sp>
+      <p:sp>
+        <p:nvSpPr>
+          <p:cNvPr id="213" name="Text 213"/>
+          <p:cNvSpPr txBox="1"/>
+          <p:nvPr/>
+        </p:nvSpPr>
+        <p:spPr>
+          <a:xfrm>
+            <a:off x="3722000" y="1050000"/>
+            <a:ext cx="2080000" cy="300000"/>
+          </a:xfrm>
+          <a:prstGeom prst="rect">
+            <a:avLst/>
+          </a:prstGeom>
+          <a:noFill/>
+          <a:ln>
+            <a:noFill/>
+          </a:ln>
+        </p:spPr>
+        <p:txBody>
+          <a:bodyPr wrap="square" lIns="0" tIns="0" rIns="0" bIns="0" rtlCol="0" anchor="ctr">
+            <a:normAutofit/>
+          </a:bodyPr>
+          <a:lstStyle/>
+          <a:p>
+            <a:pPr algn="l" indent="0" marL="0">
+              <a:spcAft>
+                <a:spcPts val="0"/>
+              </a:spcAft>
+              <a:buNone/>
+            </a:pPr>
+            <a:r>
+              <a:rPr lang="zh-CN" sz="1150" b="1" dirty="0">
+                <a:solidFill>
+                  <a:srgbClr val="1E3D34"/>
+                </a:solidFill>
+                <a:latin typeface="Microsoft YaHei"/>
+                <a:ea typeface="Microsoft YaHei"/>
+                <a:cs typeface="Microsoft YaHei"/>
+              </a:rPr>
+              <a:t xml:space="preserve">跳过 0，稀疏时更快</a:t>
+            </a:r>
+          </a:p>
+        </p:txBody>
+      </p:sp>
+      <p:sp>
+        <p:nvSpPr>
+          <p:cNvPr id="214" name="Text 214"/>
+          <p:cNvSpPr txBox="1"/>
+          <p:nvPr/>
+        </p:nvSpPr>
+        <p:spPr>
+          <a:xfrm>
+            <a:off x="3382000" y="1450000"/>
+            <a:ext cx="2380000" cy="700000"/>
+          </a:xfrm>
+          <a:prstGeom prst="rect">
+            <a:avLst/>
+          </a:prstGeom>
+          <a:noFill/>
+          <a:ln>
+            <a:noFill/>
+          </a:ln>
+        </p:spPr>
+        <p:txBody>
+          <a:bodyPr wrap="square" lIns="0" tIns="0" rIns="0" bIns="0" rtlCol="0" anchor="t">
+            <a:normAutofit/>
+          </a:bodyPr>
+          <a:lstStyle/>
+          <a:p>
+            <a:pPr algn="l" indent="0" marL="0">
+              <a:spcAft>
+                <a:spcPts val="0"/>
+              </a:spcAft>
+              <a:buNone/>
+            </a:pPr>
+            <a:r>
+              <a:rPr lang="zh-CN" sz="1000" dirty="0">
+                <a:solidFill>
+                  <a:srgbClr val="2B2B2B"/>
+                </a:solidFill>
+                <a:latin typeface="Consolas"/>
+                <a:ea typeface="Microsoft YaHei"/>
+                <a:cs typeface="Consolas"/>
+              </a:rPr>
+              <a:t xml:space="preserve">if Ai[t]:</a:t>
+            </a:r>
+          </a:p>
+          <a:p>
+            <a:pPr algn="l" indent="0" marL="0">
+              <a:spcAft>
+                <a:spcPts val="0"/>
+              </a:spcAft>
+              <a:buNone/>
+            </a:pPr>
+            <a:r>
+              <a:rPr lang="zh-CN" sz="1000" dirty="0">
+                <a:solidFill>
+                  <a:srgbClr val="2B2B2B"/>
+                </a:solidFill>
+                <a:latin typeface="Consolas"/>
+                <a:ea typeface="Microsoft YaHei"/>
+                <a:cs typeface="Consolas"/>
+              </a:rPr>
+              <a:t xml:space="preserve">    …内层 n 次循环…</a:t>
+            </a:r>
+          </a:p>
+        </p:txBody>
+      </p:sp>
+      <p:sp>
+        <p:nvSpPr>
+          <p:cNvPr id="215" name="Text 215"/>
+          <p:cNvSpPr txBox="1"/>
+          <p:nvPr/>
+        </p:nvSpPr>
+        <p:spPr>
+          <a:xfrm>
+            <a:off x="3382000" y="2200000"/>
+            <a:ext cx="2380000" cy="1150000"/>
+          </a:xfrm>
+          <a:prstGeom prst="rect">
+            <a:avLst/>
+          </a:prstGeom>
+          <a:noFill/>
+          <a:ln>
+            <a:noFill/>
+          </a:ln>
+        </p:spPr>
+        <p:txBody>
+          <a:bodyPr wrap="square" lIns="0" tIns="0" rIns="0" bIns="0" rtlCol="0" anchor="t">
+            <a:normAutofit/>
+          </a:bodyPr>
+          <a:lstStyle/>
+          <a:p>
+            <a:pPr algn="l" indent="0" marL="0">
+              <a:spcAft>
+                <a:spcPts val="0"/>
+              </a:spcAft>
+              <a:buNone/>
+            </a:pPr>
+            <a:r>
+              <a:rPr lang="zh-CN" sz="1200" dirty="0">
+                <a:solidFill>
+                  <a:srgbClr val="2B2B2B"/>
+                </a:solidFill>
+                <a:latin typeface="Microsoft YaHei"/>
+                <a:ea typeface="Microsoft YaHei"/>
+                <a:cs typeface="Microsoft YaHei"/>
+              </a:rPr>
+              <a:t xml:space="preserve">A[i][t]=0 时，这一轮加的全是 0，直接跳过整个内层循环。0 越多，省得越多。</a:t>
+            </a:r>
+          </a:p>
+        </p:txBody>
+      </p:sp>
+      <p:sp>
+        <p:nvSpPr>
+          <p:cNvPr id="216" name="Shape 216"/>
+          <p:cNvSpPr/>
+          <p:nvPr/>
+        </p:nvSpPr>
+        <p:spPr>
+          <a:xfrm>
+            <a:off x="6046800" y="960120"/>
+            <a:ext cx="2640000" cy="2450000"/>
+          </a:xfrm>
+          <a:prstGeom prst="roundRect">
+            <a:avLst>
+              <a:gd name="adj" fmla="val 4000"/>
+            </a:avLst>
+          </a:prstGeom>
+          <a:solidFill>
+            <a:srgbClr val="F1F4F2"/>
+          </a:solidFill>
+          <a:ln>
+            <a:noFill/>
+          </a:ln>
+        </p:spPr>
+      </p:sp>
+      <p:sp>
+        <p:nvSpPr>
+          <p:cNvPr id="217" name="Shape 217"/>
+          <p:cNvSpPr/>
+          <p:nvPr/>
+        </p:nvSpPr>
+        <p:spPr>
+          <a:xfrm>
+            <a:off x="6156800" y="1050000"/>
+            <a:ext cx="300000" cy="300000"/>
+          </a:xfrm>
+          <a:prstGeom prst="ellipse">
+            <a:avLst/>
+          </a:prstGeom>
+          <a:solidFill>
+            <a:srgbClr val="1E3D34"/>
+          </a:solidFill>
+          <a:ln>
+            <a:noFill/>
+          </a:ln>
+        </p:spPr>
+      </p:sp>
+      <p:sp>
+        <p:nvSpPr>
+          <p:cNvPr id="218" name="Text 218"/>
+          <p:cNvSpPr txBox="1"/>
+          <p:nvPr/>
+        </p:nvSpPr>
+        <p:spPr>
+          <a:xfrm>
+            <a:off x="6156800" y="1050000"/>
+            <a:ext cx="300000" cy="300000"/>
+          </a:xfrm>
+          <a:prstGeom prst="rect">
+            <a:avLst/>
+          </a:prstGeom>
+          <a:noFill/>
+          <a:ln>
+            <a:noFill/>
+          </a:ln>
+        </p:spPr>
+        <p:txBody>
+          <a:bodyPr wrap="square" lIns="0" tIns="0" rIns="0" bIns="0" rtlCol="0" anchor="ctr">
+            <a:normAutofit/>
+          </a:bodyPr>
+          <a:lstStyle/>
+          <a:p>
+            <a:pPr algn="ctr" indent="0" marL="0">
+              <a:spcAft>
+                <a:spcPts val="0"/>
+              </a:spcAft>
+              <a:buNone/>
+            </a:pPr>
+            <a:r>
+              <a:rPr lang="zh-CN" sz="1200" b="1" dirty="0">
+                <a:solidFill>
+                  <a:srgbClr val="F2B134"/>
+                </a:solidFill>
+                <a:latin typeface="Microsoft YaHei"/>
+                <a:ea typeface="Microsoft YaHei"/>
+                <a:cs typeface="Microsoft YaHei"/>
+              </a:rPr>
+              <a:t xml:space="preserve">3</a:t>
+            </a:r>
+          </a:p>
+        </p:txBody>
+      </p:sp>
+      <p:sp>
+        <p:nvSpPr>
+          <p:cNvPr id="219" name="Text 219"/>
+          <p:cNvSpPr txBox="1"/>
+          <p:nvPr/>
+        </p:nvSpPr>
+        <p:spPr>
+          <a:xfrm>
+            <a:off x="6516800" y="1050000"/>
+            <a:ext cx="2080000" cy="300000"/>
+          </a:xfrm>
+          <a:prstGeom prst="rect">
+            <a:avLst/>
+          </a:prstGeom>
+          <a:noFill/>
+          <a:ln>
+            <a:noFill/>
+          </a:ln>
+        </p:spPr>
+        <p:txBody>
+          <a:bodyPr wrap="square" lIns="0" tIns="0" rIns="0" bIns="0" rtlCol="0" anchor="ctr">
+            <a:normAutofit/>
+          </a:bodyPr>
+          <a:lstStyle/>
+          <a:p>
+            <a:pPr algn="l" indent="0" marL="0">
+              <a:spcAft>
+                <a:spcPts val="0"/>
+              </a:spcAft>
+              <a:buNone/>
+            </a:pPr>
+            <a:r>
+              <a:rPr lang="zh-CN" sz="1150" b="1" dirty="0">
+                <a:solidFill>
+                  <a:srgbClr val="1E3D34"/>
+                </a:solidFill>
+                <a:latin typeface="Microsoft YaHei"/>
+                <a:ea typeface="Microsoft YaHei"/>
+                <a:cs typeface="Microsoft YaHei"/>
+              </a:rPr>
+              <a:t xml:space="preserve">按行连续访问</a:t>
+            </a:r>
+          </a:p>
+        </p:txBody>
+      </p:sp>
+      <p:sp>
+        <p:nvSpPr>
+          <p:cNvPr id="220" name="Text 220"/>
+          <p:cNvSpPr txBox="1"/>
+          <p:nvPr/>
+        </p:nvSpPr>
+        <p:spPr>
+          <a:xfrm>
+            <a:off x="6176800" y="1450000"/>
+            <a:ext cx="2380000" cy="700000"/>
+          </a:xfrm>
+          <a:prstGeom prst="rect">
+            <a:avLst/>
+          </a:prstGeom>
+          <a:noFill/>
+          <a:ln>
+            <a:noFill/>
+          </a:ln>
+        </p:spPr>
+        <p:txBody>
+          <a:bodyPr wrap="square" lIns="0" tIns="0" rIns="0" bIns="0" rtlCol="0" anchor="t">
+            <a:normAutofit/>
+          </a:bodyPr>
+          <a:lstStyle/>
+          <a:p>
+            <a:pPr algn="l" indent="0" marL="0">
+              <a:spcAft>
+                <a:spcPts val="0"/>
+              </a:spcAft>
+              <a:buNone/>
+            </a:pPr>
+            <a:r>
+              <a:rPr lang="zh-CN" sz="1000" dirty="0">
+                <a:solidFill>
+                  <a:srgbClr val="2B2B2B"/>
+                </a:solidFill>
+                <a:latin typeface="Consolas"/>
+                <a:ea typeface="Microsoft YaHei"/>
+                <a:cs typeface="Consolas"/>
+              </a:rPr>
+              <a:t xml:space="preserve">Bt[j]   # j 变化</a:t>
+            </a:r>
+          </a:p>
+          <a:p>
+            <a:pPr algn="l" indent="0" marL="0">
+              <a:spcAft>
+                <a:spcPts val="0"/>
+              </a:spcAft>
+              <a:buNone/>
+            </a:pPr>
+            <a:r>
+              <a:rPr lang="zh-CN" sz="1000" dirty="0">
+                <a:solidFill>
+                  <a:srgbClr val="2B2B2B"/>
+                </a:solidFill>
+                <a:latin typeface="Consolas"/>
+                <a:ea typeface="Microsoft YaHei"/>
+                <a:cs typeface="Consolas"/>
+              </a:rPr>
+              <a:t xml:space="preserve">（同一行，挨着读）</a:t>
+            </a:r>
+          </a:p>
+        </p:txBody>
+      </p:sp>
+      <p:sp>
+        <p:nvSpPr>
+          <p:cNvPr id="221" name="Text 221"/>
+          <p:cNvSpPr txBox="1"/>
+          <p:nvPr/>
+        </p:nvSpPr>
+        <p:spPr>
+          <a:xfrm>
+            <a:off x="6176800" y="2200000"/>
+            <a:ext cx="2380000" cy="1150000"/>
+          </a:xfrm>
+          <a:prstGeom prst="rect">
+            <a:avLst/>
+          </a:prstGeom>
+          <a:noFill/>
+          <a:ln>
+            <a:noFill/>
+          </a:ln>
+        </p:spPr>
+        <p:txBody>
+          <a:bodyPr wrap="square" lIns="0" tIns="0" rIns="0" bIns="0" rtlCol="0" anchor="t">
+            <a:normAutofit/>
+          </a:bodyPr>
+          <a:lstStyle/>
+          <a:p>
+            <a:pPr algn="l" indent="0" marL="0">
+              <a:spcAft>
+                <a:spcPts val="0"/>
+              </a:spcAft>
+              <a:buNone/>
+            </a:pPr>
+            <a:r>
+              <a:rPr lang="zh-CN" sz="1200" dirty="0">
+                <a:solidFill>
+                  <a:srgbClr val="2B2B2B"/>
+                </a:solidFill>
+                <a:latin typeface="Microsoft YaHei"/>
+                <a:ea typeface="Microsoft YaHei"/>
+                <a:cs typeface="Microsoft YaHei"/>
+              </a:rPr>
+              <a:t xml:space="preserve">经典写法内层是 B[t][j] 且 t 在变，是在 B 的“列”上跳着读；本页写法内层沿着 B 的一行走，更顺。</a:t>
+            </a:r>
+          </a:p>
+        </p:txBody>
+      </p:sp>
+      <p:sp>
+        <p:nvSpPr>
+          <p:cNvPr id="222" name="Shape 222"/>
+          <p:cNvSpPr/>
+          <p:nvPr/>
+        </p:nvSpPr>
+        <p:spPr>
+          <a:xfrm>
+            <a:off x="457200" y="3530000"/>
+            <a:ext cx="8229600" cy="1200000"/>
+          </a:xfrm>
+          <a:prstGeom prst="roundRect">
+            <a:avLst>
+              <a:gd name="adj" fmla="val 4000"/>
+            </a:avLst>
+          </a:prstGeom>
+          <a:solidFill>
+            <a:srgbClr val="FFF6E0"/>
+          </a:solidFill>
+          <a:ln>
+            <a:noFill/>
+          </a:ln>
+        </p:spPr>
+      </p:sp>
+      <p:sp>
+        <p:nvSpPr>
+          <p:cNvPr id="223" name="Text 223"/>
+          <p:cNvSpPr txBox="1"/>
+          <p:nvPr/>
+        </p:nvSpPr>
+        <p:spPr>
+          <a:xfrm>
+            <a:off x="607200" y="3590000"/>
+            <a:ext cx="7929600" cy="1100000"/>
+          </a:xfrm>
+          <a:prstGeom prst="rect">
+            <a:avLst/>
+          </a:prstGeom>
+          <a:noFill/>
+          <a:ln>
+            <a:noFill/>
+          </a:ln>
+        </p:spPr>
+        <p:txBody>
+          <a:bodyPr wrap="square" lIns="0" tIns="0" rIns="0" bIns="0" rtlCol="0" anchor="t">
+            <a:normAutofit/>
+          </a:bodyPr>
+          <a:lstStyle/>
+          <a:p>
+            <a:pPr algn="l" indent="0" marL="0">
+              <a:spcAft>
+                <a:spcPts val="600"/>
+              </a:spcAft>
+              <a:buNone/>
+            </a:pPr>
+            <a:r>
+              <a:rPr lang="zh-CN" sz="1200" b="1" dirty="0">
+                <a:solidFill>
+                  <a:srgbClr val="A06A00"/>
+                </a:solidFill>
+                <a:latin typeface="Microsoft YaHei"/>
+                <a:ea typeface="Microsoft YaHei"/>
+                <a:cs typeface="Microsoft YaHei"/>
+              </a:rPr>
+              <a:t xml:space="preserve">别忘了：这些只是常数优化，复杂度仍是 O(m·k·n)</a:t>
+            </a:r>
+          </a:p>
+          <a:p>
+            <a:pPr algn="l" indent="0" marL="0">
+              <a:spcAft>
+                <a:spcPts val="500"/>
+              </a:spcAft>
+              <a:buNone/>
+            </a:pPr>
+            <a:r>
+              <a:rPr lang="zh-CN" sz="1200" dirty="0">
+                <a:solidFill>
+                  <a:srgbClr val="2B2B2B"/>
+                </a:solidFill>
+                <a:latin typeface="Microsoft YaHei"/>
+                <a:ea typeface="Microsoft YaHei"/>
+                <a:cs typeface="Microsoft YaHei"/>
+              </a:rPr>
+              <a:t xml:space="preserve">n=200 约 8×10⁶ 次可以；n=1000 约 10⁹ 次，Python 必然 TLE。</a:t>
+            </a:r>
+          </a:p>
+          <a:p>
+            <a:pPr algn="l" indent="0" marL="0">
+              <a:spcAft>
+                <a:spcPts val="0"/>
+              </a:spcAft>
+              <a:buNone/>
+            </a:pPr>
+            <a:r>
+              <a:rPr lang="zh-CN" sz="1200" b="1" dirty="0">
+                <a:solidFill>
+                  <a:srgbClr val="1E3D34"/>
+                </a:solidFill>
+                <a:latin typeface="Microsoft YaHei"/>
+                <a:ea typeface="Microsoft YaHei"/>
+                <a:cs typeface="Microsoft YaHei"/>
+              </a:rPr>
+              <a:t xml:space="preserve">这段代码默认 A 的列数 = B 的行数。做 E18161 先判断：len(A[0]) != len(B) 时输出 Error!，不要直接乘。</a:t>
+            </a:r>
           </a:p>
         </p:txBody>
       </p:sp>
